--- a/docs/pitch/BezProgu-prezentacja.pptx
+++ b/docs/pitch/BezProgu-prezentacja.pptx
@@ -116,32 +116,32 @@
   <p:extLst>
     <p:ext uri="{521415D9-36F7-43E2-AB2F-B90AF26B5E84}">
       <p14:sectionLst xmlns:p14="http://schemas.microsoft.com/office/powerpoint/2010/main">
-        <p14:section name="Problem i rozwiązanie" id="{b584fc4c-29cd-3b8c-ce42-745ffc4970b5}">
+        <p14:section name="Problem i rozwiązanie" id="{56a12b18-0d71-92b9-fab5-847bdf7e6150}">
           <p14:sldIdLst>
             <p14:sldId id="256"/>
             <p14:sldId id="257"/>
             <p14:sldId id="258"/>
           </p14:sldIdLst>
         </p14:section>
-        <p14:section name="Demonstracja" id="{1311522e-5588-3eb1-6b7d-f3fcdb8233e4}">
+        <p14:section name="Demonstracja" id="{f743c9b4-40e7-4339-3af7-bc031519f589}">
           <p14:sldIdLst>
             <p14:sldId id="259"/>
             <p14:sldId id="260"/>
           </p14:sldIdLst>
         </p14:section>
-        <p14:section name="Dane i architektura" id="{94b392c5-aea1-9678-6a32-c51cd2a9920e}">
+        <p14:section name="Dane i architektura" id="{85411b1b-23ef-3a89-e7f4-6fdb58308f15}">
           <p14:sldIdLst>
             <p14:sldId id="261"/>
             <p14:sldId id="262"/>
           </p14:sldIdLst>
         </p14:section>
-        <p14:section name="Biznes i wdrożenie" id="{59e5fb1e-4ce6-3a94-272b-a385a2380a38}">
+        <p14:section name="Biznes i wdrożenie" id="{47dee407-6b4e-5df3-59e7-0f272e38a0c7}">
           <p14:sldIdLst>
             <p14:sldId id="263"/>
             <p14:sldId id="264"/>
           </p14:sldIdLst>
         </p14:section>
-        <p14:section name="Podsumowanie" id="{483ec1ee-504c-458e-1ce9-eee942070a92}">
+        <p14:section name="Podsumowanie" id="{3f085c56-9e50-55a2-f524-b71c8ec8383d}">
           <p14:sldIdLst>
             <p14:sldId id="265"/>
           </p14:sldIdLst>
@@ -1512,15 +1512,39 @@
           </a:p>
         </p:txBody>
       </p:sp>
-      <p:sp>
-        <p:nvSpPr>
-          <p:cNvPr id="3" name="Text 0"/>
+      <p:pic>
+        <p:nvPicPr>
+          <p:cNvPr id="3" name="Image 0" descr="Znak BezProgu">    </p:cNvPr>
+          <p:cNvPicPr>
+            <a:picLocks noChangeAspect="1"/>
+          </p:cNvPicPr>
+          <p:nvPr/>
+        </p:nvPicPr>
+        <p:blipFill>
+          <a:blip r:embed="rId1"/>
+          <a:stretch>
+            <a:fillRect/>
+          </a:stretch>
+        </p:blipFill>
+        <p:spPr>
+          <a:xfrm>
+            <a:off x="548640" y="6391656"/>
+            <a:ext cx="198144" cy="292608"/>
+          </a:xfrm>
+          <a:prstGeom prst="rect">
+            <a:avLst/>
+          </a:prstGeom>
+        </p:spPr>
+      </p:pic>
+      <p:sp>
+        <p:nvSpPr>
+          <p:cNvPr id="4" name="Text 0"/>
           <p:cNvSpPr/>
           <p:nvPr/>
         </p:nvSpPr>
         <p:spPr>
           <a:xfrm>
-            <a:off x="548640" y="6400800"/>
+            <a:off x="841248" y="6400800"/>
             <a:ext cx="5486400" cy="274320"/>
           </a:xfrm>
           <a:prstGeom prst="rect">
@@ -2103,14 +2127,65 @@
       </p:sp>
       <p:sp>
         <p:nvSpPr>
-          <p:cNvPr id="3" name="Text 1"/>
+          <p:cNvPr id="3" name="Logo – tło"/>
+          <p:cNvSpPr/>
+          <p:nvPr/>
+        </p:nvSpPr>
+        <p:spPr>
+          <a:xfrm>
+            <a:off x="548640" y="1298448"/>
+            <a:ext cx="2919858" cy="1143000"/>
+          </a:xfrm>
+          <a:prstGeom prst="roundRect">
+            <a:avLst>
+              <a:gd name="adj" fmla="val 18000"/>
+            </a:avLst>
+          </a:prstGeom>
+          <a:solidFill>
+            <a:schemeClr val="bg1"/>
+          </a:solidFill>
+          <a:ln w="12700">
+            <a:solidFill>
+              <a:schemeClr val="bg1"/>
+            </a:solidFill>
+            <a:prstDash val="solid"/>
+          </a:ln>
+        </p:spPr>
+      </p:sp>
+      <p:pic>
+        <p:nvPicPr>
+          <p:cNvPr id="4" name="Logo BezProgu" descr="Logo BezProgu">    </p:cNvPr>
+          <p:cNvPicPr>
+            <a:picLocks noChangeAspect="1"/>
+          </p:cNvPicPr>
+          <p:nvPr/>
+        </p:nvPicPr>
+        <p:blipFill>
+          <a:blip r:embed="rId1"/>
+          <a:stretch>
+            <a:fillRect/>
+          </a:stretch>
+        </p:blipFill>
+        <p:spPr>
+          <a:xfrm>
+            <a:off x="822960" y="1527048"/>
+            <a:ext cx="2371218" cy="685800"/>
+          </a:xfrm>
+          <a:prstGeom prst="rect">
+            <a:avLst/>
+          </a:prstGeom>
+        </p:spPr>
+      </p:pic>
+      <p:sp>
+        <p:nvSpPr>
+          <p:cNvPr id="5" name="Text 2"/>
           <p:cNvSpPr txBox="1"/>
           <p:nvPr/>
         </p:nvSpPr>
         <p:spPr>
           <a:xfrm>
-            <a:off x="548640" y="1325880"/>
-            <a:ext cx="7132320" cy="1097280"/>
+            <a:off x="548640" y="2514600"/>
+            <a:ext cx="7132320" cy="640080"/>
           </a:xfrm>
           <a:prstGeom prst="rect">
             <a:avLst/>
@@ -2126,53 +2201,14 @@
               <a:buNone/>
             </a:pPr>
             <a:r>
-              <a:rPr lang="en-US" sz="6600" b="1" dirty="0">
-                <a:solidFill>
-                  <a:schemeClr val="bg1"/>
+              <a:rPr lang="en-US" sz="3200" b="1" dirty="0">
+                <a:solidFill>
+                  <a:schemeClr val="accent2"/>
                 </a:solidFill>
                 <a:latin typeface="Arial" pitchFamily="34" charset="0"/>
                 <a:ea typeface="Arial" pitchFamily="34" charset="-122"/>
                 <a:cs typeface="Arial" pitchFamily="34" charset="-120"/>
               </a:rPr>
-              <a:t>BezProgu</a:t>
-            </a:r>
-            <a:endParaRPr lang="en-US" sz="6600" dirty="0"/>
-          </a:p>
-        </p:txBody>
-      </p:sp>
-      <p:sp>
-        <p:nvSpPr>
-          <p:cNvPr id="4" name="Text 2"/>
-          <p:cNvSpPr txBox="1"/>
-          <p:nvPr/>
-        </p:nvSpPr>
-        <p:spPr>
-          <a:xfrm>
-            <a:off x="548640" y="2514600"/>
-            <a:ext cx="7132320" cy="640080"/>
-          </a:xfrm>
-          <a:prstGeom prst="rect">
-            <a:avLst/>
-          </a:prstGeom>
-          <a:noFill/>
-          <a:ln/>
-        </p:spPr>
-        <p:txBody>
-          <a:bodyPr wrap="square" lIns="0" tIns="0" rIns="0" bIns="0" rtlCol="0" anchor="ctr"/>
-          <a:lstStyle/>
-          <a:p>
-            <a:pPr indent="0" marL="0">
-              <a:buNone/>
-            </a:pPr>
-            <a:r>
-              <a:rPr lang="en-US" sz="3200" b="1" dirty="0">
-                <a:solidFill>
-                  <a:schemeClr val="accent2"/>
-                </a:solidFill>
-                <a:latin typeface="Arial" pitchFamily="34" charset="0"/>
-                <a:ea typeface="Arial" pitchFamily="34" charset="-122"/>
-                <a:cs typeface="Arial" pitchFamily="34" charset="-120"/>
-              </a:rPr>
               <a:t>Nie »dostępne«. Konkretnie.</a:t>
             </a:r>
             <a:endParaRPr lang="en-US" sz="3200" dirty="0"/>
@@ -2181,7 +2217,7 @@
       </p:sp>
       <p:sp>
         <p:nvSpPr>
-          <p:cNvPr id="5" name="Text 3"/>
+          <p:cNvPr id="6" name="Text 3"/>
           <p:cNvSpPr txBox="1"/>
           <p:nvPr/>
         </p:nvSpPr>
@@ -2217,7 +2253,7 @@
       </p:sp>
       <p:sp>
         <p:nvSpPr>
-          <p:cNvPr id="6" name="Osoby na wózkach – tło"/>
+          <p:cNvPr id="7" name="Osoby na wózkach – tło"/>
           <p:cNvSpPr/>
           <p:nvPr/>
         </p:nvSpPr>
@@ -2242,14 +2278,14 @@
       </p:sp>
       <p:pic>
         <p:nvPicPr>
-          <p:cNvPr id="7" name="Osoby na wózkach" descr="Osoby na wózkach">    </p:cNvPr>
+          <p:cNvPr id="8" name="Osoby na wózkach" descr="Osoby na wózkach">    </p:cNvPr>
           <p:cNvPicPr>
             <a:picLocks noChangeAspect="1"/>
           </p:cNvPicPr>
           <p:nvPr/>
         </p:nvPicPr>
         <p:blipFill>
-          <a:blip r:embed="rId1"/>
+          <a:blip r:embed="rId2"/>
           <a:stretch>
             <a:fillRect/>
           </a:stretch>
@@ -2266,7 +2302,7 @@
       </p:pic>
       <p:sp>
         <p:nvSpPr>
-          <p:cNvPr id="8" name="Text 5"/>
+          <p:cNvPr id="9" name="Text 5"/>
           <p:cNvSpPr txBox="1"/>
           <p:nvPr/>
         </p:nvSpPr>
@@ -2302,7 +2338,7 @@
       </p:sp>
       <p:sp>
         <p:nvSpPr>
-          <p:cNvPr id="9" name="Rodzice z wózkami – tło"/>
+          <p:cNvPr id="10" name="Rodzice z wózkami – tło"/>
           <p:cNvSpPr/>
           <p:nvPr/>
         </p:nvSpPr>
@@ -2327,14 +2363,14 @@
       </p:sp>
       <p:pic>
         <p:nvPicPr>
-          <p:cNvPr id="10" name="Rodzice z wózkami" descr="Rodzice z wózkami">    </p:cNvPr>
+          <p:cNvPr id="11" name="Rodzice z wózkami" descr="Rodzice z wózkami">    </p:cNvPr>
           <p:cNvPicPr>
             <a:picLocks noChangeAspect="1"/>
           </p:cNvPicPr>
           <p:nvPr/>
         </p:nvPicPr>
         <p:blipFill>
-          <a:blip r:embed="rId2"/>
+          <a:blip r:embed="rId3"/>
           <a:stretch>
             <a:fillRect/>
           </a:stretch>
@@ -2351,7 +2387,7 @@
       </p:pic>
       <p:sp>
         <p:nvSpPr>
-          <p:cNvPr id="11" name="Text 7"/>
+          <p:cNvPr id="12" name="Text 7"/>
           <p:cNvSpPr txBox="1"/>
           <p:nvPr/>
         </p:nvSpPr>
@@ -2387,7 +2423,7 @@
       </p:sp>
       <p:sp>
         <p:nvSpPr>
-          <p:cNvPr id="12" name="Karta miejsca Sukiennice – ramka"/>
+          <p:cNvPr id="13" name="Karta miejsca Sukiennice – ramka"/>
           <p:cNvSpPr/>
           <p:nvPr/>
         </p:nvSpPr>
@@ -2421,14 +2457,14 @@
       </p:sp>
       <p:pic>
         <p:nvPicPr>
-          <p:cNvPr id="13" name="Karta miejsca Sukiennice" descr="Zrzut ekranu aplikacji BezProgu: Karta miejsca Sukiennice">    </p:cNvPr>
+          <p:cNvPr id="14" name="Karta miejsca Sukiennice" descr="Zrzut ekranu aplikacji BezProgu: Karta miejsca Sukiennice">    </p:cNvPr>
           <p:cNvPicPr>
             <a:picLocks noChangeAspect="1"/>
           </p:cNvPicPr>
           <p:nvPr/>
         </p:nvPicPr>
         <p:blipFill>
-          <a:blip r:embed="rId3"/>
+          <a:blip r:embed="rId4"/>
           <a:stretch>
             <a:fillRect/>
           </a:stretch>
@@ -2959,14 +2995,65 @@
       </p:sp>
       <p:sp>
         <p:nvSpPr>
-          <p:cNvPr id="13" name="Text 9"/>
+          <p:cNvPr id="13" name="Logo – tło"/>
+          <p:cNvSpPr/>
+          <p:nvPr/>
+        </p:nvSpPr>
+        <p:spPr>
+          <a:xfrm>
+            <a:off x="548640" y="5230368"/>
+            <a:ext cx="2014764" cy="777240"/>
+          </a:xfrm>
+          <a:prstGeom prst="roundRect">
+            <a:avLst>
+              <a:gd name="adj" fmla="val 18000"/>
+            </a:avLst>
+          </a:prstGeom>
+          <a:solidFill>
+            <a:schemeClr val="bg1"/>
+          </a:solidFill>
+          <a:ln w="12700">
+            <a:solidFill>
+              <a:schemeClr val="bg1"/>
+            </a:solidFill>
+            <a:prstDash val="solid"/>
+          </a:ln>
+        </p:spPr>
+      </p:sp>
+      <p:pic>
+        <p:nvPicPr>
+          <p:cNvPr id="14" name="Logo BezProgu" descr="Logo BezProgu">    </p:cNvPr>
+          <p:cNvPicPr>
+            <a:picLocks noChangeAspect="1"/>
+          </p:cNvPicPr>
+          <p:nvPr/>
+        </p:nvPicPr>
+        <p:blipFill>
+          <a:blip r:embed="rId3"/>
+          <a:stretch>
+            <a:fillRect/>
+          </a:stretch>
+        </p:blipFill>
+        <p:spPr>
+          <a:xfrm>
+            <a:off x="749808" y="5385816"/>
+            <a:ext cx="1612428" cy="466344"/>
+          </a:xfrm>
+          <a:prstGeom prst="rect">
+            <a:avLst/>
+          </a:prstGeom>
+        </p:spPr>
+      </p:pic>
+      <p:sp>
+        <p:nvSpPr>
+          <p:cNvPr id="15" name="Text 10"/>
           <p:cNvSpPr txBox="1"/>
           <p:nvPr/>
         </p:nvSpPr>
         <p:spPr>
           <a:xfrm>
-            <a:off x="548640" y="5349240"/>
-            <a:ext cx="3657600" cy="548640"/>
+            <a:off x="2880360" y="5349240"/>
+            <a:ext cx="2743200" cy="548640"/>
           </a:xfrm>
           <a:prstGeom prst="rect">
             <a:avLst/>
@@ -2998,7 +3085,7 @@
       </p:sp>
       <p:sp>
         <p:nvSpPr>
-          <p:cNvPr id="14" name="Text 10"/>
+          <p:cNvPr id="16" name="Text 11"/>
           <p:cNvSpPr txBox="1"/>
           <p:nvPr/>
         </p:nvSpPr>
@@ -10064,7 +10151,7 @@
         <p:spPr>
           <a:xfrm>
             <a:off x="548640" y="1280160"/>
-            <a:ext cx="4114800" cy="5043747"/>
+            <a:ext cx="4114800" cy="5073211"/>
           </a:xfrm>
           <a:prstGeom prst="roundRect">
             <a:avLst>
@@ -10099,7 +10186,7 @@
         <p:spPr>
           <a:xfrm>
             <a:off x="731520" y="1463040"/>
-            <a:ext cx="3749040" cy="4175067"/>
+            <a:ext cx="3749040" cy="4204531"/>
           </a:xfrm>
           <a:prstGeom prst="rect">
             <a:avLst/>
@@ -10114,7 +10201,7 @@
         </p:nvSpPr>
         <p:spPr>
           <a:xfrm>
-            <a:off x="731520" y="5747835"/>
+            <a:off x="731520" y="5777299"/>
             <a:ext cx="3749040" cy="594360"/>
           </a:xfrm>
           <a:prstGeom prst="rect">

--- a/docs/pitch/BezProgu-prezentacja.pptx
+++ b/docs/pitch/BezProgu-prezentacja.pptx
@@ -116,32 +116,32 @@
   <p:extLst>
     <p:ext uri="{521415D9-36F7-43E2-AB2F-B90AF26B5E84}">
       <p14:sectionLst xmlns:p14="http://schemas.microsoft.com/office/powerpoint/2010/main">
-        <p14:section name="Problem i rozwiązanie" id="{56a12b18-0d71-92b9-fab5-847bdf7e6150}">
+        <p14:section name="Problem i rozwiązanie" id="{d0e4e03f-b8d6-5cbe-3448-63c30d3bfc73}">
           <p14:sldIdLst>
             <p14:sldId id="256"/>
             <p14:sldId id="257"/>
             <p14:sldId id="258"/>
           </p14:sldIdLst>
         </p14:section>
-        <p14:section name="Demonstracja" id="{f743c9b4-40e7-4339-3af7-bc031519f589}">
+        <p14:section name="Demonstracja" id="{b95e073d-62bb-5006-e89a-4eedfe247f3a}">
           <p14:sldIdLst>
             <p14:sldId id="259"/>
             <p14:sldId id="260"/>
           </p14:sldIdLst>
         </p14:section>
-        <p14:section name="Dane i architektura" id="{85411b1b-23ef-3a89-e7f4-6fdb58308f15}">
+        <p14:section name="Dane i architektura" id="{41a34c2f-b616-772b-15ed-a7311e8aae66}">
           <p14:sldIdLst>
             <p14:sldId id="261"/>
             <p14:sldId id="262"/>
           </p14:sldIdLst>
         </p14:section>
-        <p14:section name="Biznes i wdrożenie" id="{47dee407-6b4e-5df3-59e7-0f272e38a0c7}">
+        <p14:section name="Biznes i wdrożenie" id="{3794ad39-bfa0-a96e-36d5-c2f59ecbbd25}">
           <p14:sldIdLst>
             <p14:sldId id="263"/>
             <p14:sldId id="264"/>
           </p14:sldIdLst>
         </p14:section>
-        <p14:section name="Podsumowanie" id="{3f085c56-9e50-55a2-f524-b71c8ec8383d}">
+        <p14:section name="Podsumowanie" id="{d803a6b4-fd6c-5373-d4cc-968f75ee8766}">
           <p14:sldIdLst>
             <p14:sldId id="265"/>
           </p14:sldIdLst>
@@ -2134,7 +2134,7 @@
         <p:spPr>
           <a:xfrm>
             <a:off x="548640" y="1298448"/>
-            <a:ext cx="2919858" cy="1143000"/>
+            <a:ext cx="3027317" cy="1143000"/>
           </a:xfrm>
           <a:prstGeom prst="roundRect">
             <a:avLst>
@@ -2169,7 +2169,7 @@
         <p:spPr>
           <a:xfrm>
             <a:off x="822960" y="1527048"/>
-            <a:ext cx="2371218" cy="685800"/>
+            <a:ext cx="2478677" cy="685800"/>
           </a:xfrm>
           <a:prstGeom prst="rect">
             <a:avLst/>
@@ -3002,7 +3002,7 @@
         <p:spPr>
           <a:xfrm>
             <a:off x="548640" y="5230368"/>
-            <a:ext cx="2014764" cy="777240"/>
+            <a:ext cx="2087836" cy="777240"/>
           </a:xfrm>
           <a:prstGeom prst="roundRect">
             <a:avLst>
@@ -3037,7 +3037,7 @@
         <p:spPr>
           <a:xfrm>
             <a:off x="749808" y="5385816"/>
-            <a:ext cx="1612428" cy="466344"/>
+            <a:ext cx="1685500" cy="466344"/>
           </a:xfrm>
           <a:prstGeom prst="rect">
             <a:avLst/>

--- a/docs/pitch/BezProgu-prezentacja.pptx
+++ b/docs/pitch/BezProgu-prezentacja.pptx
@@ -4,6 +4,9 @@
   <p:sldMasterIdLst>
     <p:sldMasterId id="2147483648" r:id="rId1"/>
   </p:sldMasterIdLst>
+  <p:notesMasterIdLst>
+    <p:notesMasterId r:id="rId12"/>
+  </p:notesMasterIdLst>
   <p:sldIdLst>
     <p:sldId id="256" r:id="rId2"/>
     <p:sldId id="257" r:id="rId3"/>
@@ -16,9 +19,6 @@
     <p:sldId id="264" r:id="rId10"/>
     <p:sldId id="265" r:id="rId11"/>
   </p:sldIdLst>
-  <p:notesMasterIdLst>
-    <p:notesMasterId r:id="rId12"/>
-  </p:notesMasterIdLst>
   <p:sldSz cx="12192000" cy="6858000"/>
   <p:notesSz cx="6858000" cy="12192000"/>
   <p:defaultTextStyle>
@@ -116,32 +116,32 @@
   <p:extLst>
     <p:ext uri="{521415D9-36F7-43E2-AB2F-B90AF26B5E84}">
       <p14:sectionLst xmlns:p14="http://schemas.microsoft.com/office/powerpoint/2010/main">
-        <p14:section name="Problem i rozwiązanie" id="{d0e4e03f-b8d6-5cbe-3448-63c30d3bfc73}">
+        <p14:section name="Problem i rozwiązanie" id="{D0E4E03F-B8D6-5CBE-3448-63C30D3BFC73}">
           <p14:sldIdLst>
             <p14:sldId id="256"/>
             <p14:sldId id="257"/>
             <p14:sldId id="258"/>
           </p14:sldIdLst>
         </p14:section>
-        <p14:section name="Demonstracja" id="{b95e073d-62bb-5006-e89a-4eedfe247f3a}">
+        <p14:section name="Demonstracja" id="{B95E073D-62BB-5006-E89A-4EEDFE247F3A}">
           <p14:sldIdLst>
             <p14:sldId id="259"/>
             <p14:sldId id="260"/>
           </p14:sldIdLst>
         </p14:section>
-        <p14:section name="Dane i architektura" id="{41a34c2f-b616-772b-15ed-a7311e8aae66}">
+        <p14:section name="Dane i architektura" id="{41A34C2F-B616-772B-15ED-A7311E8AAE66}">
           <p14:sldIdLst>
             <p14:sldId id="261"/>
             <p14:sldId id="262"/>
           </p14:sldIdLst>
         </p14:section>
-        <p14:section name="Biznes i wdrożenie" id="{3794ad39-bfa0-a96e-36d5-c2f59ecbbd25}">
+        <p14:section name="Biznes i wdrożenie" id="{3794AD39-BFA0-A96E-36D5-C2F59ECBBD25}">
           <p14:sldIdLst>
             <p14:sldId id="263"/>
             <p14:sldId id="264"/>
           </p14:sldIdLst>
         </p14:section>
-        <p14:section name="Podsumowanie" id="{d803a6b4-fd6c-5373-d4cc-968f75ee8766}">
+        <p14:section name="Podsumowanie" id="{D803A6B4-FD6C-5373-D4CC-968F75EE8766}">
           <p14:sldIdLst>
             <p14:sldId id="265"/>
           </p14:sldIdLst>
@@ -177,234 +177,10 @@
           <a:chExt cx="0" cy="0"/>
         </a:xfrm>
       </p:grpSpPr>
-      <p:sp>
-        <p:nvSpPr>
-          <p:cNvPr id="2" name="Header Placeholder 1"/>
-          <p:cNvSpPr>
-            <a:spLocks noGrp="1"/>
-          </p:cNvSpPr>
-          <p:nvPr>
-            <p:ph type="hdr" sz="quarter"/>
-          </p:nvPr>
-        </p:nvSpPr>
-        <p:spPr>
-          <a:xfrm>
-            <a:off x="0" y="0"/>
-            <a:ext cx="2971800" cy="458788"/>
-          </a:xfrm>
-          <a:prstGeom prst="rect">
-            <a:avLst/>
-          </a:prstGeom>
-        </p:spPr>
-        <p:txBody>
-          <a:bodyPr vert="horz" lIns="91440" tIns="45720" rIns="91440" bIns="45720" rtlCol="0"/>
-          <a:lstStyle>
-            <a:lvl1pPr algn="l">
-              <a:defRPr sz="1200"/>
-            </a:lvl1pPr>
-          </a:lstStyle>
-          <a:p>
-            <a:endParaRPr lang="en-US"/>
-          </a:p>
-        </p:txBody>
-      </p:sp>
-      <p:sp>
-        <p:nvSpPr>
-          <p:cNvPr id="3" name="Date Placeholder 2"/>
-          <p:cNvSpPr>
-            <a:spLocks noGrp="1"/>
-          </p:cNvSpPr>
-          <p:nvPr>
-            <p:ph type="dt" idx="1"/>
-          </p:nvPr>
-        </p:nvSpPr>
-        <p:spPr>
-          <a:xfrm>
-            <a:off x="3884613" y="0"/>
-            <a:ext cx="2971800" cy="458788"/>
-          </a:xfrm>
-          <a:prstGeom prst="rect">
-            <a:avLst/>
-          </a:prstGeom>
-        </p:spPr>
-        <p:txBody>
-          <a:bodyPr vert="horz" lIns="91440" tIns="45720" rIns="91440" bIns="45720" rtlCol="0"/>
-          <a:lstStyle>
-            <a:lvl1pPr algn="r">
-              <a:defRPr sz="1200"/>
-            </a:lvl1pPr>
-          </a:lstStyle>
-          <a:p>
-            <a:fld id="{5282F153-3F37-0F45-9E97-73ACFA13230C}" type="datetimeFigureOut">
-              <a:rPr lang="en-US"/>
-              <a:t>7/23/19</a:t>
-            </a:fld>
-            <a:endParaRPr lang="en-US"/>
-          </a:p>
-        </p:txBody>
-      </p:sp>
-      <p:sp>
-        <p:nvSpPr>
-          <p:cNvPr id="4" name="Slide Image Placeholder 3"/>
-          <p:cNvSpPr>
-            <a:spLocks noGrp="1" noRot="1" noChangeAspect="1"/>
-          </p:cNvSpPr>
-          <p:nvPr>
-            <p:ph type="sldImg" idx="2"/>
-          </p:nvPr>
-        </p:nvSpPr>
-        <p:spPr>
-          <a:xfrm>
-            <a:off x="685800" y="1143000"/>
-            <a:ext cx="5486400" cy="3086100"/>
-          </a:xfrm>
-          <a:prstGeom prst="rect">
-            <a:avLst/>
-          </a:prstGeom>
-          <a:noFill/>
-          <a:ln w="12700">
-            <a:solidFill>
-              <a:prstClr val="black"/>
-            </a:solidFill>
-          </a:ln>
-        </p:spPr>
-        <p:txBody>
-          <a:bodyPr vert="horz" lIns="91440" tIns="45720" rIns="91440" bIns="45720" rtlCol="0" anchor="ctr"/>
-          <a:lstStyle/>
-          <a:p>
-            <a:endParaRPr lang="en-US"/>
-          </a:p>
-        </p:txBody>
-      </p:sp>
-      <p:sp>
-        <p:nvSpPr>
-          <p:cNvPr id="5" name="Notes Placeholder 4"/>
-          <p:cNvSpPr>
-            <a:spLocks noGrp="1"/>
-          </p:cNvSpPr>
-          <p:nvPr>
-            <p:ph type="body" sz="quarter" idx="3"/>
-          </p:nvPr>
-        </p:nvSpPr>
-        <p:spPr>
-          <a:xfrm>
-            <a:off x="685800" y="4400550"/>
-            <a:ext cx="5486400" cy="3600450"/>
-          </a:xfrm>
-          <a:prstGeom prst="rect">
-            <a:avLst/>
-          </a:prstGeom>
-        </p:spPr>
-        <p:txBody>
-          <a:bodyPr vert="horz" lIns="91440" tIns="45720" rIns="91440" bIns="45720" rtlCol="0"/>
-          <a:lstStyle/>
-          <a:p>
-            <a:pPr lvl="0"/>
-            <a:r>
-              <a:rPr lang="en-US"/>
-              <a:t>Click to edit Master text styles</a:t>
-            </a:r>
-          </a:p>
-          <a:p>
-            <a:pPr lvl="1"/>
-            <a:r>
-              <a:rPr lang="en-US"/>
-              <a:t>Second level</a:t>
-            </a:r>
-          </a:p>
-          <a:p>
-            <a:pPr lvl="2"/>
-            <a:r>
-              <a:rPr lang="en-US"/>
-              <a:t>Third level</a:t>
-            </a:r>
-          </a:p>
-          <a:p>
-            <a:pPr lvl="3"/>
-            <a:r>
-              <a:rPr lang="en-US"/>
-              <a:t>Fourth level</a:t>
-            </a:r>
-          </a:p>
-          <a:p>
-            <a:pPr lvl="4"/>
-            <a:r>
-              <a:rPr lang="en-US"/>
-              <a:t>Fifth level</a:t>
-            </a:r>
-          </a:p>
-        </p:txBody>
-      </p:sp>
-      <p:sp>
-        <p:nvSpPr>
-          <p:cNvPr id="6" name="Footer Placeholder 5"/>
-          <p:cNvSpPr>
-            <a:spLocks noGrp="1"/>
-          </p:cNvSpPr>
-          <p:nvPr>
-            <p:ph type="ftr" sz="quarter" idx="4"/>
-          </p:nvPr>
-        </p:nvSpPr>
-        <p:spPr>
-          <a:xfrm>
-            <a:off x="0" y="8685213"/>
-            <a:ext cx="2971800" cy="458787"/>
-          </a:xfrm>
-          <a:prstGeom prst="rect">
-            <a:avLst/>
-          </a:prstGeom>
-        </p:spPr>
-        <p:txBody>
-          <a:bodyPr vert="horz" lIns="91440" tIns="45720" rIns="91440" bIns="45720" rtlCol="0" anchor="b"/>
-          <a:lstStyle>
-            <a:lvl1pPr algn="l">
-              <a:defRPr sz="1200"/>
-            </a:lvl1pPr>
-          </a:lstStyle>
-          <a:p>
-            <a:endParaRPr lang="en-US"/>
-          </a:p>
-        </p:txBody>
-      </p:sp>
-      <p:sp>
-        <p:nvSpPr>
-          <p:cNvPr id="7" name="Slide Number Placeholder 6"/>
-          <p:cNvSpPr>
-            <a:spLocks noGrp="1"/>
-          </p:cNvSpPr>
-          <p:nvPr>
-            <p:ph type="sldNum" sz="quarter" idx="5"/>
-          </p:nvPr>
-        </p:nvSpPr>
-        <p:spPr>
-          <a:xfrm>
-            <a:off x="3884613" y="8685213"/>
-            <a:ext cx="2971800" cy="458787"/>
-          </a:xfrm>
-          <a:prstGeom prst="rect">
-            <a:avLst/>
-          </a:prstGeom>
-        </p:spPr>
-        <p:txBody>
-          <a:bodyPr vert="horz" lIns="91440" tIns="45720" rIns="91440" bIns="45720" rtlCol="0" anchor="b"/>
-          <a:lstStyle>
-            <a:lvl1pPr algn="r">
-              <a:defRPr sz="1200"/>
-            </a:lvl1pPr>
-          </a:lstStyle>
-          <a:p>
-            <a:fld id="{CE5E9CC1-C706-0F49-92D6-E571CC5EEA8F}" type="slidenum">
-              <a:rPr lang="en-US"/>
-              <a:t>‹#›</a:t>
-            </a:fld>
-            <a:endParaRPr lang="en-US"/>
-          </a:p>
-        </p:txBody>
-      </p:sp>
     </p:spTree>
     <p:extLst>
       <p:ext uri="{BB962C8B-B14F-4D97-AF65-F5344CB8AC3E}">
-        <p14:creationId xmlns:p14="http://schemas.microsoft.com/office/powerpoint/2010/main" val="1024086991"/>
+        <p14:creationId xmlns:p14="http://schemas.microsoft.com/office/powerpoint/2010/main" val="2005112865"/>
       </p:ext>
     </p:extLst>
   </p:cSld>
@@ -552,7 +328,6 @@
               <a:rPr lang="en-US" dirty="0"/>
               <a:t>BezProgu to narzędzie, które zamiast znaczka „dostępne” pokazuje konkretne parametry miejsca i trasy, dopasowane do potrzeb użytkownika. Prototyp skupia się na dwóch grupach: osobach na wózkach i rodzicach z wózkami dziecięcymi. Na zrzucie: karta Sukiennic (dane przykładowe) dla profilu „wózek”.</a:t>
             </a:r>
-            <a:endParaRPr lang="en-US" dirty="0"/>
           </a:p>
         </p:txBody>
       </p:sp>
@@ -640,7 +415,6 @@
               <a:rPr lang="en-US" dirty="0"/>
               <a:t>Wykonaliśmy podstawową kontrolę dostępności głównego scenariusza: obsługa klawiaturą, komunikaty dla czytników ekranu, kontrast i tekstowa alternatywa mapy. Ograniczenia, które znamy: brak testów z VoiceOver i TalkBack z użytkownikami, mapa nie jest w pełni obsługiwana z klawiatury — dlatego wszystkie informacje z mapy są też w tekście — oraz brak danych o nachyleniu terenu w trasach. Dziękujemy.</a:t>
             </a:r>
-            <a:endParaRPr lang="en-US" dirty="0"/>
           </a:p>
         </p:txBody>
       </p:sp>
@@ -728,7 +502,6 @@
               <a:rPr lang="en-US" dirty="0"/>
               <a:t>Problem nie polega tylko na braku informacji, ale na sposobie ich prezentowania. Znaczek „dostępne” nie mówi, czy wejście ma stopnie, jaka jest szerokość drzwi ani skąd ta informacja pochodzi. Nasze dane: w zaimportowanym centrum Krakowa 79% z 1951 miejsc nie ma w OSM żadnego tagu dostępności, a ponad jedna czwarta istniejących informacji ma ponad 2 lata. Te luki pokazujemy użytkownikowi wprost.</a:t>
             </a:r>
-            <a:endParaRPr lang="en-US" dirty="0"/>
           </a:p>
         </p:txBody>
       </p:sp>
@@ -816,7 +589,6 @@
               <a:rPr lang="en-US" dirty="0"/>
               <a:t>Użytkownik określa swoje bariery: wybiera profil wózka lub wózka dziecięcego albo ustawia własne progi, np. maksymalną wysokość progu i minimalną szerokość drzwi. Nie pytamy o niepełnosprawność, a profil jest zapisany tylko w przeglądarce. Wyniki domyślnie są listą tekstową, co jest też tekstową alternatywą dla mapy. Na karcie miejsca użytkownik sam ocenia, czy miejsce mu odpowiada.</a:t>
             </a:r>
-            <a:endParaRPr lang="en-US" dirty="0"/>
           </a:p>
         </p:txBody>
       </p:sp>
@@ -904,7 +676,6 @@
               <a:rPr lang="en-US" dirty="0"/>
               <a:t>To jest ścieżka demonstracyjna. Sukiennice to obiekt z danymi przykładowymi, które celowo zawierają wszystkie przypadki z wymagań: barierę dla profilu, wejście alternatywne, dane sprzeczne z dwóch źródeł, dane nieaktualne i brak danych. Przy każdym parametrze widać źródło, datę i status. Dane przykładowe są oznaczone na karcie i w wynikach.</a:t>
             </a:r>
-            <a:endParaRPr lang="en-US" dirty="0"/>
           </a:p>
         </p:txBody>
       </p:sp>
@@ -992,7 +763,6 @@
               <a:rPr lang="en-US" dirty="0"/>
               <a:t>Trasy wyznacza GraphHopper na danych OpenStreetMap z profilem dla wózka: schody są zawsze wykluczone, a kostkę brukową użytkownik może omijać — zmienia to przebieg trasy. Nachylenia terenu jeszcze nie uwzględniamy (brak danych wysokościowych) — to jest na liście dalszych prac. Każdy krok ma nawierzchnię i informację o krawężnikach z datą i źródłem; gdy danych nie ma, mówimy to wprost. Krawężniki na tej trasie pochodzą z demonstracyjnego importu i są oznaczone jako dane przykładowe. Zgłoszenie poprawki zajmuje trzy kroki, nie wymaga konta i od razu pojawia się na karcie jako niezweryfikowane.</a:t>
             </a:r>
-            <a:endParaRPr lang="en-US" dirty="0"/>
           </a:p>
         </p:txBody>
       </p:sp>
@@ -1080,7 +850,6 @@
               <a:rPr lang="en-US" dirty="0"/>
               <a:t>Każdy fakt ma źródło, datę obserwacji lub potwierdzenia i status. Trzy statusy przychodzą ze źródła: potwierdzone, z otwartych danych, zgłoszenie użytkownika. Trzy wyliczamy: sprzeczne, może być nieaktualne i brak danych. W demonstracji pokazujemy wszystkie trzy przypadki awarii: dane sprzeczne i niepełne na karcie Sukiennic oraz niedostępne źródło na stronie „Skąd dane” i w wyznaczaniu tras.</a:t>
             </a:r>
-            <a:endParaRPr lang="en-US" dirty="0"/>
           </a:p>
         </p:txBody>
       </p:sp>
@@ -1168,7 +937,6 @@
               <a:rPr lang="en-US" dirty="0"/>
               <a:t>Architektura oddziela pozyskiwanie danych od prezentacji. Każde źródło ma własny importer, który zapisuje fakty do wspólnego modelu i aktualizuje status źródła. Gdy źródło jest niedostępne, dane zostają, a status zmienia się na „niedostępne”. Dla Otwartych Danych Krakowa przygotowaliśmy konektor, ale nie znaleźliśmy zbioru z atrybutami dostępności — dlatego w demo to źródło jest pokazane jako niedostępne. Dodanie miasta to uruchomienie importu z innym obszarem. Częstotliwość odświeżania w tabeli to plan dla usługi — w prototypie import uruchamiamy ręcznie.</a:t>
             </a:r>
-            <a:endParaRPr lang="en-US" dirty="0"/>
           </a:p>
         </p:txBody>
       </p:sp>
@@ -1256,7 +1024,6 @@
               <a:rPr lang="en-US" dirty="0"/>
               <a:t>Użytkownicy końcowi nigdy nie płacą. Przychód pochodzi od obiektów, które chcą pokazać swoją dostępność gościom — np. widget na stronie hotelu, który widać na zrzucie — oraz od platform rezerwacyjnych, dostawców map i miast, które licencjonują dane i API. Kluczowa zasada zaufania: płatny plan nie zmienia statusu wiarygodności ani kolejności wyników. Ceny są propozycją do zweryfikowania w pilotażu.</a:t>
             </a:r>
-            <a:endParaRPr lang="en-US" dirty="0"/>
           </a:p>
         </p:txBody>
       </p:sp>
@@ -1344,7 +1111,6 @@
               <a:rPr lang="en-US" dirty="0"/>
               <a:t>Produkt prowadzi niezależny operator — startup lub organizacja pozarządowa — poza infrastrukturą miasta. Hosting kosztuje kilkaset złotych miesięcznie i można go przenieść do dowolnego dostawcy, bo całość działa w kontenerach Docker na komponentach open source. Nie zbieramy informacji o niepełnosprawności, profil potrzeb zostaje w przeglądarce, a przy zgłoszeniach zapisujemy tylko skrót adresu IP do ochrony przed nadużyciami. Warunek uruchomienia w kolejnym mieście: ekstrakt OSM regionu i, jeśli są, lokalne otwarte zbiory danych.</a:t>
             </a:r>
-            <a:endParaRPr lang="en-US" dirty="0"/>
           </a:p>
         </p:txBody>
       </p:sp>
@@ -1422,6 +1188,7 @@
         <a:solidFill>
           <a:schemeClr val="tx2"/>
         </a:solidFill>
+        <a:effectLst/>
       </p:bgPr>
     </p:bg>
     <p:spTree>
@@ -1454,6 +1221,7 @@
         <a:solidFill>
           <a:schemeClr val="bg1"/>
         </a:solidFill>
+        <a:effectLst/>
       </p:bgPr>
     </p:bg>
     <p:spTree>
@@ -1473,9 +1241,11 @@
       <p:sp>
         <p:nvSpPr>
           <p:cNvPr id="2" name="Text 0"/>
-          <p:cNvSpPr/>
+          <p:cNvSpPr>
+            <a:spLocks noGrp="1"/>
+          </p:cNvSpPr>
           <p:nvPr>
-            <p:ph idx="100" type="title" hasCustomPrompt="1"/>
+            <p:ph type="title" idx="100" hasCustomPrompt="1"/>
           </p:nvPr>
         </p:nvSpPr>
         <p:spPr>
@@ -1492,7 +1262,7 @@
         <p:txBody>
           <a:bodyPr wrap="square" rtlCol="0"/>
           <a:lstStyle>
-            <a:lvl1pPr algn="l" indent="0" marL="0">
+            <a:lvl1pPr marL="0" indent="0" algn="l">
               <a:buNone/>
               <a:defRPr lang="en-US" sz="3000" b="1" dirty="0">
                 <a:solidFill>
@@ -1505,7 +1275,7 @@
             </a:lvl1pPr>
           </a:lstStyle>
           <a:p>
-            <a:pPr algn="l" indent="0" marL="0">
+            <a:pPr marL="0" indent="0" algn="l">
               <a:buNone/>
             </a:pPr>
             <a:endParaRPr lang="en-US" sz="3000" dirty="0"/>
@@ -1514,14 +1284,14 @@
       </p:sp>
       <p:pic>
         <p:nvPicPr>
-          <p:cNvPr id="3" name="Image 0" descr="Znak BezProgu">    </p:cNvPr>
+          <p:cNvPr id="3" name="Image 0" descr="Znak BezProgu"/>
           <p:cNvPicPr>
             <a:picLocks noChangeAspect="1"/>
           </p:cNvPicPr>
           <p:nvPr/>
         </p:nvPicPr>
         <p:blipFill>
-          <a:blip r:embed="rId1"/>
+          <a:blip r:embed="rId2"/>
           <a:stretch>
             <a:fillRect/>
           </a:stretch>
@@ -1557,7 +1327,7 @@
           <a:bodyPr wrap="square" lIns="0" tIns="0" rIns="0" bIns="0" rtlCol="0" anchor="ctr"/>
           <a:lstStyle/>
           <a:p>
-            <a:pPr indent="0" marL="0">
+            <a:pPr marL="0" indent="0">
               <a:buNone/>
             </a:pPr>
             <a:r>
@@ -1595,7 +1365,7 @@
           </a:prstGeom>
           <a:extLst>
             <a:ext uri="{C572A759-6A51-4108-AA02-DFA0A04FC94B}">
-              <ma14:wrappingTextBoxFlag xmlns:ma14="http://schemas.microsoft.com/office/mac/drawingml/2011/main" val="0"/>
+              <ma14:wrappingTextBoxFlag xmlns:ma14="http://schemas.microsoft.com/office/mac/drawingml/2011/main" xmlns="" val="0"/>
             </a:ext>
           </a:extLst>
         </p:spPr>
@@ -1613,8 +1383,8 @@
           <a:p>
             <a:pPr algn="r"/>
             <a:fld id="{F7021451-1387-4CA6-816F-3879F97B5CBC}" type="slidenum">
-              <a:rPr b="0" lang="en-US"/>
-              <a:t>1003</a:t>
+              <a:rPr lang="en-US" b="0"/>
+              <a:t>‹#›</a:t>
             </a:fld>
             <a:endParaRPr lang="en-US"/>
           </a:p>
@@ -1636,6 +1406,7 @@
         <a:solidFill>
           <a:schemeClr val="tx2"/>
         </a:solidFill>
+        <a:effectLst/>
       </p:bgPr>
     </p:bg>
     <p:spTree>
@@ -1655,9 +1426,11 @@
       <p:sp>
         <p:nvSpPr>
           <p:cNvPr id="2" name="Text 0"/>
-          <p:cNvSpPr/>
+          <p:cNvSpPr>
+            <a:spLocks noGrp="1"/>
+          </p:cNvSpPr>
           <p:nvPr>
-            <p:ph idx="100" type="title" hasCustomPrompt="1"/>
+            <p:ph type="title" idx="100" hasCustomPrompt="1"/>
           </p:nvPr>
         </p:nvSpPr>
         <p:spPr>
@@ -1674,7 +1447,7 @@
         <p:txBody>
           <a:bodyPr wrap="square" rtlCol="0"/>
           <a:lstStyle>
-            <a:lvl1pPr algn="l" indent="0" marL="0">
+            <a:lvl1pPr marL="0" indent="0" algn="l">
               <a:buNone/>
               <a:defRPr lang="en-US" sz="3000" b="1" dirty="0">
                 <a:solidFill>
@@ -1687,7 +1460,7 @@
             </a:lvl1pPr>
           </a:lstStyle>
           <a:p>
-            <a:pPr algn="l" indent="0" marL="0">
+            <a:pPr marL="0" indent="0" algn="l">
               <a:buNone/>
             </a:pPr>
             <a:endParaRPr lang="en-US" sz="3000" dirty="0"/>
@@ -1714,7 +1487,7 @@
           </a:prstGeom>
           <a:extLst>
             <a:ext uri="{C572A759-6A51-4108-AA02-DFA0A04FC94B}">
-              <ma14:wrappingTextBoxFlag xmlns:ma14="http://schemas.microsoft.com/office/mac/drawingml/2011/main" val="0"/>
+              <ma14:wrappingTextBoxFlag xmlns:ma14="http://schemas.microsoft.com/office/mac/drawingml/2011/main" xmlns="" val="0"/>
             </a:ext>
           </a:extLst>
         </p:spPr>
@@ -1732,8 +1505,8 @@
           <a:p>
             <a:pPr algn="r"/>
             <a:fld id="{F7021451-1387-4CA6-816F-3879F97B5CBC}" type="slidenum">
-              <a:rPr b="0" lang="en-US"/>
-              <a:t>1004</a:t>
+              <a:rPr lang="en-US" b="0"/>
+              <a:t>‹#›</a:t>
             </a:fld>
             <a:endParaRPr lang="en-US"/>
           </a:p>
@@ -1750,6 +1523,11 @@
 <file path=ppt/slideMasters/slideMaster1.xml><?xml version="1.0" encoding="utf-8"?>
 <p:sldMaster xmlns:a="http://schemas.openxmlformats.org/drawingml/2006/main" xmlns:r="http://schemas.openxmlformats.org/officeDocument/2006/relationships" xmlns:p="http://schemas.openxmlformats.org/presentationml/2006/main">
   <p:cSld>
+    <p:bg>
+      <p:bgRef idx="1001">
+        <a:schemeClr val="bg1"/>
+      </p:bgRef>
+    </p:bg>
     <p:spTree>
       <p:nvGrpSpPr>
         <p:cNvPr id="1" name=""/>
@@ -1784,7 +1562,7 @@
           </a:prstGeom>
           <a:extLst>
             <a:ext uri="{C572A759-6A51-4108-AA02-DFA0A04FC94B}">
-              <ma14:wrappingTextBoxFlag xmlns:ma14="http://schemas.microsoft.com/office/mac/drawingml/2011/main" val="0"/>
+              <ma14:wrappingTextBoxFlag xmlns:ma14="http://schemas.microsoft.com/office/mac/drawingml/2011/main" xmlns="" val="0"/>
             </a:ext>
           </a:extLst>
         </p:spPr>
@@ -1802,8 +1580,8 @@
           <a:p>
             <a:pPr algn="r"/>
             <a:fld id="{F7021451-1387-4CA6-816F-3879F97B5CBC}" type="slidenum">
-              <a:rPr b="0" lang="en-US"/>
-              <a:t>null</a:t>
+              <a:rPr lang="en-US" b="0"/>
+              <a:t>‹#›</a:t>
             </a:fld>
             <a:endParaRPr lang="en-US"/>
           </a:p>
@@ -2110,18 +1888,28 @@
           <a:bodyPr wrap="square" lIns="0" tIns="0" rIns="0" bIns="0" rtlCol="0" anchor="t"/>
           <a:lstStyle/>
           <a:p>
-            <a:pPr indent="0" marL="0">
+            <a:pPr marL="0" indent="0">
               <a:buNone/>
             </a:pPr>
             <a:r>
               <a:rPr lang="en-US" sz="1600" b="1" dirty="0">
                 <a:solidFill>
-                  <a:schemeClr val="accent2"/>
+                  <a:schemeClr val="accent1">
+                    <a:lumMod val="20000"/>
+                    <a:lumOff val="80000"/>
+                  </a:schemeClr>
                 </a:solidFill>
               </a:rPr>
               <a:t>Kraków bez barier · HackYeah 2026</a:t>
             </a:r>
-            <a:endParaRPr lang="en-US" sz="1600" dirty="0"/>
+            <a:endParaRPr lang="en-US" sz="1600" dirty="0">
+              <a:solidFill>
+                <a:schemeClr val="accent1">
+                  <a:lumMod val="20000"/>
+                  <a:lumOff val="80000"/>
+                </a:schemeClr>
+              </a:solidFill>
+            </a:endParaRPr>
           </a:p>
         </p:txBody>
       </p:sp>
@@ -2151,219 +1939,17 @@
             <a:prstDash val="solid"/>
           </a:ln>
         </p:spPr>
+        <p:txBody>
+          <a:bodyPr/>
+          <a:lstStyle/>
+          <a:p>
+            <a:endParaRPr lang="pl-PL"/>
+          </a:p>
+        </p:txBody>
       </p:sp>
       <p:pic>
         <p:nvPicPr>
-          <p:cNvPr id="4" name="Logo BezProgu" descr="Logo BezProgu">    </p:cNvPr>
-          <p:cNvPicPr>
-            <a:picLocks noChangeAspect="1"/>
-          </p:cNvPicPr>
-          <p:nvPr/>
-        </p:nvPicPr>
-        <p:blipFill>
-          <a:blip r:embed="rId1"/>
-          <a:stretch>
-            <a:fillRect/>
-          </a:stretch>
-        </p:blipFill>
-        <p:spPr>
-          <a:xfrm>
-            <a:off x="822960" y="1527048"/>
-            <a:ext cx="2478677" cy="685800"/>
-          </a:xfrm>
-          <a:prstGeom prst="rect">
-            <a:avLst/>
-          </a:prstGeom>
-        </p:spPr>
-      </p:pic>
-      <p:sp>
-        <p:nvSpPr>
-          <p:cNvPr id="5" name="Text 2"/>
-          <p:cNvSpPr txBox="1"/>
-          <p:nvPr/>
-        </p:nvSpPr>
-        <p:spPr>
-          <a:xfrm>
-            <a:off x="548640" y="2514600"/>
-            <a:ext cx="7132320" cy="640080"/>
-          </a:xfrm>
-          <a:prstGeom prst="rect">
-            <a:avLst/>
-          </a:prstGeom>
-          <a:noFill/>
-          <a:ln/>
-        </p:spPr>
-        <p:txBody>
-          <a:bodyPr wrap="square" lIns="0" tIns="0" rIns="0" bIns="0" rtlCol="0" anchor="ctr"/>
-          <a:lstStyle/>
-          <a:p>
-            <a:pPr indent="0" marL="0">
-              <a:buNone/>
-            </a:pPr>
-            <a:r>
-              <a:rPr lang="en-US" sz="3200" b="1" dirty="0">
-                <a:solidFill>
-                  <a:schemeClr val="accent2"/>
-                </a:solidFill>
-                <a:latin typeface="Arial" pitchFamily="34" charset="0"/>
-                <a:ea typeface="Arial" pitchFamily="34" charset="-122"/>
-                <a:cs typeface="Arial" pitchFamily="34" charset="-120"/>
-              </a:rPr>
-              <a:t>Nie »dostępne«. Konkretnie.</a:t>
-            </a:r>
-            <a:endParaRPr lang="en-US" sz="3200" dirty="0"/>
-          </a:p>
-        </p:txBody>
-      </p:sp>
-      <p:sp>
-        <p:nvSpPr>
-          <p:cNvPr id="6" name="Text 3"/>
-          <p:cNvSpPr txBox="1"/>
-          <p:nvPr/>
-        </p:nvSpPr>
-        <p:spPr>
-          <a:xfrm>
-            <a:off x="548640" y="3383280"/>
-            <a:ext cx="6766560" cy="1188720"/>
-          </a:xfrm>
-          <a:prstGeom prst="rect">
-            <a:avLst/>
-          </a:prstGeom>
-          <a:noFill/>
-          <a:ln/>
-        </p:spPr>
-        <p:txBody>
-          <a:bodyPr wrap="square" lIns="0" tIns="0" rIns="0" bIns="0" rtlCol="0" anchor="t"/>
-          <a:lstStyle/>
-          <a:p>
-            <a:pPr indent="0" marL="0">
-              <a:buNone/>
-            </a:pPr>
-            <a:r>
-              <a:rPr lang="en-US" sz="1800" dirty="0">
-                <a:solidFill>
-                  <a:schemeClr val="bg2"/>
-                </a:solidFill>
-              </a:rPr>
-              <a:t>Sprawdź, czy miejsce lub trasa w Krakowie pasuje do Twoich potrzeb: stopnie, progi, drzwi, nawierzchnia, winda, toaleta — z podanym źródłem, datą i wiarygodnością każdej informacji.</a:t>
-            </a:r>
-            <a:endParaRPr lang="en-US" sz="1800" dirty="0"/>
-          </a:p>
-        </p:txBody>
-      </p:sp>
-      <p:sp>
-        <p:nvSpPr>
-          <p:cNvPr id="7" name="Osoby na wózkach – tło"/>
-          <p:cNvSpPr/>
-          <p:nvPr/>
-        </p:nvSpPr>
-        <p:spPr>
-          <a:xfrm>
-            <a:off x="548640" y="4892040"/>
-            <a:ext cx="566928" cy="566928"/>
-          </a:xfrm>
-          <a:prstGeom prst="ellipse">
-            <a:avLst/>
-          </a:prstGeom>
-          <a:solidFill>
-            <a:schemeClr val="accent2"/>
-          </a:solidFill>
-          <a:ln w="12700">
-            <a:solidFill>
-              <a:schemeClr val="accent2"/>
-            </a:solidFill>
-            <a:prstDash val="solid"/>
-          </a:ln>
-        </p:spPr>
-      </p:sp>
-      <p:pic>
-        <p:nvPicPr>
-          <p:cNvPr id="8" name="Osoby na wózkach" descr="Osoby na wózkach">    </p:cNvPr>
-          <p:cNvPicPr>
-            <a:picLocks noChangeAspect="1"/>
-          </p:cNvPicPr>
-          <p:nvPr/>
-        </p:nvPicPr>
-        <p:blipFill>
-          <a:blip r:embed="rId2"/>
-          <a:stretch>
-            <a:fillRect/>
-          </a:stretch>
-        </p:blipFill>
-        <p:spPr>
-          <a:xfrm>
-            <a:off x="690372" y="5033772"/>
-            <a:ext cx="283464" cy="283464"/>
-          </a:xfrm>
-          <a:prstGeom prst="rect">
-            <a:avLst/>
-          </a:prstGeom>
-        </p:spPr>
-      </p:pic>
-      <p:sp>
-        <p:nvSpPr>
-          <p:cNvPr id="9" name="Text 5"/>
-          <p:cNvSpPr txBox="1"/>
-          <p:nvPr/>
-        </p:nvSpPr>
-        <p:spPr>
-          <a:xfrm>
-            <a:off x="1261872" y="4892040"/>
-            <a:ext cx="2377440" cy="566928"/>
-          </a:xfrm>
-          <a:prstGeom prst="rect">
-            <a:avLst/>
-          </a:prstGeom>
-          <a:noFill/>
-          <a:ln/>
-        </p:spPr>
-        <p:txBody>
-          <a:bodyPr wrap="square" lIns="0" tIns="0" rIns="0" bIns="0" rtlCol="0" anchor="ctr"/>
-          <a:lstStyle/>
-          <a:p>
-            <a:pPr indent="0" marL="0">
-              <a:buNone/>
-            </a:pPr>
-            <a:r>
-              <a:rPr lang="en-US" sz="1600" b="1" dirty="0">
-                <a:solidFill>
-                  <a:schemeClr val="bg1"/>
-                </a:solidFill>
-              </a:rPr>
-              <a:t>Osoby na wózkach</a:t>
-            </a:r>
-            <a:endParaRPr lang="en-US" sz="1600" dirty="0"/>
-          </a:p>
-        </p:txBody>
-      </p:sp>
-      <p:sp>
-        <p:nvSpPr>
-          <p:cNvPr id="10" name="Rodzice z wózkami – tło"/>
-          <p:cNvSpPr/>
-          <p:nvPr/>
-        </p:nvSpPr>
-        <p:spPr>
-          <a:xfrm>
-            <a:off x="3566160" y="4892040"/>
-            <a:ext cx="566928" cy="566928"/>
-          </a:xfrm>
-          <a:prstGeom prst="ellipse">
-            <a:avLst/>
-          </a:prstGeom>
-          <a:solidFill>
-            <a:schemeClr val="accent2"/>
-          </a:solidFill>
-          <a:ln w="12700">
-            <a:solidFill>
-              <a:schemeClr val="accent2"/>
-            </a:solidFill>
-            <a:prstDash val="solid"/>
-          </a:ln>
-        </p:spPr>
-      </p:sp>
-      <p:pic>
-        <p:nvPicPr>
-          <p:cNvPr id="11" name="Rodzice z wózkami" descr="Rodzice z wózkami">    </p:cNvPr>
+          <p:cNvPr id="4" name="Logo BezProgu" descr="Logo BezProgu"/>
           <p:cNvPicPr>
             <a:picLocks noChangeAspect="1"/>
           </p:cNvPicPr>
@@ -2377,8 +1963,8 @@
         </p:blipFill>
         <p:spPr>
           <a:xfrm>
-            <a:off x="3707892" y="5033772"/>
-            <a:ext cx="283464" cy="283464"/>
+            <a:off x="822960" y="1527048"/>
+            <a:ext cx="2478677" cy="685800"/>
           </a:xfrm>
           <a:prstGeom prst="rect">
             <a:avLst/>
@@ -2387,14 +1973,14 @@
       </p:pic>
       <p:sp>
         <p:nvSpPr>
-          <p:cNvPr id="12" name="Text 7"/>
+          <p:cNvPr id="5" name="Text 2"/>
           <p:cNvSpPr txBox="1"/>
           <p:nvPr/>
         </p:nvSpPr>
         <p:spPr>
           <a:xfrm>
-            <a:off x="4279392" y="4892040"/>
-            <a:ext cx="3291840" cy="566928"/>
+            <a:off x="548640" y="2514600"/>
+            <a:ext cx="7132320" cy="640080"/>
           </a:xfrm>
           <a:prstGeom prst="rect">
             <a:avLst/>
@@ -2406,18 +1992,155 @@
           <a:bodyPr wrap="square" lIns="0" tIns="0" rIns="0" bIns="0" rtlCol="0" anchor="ctr"/>
           <a:lstStyle/>
           <a:p>
-            <a:pPr indent="0" marL="0">
+            <a:pPr marL="0" indent="0">
               <a:buNone/>
             </a:pPr>
             <a:r>
-              <a:rPr lang="en-US" sz="1600" b="1" dirty="0">
-                <a:solidFill>
-                  <a:schemeClr val="bg1"/>
-                </a:solidFill>
-              </a:rPr>
-              <a:t>Rodzice z wózkami dziecięcymi</a:t>
-            </a:r>
-            <a:endParaRPr lang="en-US" sz="1600" dirty="0"/>
+              <a:rPr lang="en-US" sz="3200" b="1" dirty="0">
+                <a:solidFill>
+                  <a:schemeClr val="accent1">
+                    <a:lumMod val="20000"/>
+                    <a:lumOff val="80000"/>
+                  </a:schemeClr>
+                </a:solidFill>
+                <a:latin typeface="Arial" pitchFamily="34" charset="0"/>
+                <a:ea typeface="Arial" pitchFamily="34" charset="-122"/>
+                <a:cs typeface="Arial" pitchFamily="34" charset="-120"/>
+              </a:rPr>
+              <a:t>Nie </a:t>
+            </a:r>
+            <a:r>
+              <a:rPr lang="pl-PL" sz="3200" b="1" dirty="0">
+                <a:solidFill>
+                  <a:schemeClr val="accent1">
+                    <a:lumMod val="20000"/>
+                    <a:lumOff val="80000"/>
+                  </a:schemeClr>
+                </a:solidFill>
+                <a:latin typeface="Arial" pitchFamily="34" charset="0"/>
+                <a:ea typeface="Arial" pitchFamily="34" charset="-122"/>
+                <a:cs typeface="Arial" pitchFamily="34" charset="-120"/>
+              </a:rPr>
+              <a:t>„</a:t>
+            </a:r>
+            <a:r>
+              <a:rPr lang="en-US" sz="3200" b="1" dirty="0" err="1">
+                <a:solidFill>
+                  <a:schemeClr val="accent1">
+                    <a:lumMod val="20000"/>
+                    <a:lumOff val="80000"/>
+                  </a:schemeClr>
+                </a:solidFill>
+                <a:latin typeface="Arial" pitchFamily="34" charset="0"/>
+                <a:ea typeface="Arial" pitchFamily="34" charset="-122"/>
+                <a:cs typeface="Arial" pitchFamily="34" charset="-120"/>
+              </a:rPr>
+              <a:t>dostępne</a:t>
+            </a:r>
+            <a:r>
+              <a:rPr lang="pl-PL" sz="3200" b="1" dirty="0">
+                <a:solidFill>
+                  <a:schemeClr val="accent1">
+                    <a:lumMod val="20000"/>
+                    <a:lumOff val="80000"/>
+                  </a:schemeClr>
+                </a:solidFill>
+                <a:latin typeface="Arial" pitchFamily="34" charset="0"/>
+                <a:ea typeface="Arial" pitchFamily="34" charset="-122"/>
+                <a:cs typeface="Arial" pitchFamily="34" charset="-120"/>
+              </a:rPr>
+              <a:t>”</a:t>
+            </a:r>
+            <a:r>
+              <a:rPr lang="en-US" sz="3200" b="1" dirty="0">
+                <a:solidFill>
+                  <a:schemeClr val="accent1">
+                    <a:lumMod val="20000"/>
+                    <a:lumOff val="80000"/>
+                  </a:schemeClr>
+                </a:solidFill>
+                <a:latin typeface="Arial" pitchFamily="34" charset="0"/>
+                <a:ea typeface="Arial" pitchFamily="34" charset="-122"/>
+                <a:cs typeface="Arial" pitchFamily="34" charset="-120"/>
+              </a:rPr>
+              <a:t>. Konkretnie.</a:t>
+            </a:r>
+            <a:endParaRPr lang="en-US" sz="3200" dirty="0">
+              <a:solidFill>
+                <a:schemeClr val="accent1">
+                  <a:lumMod val="20000"/>
+                  <a:lumOff val="80000"/>
+                </a:schemeClr>
+              </a:solidFill>
+            </a:endParaRPr>
+          </a:p>
+        </p:txBody>
+      </p:sp>
+      <p:sp>
+        <p:nvSpPr>
+          <p:cNvPr id="6" name="Text 3"/>
+          <p:cNvSpPr txBox="1"/>
+          <p:nvPr/>
+        </p:nvSpPr>
+        <p:spPr>
+          <a:xfrm>
+            <a:off x="548640" y="3383280"/>
+            <a:ext cx="6766560" cy="1188720"/>
+          </a:xfrm>
+          <a:prstGeom prst="rect">
+            <a:avLst/>
+          </a:prstGeom>
+          <a:noFill/>
+          <a:ln/>
+        </p:spPr>
+        <p:txBody>
+          <a:bodyPr wrap="square" lIns="0" tIns="0" rIns="0" bIns="0" rtlCol="0" anchor="t"/>
+          <a:lstStyle/>
+          <a:p>
+            <a:pPr marL="0" indent="0">
+              <a:buNone/>
+            </a:pPr>
+            <a:r>
+              <a:rPr lang="en-US" sz="1800" dirty="0">
+                <a:solidFill>
+                  <a:schemeClr val="bg2"/>
+                </a:solidFill>
+              </a:rPr>
+              <a:t>Sprawdź, czy miejsce lub trasa w Krakowie pasuje do Twoich potrzeb: stopnie, progi, drzwi, nawierzchnia, winda, </a:t>
+            </a:r>
+            <a:r>
+              <a:rPr lang="en-US" sz="1800" dirty="0" err="1">
+                <a:solidFill>
+                  <a:schemeClr val="bg2"/>
+                </a:solidFill>
+              </a:rPr>
+              <a:t>toaleta</a:t>
+            </a:r>
+            <a:r>
+              <a:rPr lang="en-US" sz="1800" dirty="0">
+                <a:solidFill>
+                  <a:schemeClr val="bg2"/>
+                </a:solidFill>
+              </a:rPr>
+              <a:t> </a:t>
+            </a:r>
+            <a:r>
+              <a:rPr lang="pl-PL" dirty="0">
+                <a:solidFill>
+                  <a:schemeClr val="bg2"/>
+                </a:solidFill>
+              </a:rPr>
+              <a:t>-</a:t>
+            </a:r>
+            <a:r>
+              <a:rPr lang="en-US" sz="1800" dirty="0">
+                <a:solidFill>
+                  <a:schemeClr val="bg2"/>
+                </a:solidFill>
+              </a:rPr>
+              <a:t> z podanym źródłem, datą i wiarygodnością każdej informacji.</a:t>
+            </a:r>
+            <a:endParaRPr lang="en-US" sz="1800" dirty="0"/>
           </a:p>
         </p:txBody>
       </p:sp>
@@ -2447,17 +2170,24 @@
             <a:prstDash val="solid"/>
           </a:ln>
           <a:effectLst>
-            <a:outerShdw sx="100000" sy="100000" kx="0" ky="0" algn="bl" rotWithShape="0" blurRad="101600" dist="38100" dir="5400000">
+            <a:outerShdw blurRad="101600" dist="38100" dir="5400000" algn="bl" rotWithShape="0">
               <a:srgbClr val="0E2238">
                 <a:alpha val="25000"/>
               </a:srgbClr>
             </a:outerShdw>
           </a:effectLst>
         </p:spPr>
+        <p:txBody>
+          <a:bodyPr/>
+          <a:lstStyle/>
+          <a:p>
+            <a:endParaRPr lang="pl-PL"/>
+          </a:p>
+        </p:txBody>
       </p:sp>
       <p:pic>
         <p:nvPicPr>
-          <p:cNvPr id="14" name="Karta miejsca Sukiennice" descr="Zrzut ekranu aplikacji BezProgu: Karta miejsca Sukiennice">    </p:cNvPr>
+          <p:cNvPr id="14" name="Karta miejsca Sukiennice" descr="Zrzut ekranu aplikacji BezProgu: Karta miejsca Sukiennice"/>
           <p:cNvPicPr>
             <a:picLocks noChangeAspect="1"/>
           </p:cNvPicPr>
@@ -2479,6 +2209,107 @@
           </a:prstGeom>
         </p:spPr>
       </p:pic>
+      <p:sp>
+        <p:nvSpPr>
+          <p:cNvPr id="22" name="TextBox 21">
+            <a:extLst>
+              <a:ext uri="{FF2B5EF4-FFF2-40B4-BE49-F238E27FC236}">
+                <a16:creationId xmlns:a16="http://schemas.microsoft.com/office/drawing/2014/main" id="{C9B59DE2-BA31-AE2E-F497-337014C5A4A2}"/>
+              </a:ext>
+            </a:extLst>
+          </p:cNvPr>
+          <p:cNvSpPr txBox="1"/>
+          <p:nvPr/>
+        </p:nvSpPr>
+        <p:spPr>
+          <a:xfrm>
+            <a:off x="301371" y="5216652"/>
+            <a:ext cx="7379589" cy="923330"/>
+          </a:xfrm>
+          <a:prstGeom prst="rect">
+            <a:avLst/>
+          </a:prstGeom>
+          <a:noFill/>
+        </p:spPr>
+        <p:txBody>
+          <a:bodyPr wrap="square">
+            <a:spAutoFit/>
+          </a:bodyPr>
+          <a:lstStyle/>
+          <a:p>
+            <a:pPr algn="ctr" rtl="0">
+              <a:buNone/>
+            </a:pPr>
+            <a:r>
+              <a:rPr lang="pl-PL" sz="1800" b="0" i="1" dirty="0">
+                <a:solidFill>
+                  <a:schemeClr val="bg1"/>
+                </a:solidFill>
+                <a:effectLst/>
+              </a:rPr>
+              <a:t>(Różne obiekty x Różne potrzeby) </a:t>
+            </a:r>
+            <a:r>
+              <a:rPr lang="pl-PL" i="1" dirty="0">
+                <a:solidFill>
+                  <a:schemeClr val="bg1"/>
+                </a:solidFill>
+              </a:rPr>
+              <a:t>+ (</a:t>
+            </a:r>
+            <a:r>
+              <a:rPr lang="pl-PL" sz="1800" b="0" i="1" dirty="0">
+                <a:solidFill>
+                  <a:schemeClr val="bg1"/>
+                </a:solidFill>
+                <a:effectLst/>
+              </a:rPr>
+              <a:t>Idealne dopasowanie x Ułatwiony dostęp</a:t>
+            </a:r>
+            <a:r>
+              <a:rPr lang="pl-PL" i="1" dirty="0">
+                <a:solidFill>
+                  <a:schemeClr val="bg1"/>
+                </a:solidFill>
+              </a:rPr>
+              <a:t>)</a:t>
+            </a:r>
+            <a:endParaRPr lang="pl-PL" sz="1800" b="0" i="1" dirty="0">
+              <a:solidFill>
+                <a:schemeClr val="bg1"/>
+              </a:solidFill>
+              <a:effectLst/>
+            </a:endParaRPr>
+          </a:p>
+          <a:p>
+            <a:pPr algn="ctr" rtl="0">
+              <a:buNone/>
+            </a:pPr>
+            <a:r>
+              <a:rPr lang="pl-PL" sz="3600" i="1" dirty="0">
+                <a:solidFill>
+                  <a:schemeClr val="bg1"/>
+                </a:solidFill>
+              </a:rPr>
+              <a:t>= </a:t>
+            </a:r>
+            <a:r>
+              <a:rPr lang="pl-PL" sz="3600" i="1" dirty="0" err="1">
+                <a:solidFill>
+                  <a:schemeClr val="bg1"/>
+                </a:solidFill>
+              </a:rPr>
+              <a:t>BezProgu</a:t>
+            </a:r>
+            <a:endParaRPr lang="pl-PL" sz="8000" i="1" dirty="0">
+              <a:solidFill>
+                <a:schemeClr val="bg1"/>
+              </a:solidFill>
+              <a:effectLst/>
+            </a:endParaRPr>
+          </a:p>
+        </p:txBody>
+      </p:sp>
     </p:spTree>
   </p:cSld>
   <p:clrMapOvr>
@@ -2507,9 +2338,11 @@
       <p:sp>
         <p:nvSpPr>
           <p:cNvPr id="2" name="Text 0"/>
-          <p:cNvSpPr/>
+          <p:cNvSpPr>
+            <a:spLocks noGrp="1"/>
+          </p:cNvSpPr>
           <p:nvPr>
-            <p:ph idx="100" type="title" hasCustomPrompt="1"/>
+            <p:ph type="title" idx="100" hasCustomPrompt="1"/>
           </p:nvPr>
         </p:nvSpPr>
         <p:spPr>
@@ -2527,7 +2360,7 @@
           <a:bodyPr wrap="square" lIns="0" tIns="0" rIns="0" bIns="0" rtlCol="0" anchor="ctr"/>
           <a:lstStyle/>
           <a:p>
-            <a:pPr algn="l" indent="0" marL="0">
+            <a:pPr marL="0" indent="0" algn="l">
               <a:buNone/>
             </a:pPr>
             <a:r>
@@ -2571,6 +2404,13 @@
             <a:prstDash val="solid"/>
           </a:ln>
         </p:spPr>
+        <p:txBody>
+          <a:bodyPr/>
+          <a:lstStyle/>
+          <a:p>
+            <a:endParaRPr lang="pl-PL"/>
+          </a:p>
+        </p:txBody>
       </p:sp>
       <p:sp>
         <p:nvSpPr>
@@ -2596,17 +2436,24 @@
             <a:prstDash val="solid"/>
           </a:ln>
         </p:spPr>
+        <p:txBody>
+          <a:bodyPr/>
+          <a:lstStyle/>
+          <a:p>
+            <a:endParaRPr lang="pl-PL"/>
+          </a:p>
+        </p:txBody>
       </p:sp>
       <p:pic>
         <p:nvPicPr>
-          <p:cNvPr id="5" name="Działa dziś" descr="Działa dziś">    </p:cNvPr>
+          <p:cNvPr id="5" name="Działa dziś" descr="Działa dziś"/>
           <p:cNvPicPr>
             <a:picLocks noChangeAspect="1"/>
           </p:cNvPicPr>
           <p:nvPr/>
         </p:nvPicPr>
         <p:blipFill>
-          <a:blip r:embed="rId1"/>
+          <a:blip r:embed="rId3"/>
           <a:stretch>
             <a:fillRect/>
           </a:stretch>
@@ -2642,7 +2489,7 @@
           <a:bodyPr wrap="square" lIns="0" tIns="0" rIns="0" bIns="0" rtlCol="0" anchor="ctr"/>
           <a:lstStyle/>
           <a:p>
-            <a:pPr indent="0" marL="0">
+            <a:pPr marL="0" indent="0">
               <a:buNone/>
             </a:pPr>
             <a:r>
@@ -2795,6 +2642,13 @@
             <a:prstDash val="solid"/>
           </a:ln>
         </p:spPr>
+        <p:txBody>
+          <a:bodyPr/>
+          <a:lstStyle/>
+          <a:p>
+            <a:endParaRPr lang="pl-PL"/>
+          </a:p>
+        </p:txBody>
       </p:sp>
       <p:sp>
         <p:nvSpPr>
@@ -2820,17 +2674,24 @@
             <a:prstDash val="solid"/>
           </a:ln>
         </p:spPr>
+        <p:txBody>
+          <a:bodyPr/>
+          <a:lstStyle/>
+          <a:p>
+            <a:endParaRPr lang="pl-PL"/>
+          </a:p>
+        </p:txBody>
       </p:sp>
       <p:pic>
         <p:nvPicPr>
-          <p:cNvPr id="10" name="Do zrobienia (plan)" descr="Do zrobienia (plan)">    </p:cNvPr>
+          <p:cNvPr id="10" name="Do zrobienia (plan)" descr="Do zrobienia (plan)"/>
           <p:cNvPicPr>
             <a:picLocks noChangeAspect="1"/>
           </p:cNvPicPr>
           <p:nvPr/>
         </p:nvPicPr>
         <p:blipFill>
-          <a:blip r:embed="rId2"/>
+          <a:blip r:embed="rId4"/>
           <a:stretch>
             <a:fillRect/>
           </a:stretch>
@@ -2866,7 +2727,7 @@
           <a:bodyPr wrap="square" lIns="0" tIns="0" rIns="0" bIns="0" rtlCol="0" anchor="ctr"/>
           <a:lstStyle/>
           <a:p>
-            <a:pPr indent="0" marL="0">
+            <a:pPr marL="0" indent="0">
               <a:buNone/>
             </a:pPr>
             <a:r>
@@ -3019,17 +2880,24 @@
             <a:prstDash val="solid"/>
           </a:ln>
         </p:spPr>
+        <p:txBody>
+          <a:bodyPr/>
+          <a:lstStyle/>
+          <a:p>
+            <a:endParaRPr lang="pl-PL"/>
+          </a:p>
+        </p:txBody>
       </p:sp>
       <p:pic>
         <p:nvPicPr>
-          <p:cNvPr id="14" name="Logo BezProgu" descr="Logo BezProgu">    </p:cNvPr>
+          <p:cNvPr id="14" name="Logo BezProgu" descr="Logo BezProgu"/>
           <p:cNvPicPr>
             <a:picLocks noChangeAspect="1"/>
           </p:cNvPicPr>
           <p:nvPr/>
         </p:nvPicPr>
         <p:blipFill>
-          <a:blip r:embed="rId3"/>
+          <a:blip r:embed="rId5"/>
           <a:stretch>
             <a:fillRect/>
           </a:stretch>
@@ -3065,13 +2933,16 @@
           <a:bodyPr wrap="square" lIns="0" tIns="0" rIns="0" bIns="0" rtlCol="0" anchor="ctr"/>
           <a:lstStyle/>
           <a:p>
-            <a:pPr indent="0" marL="0">
+            <a:pPr marL="0" indent="0">
               <a:buNone/>
             </a:pPr>
             <a:r>
               <a:rPr lang="en-US" sz="2800" b="1" dirty="0">
                 <a:solidFill>
-                  <a:schemeClr val="accent2"/>
+                  <a:schemeClr val="accent1">
+                    <a:lumMod val="20000"/>
+                    <a:lumOff val="80000"/>
+                  </a:schemeClr>
                 </a:solidFill>
                 <a:latin typeface="Arial" pitchFamily="34" charset="0"/>
                 <a:ea typeface="Arial" pitchFamily="34" charset="-122"/>
@@ -3079,7 +2950,14 @@
               </a:rPr>
               <a:t>Dziękujemy!</a:t>
             </a:r>
-            <a:endParaRPr lang="en-US" sz="2800" dirty="0"/>
+            <a:endParaRPr lang="en-US" sz="2800" dirty="0">
+              <a:solidFill>
+                <a:schemeClr val="accent1">
+                  <a:lumMod val="20000"/>
+                  <a:lumOff val="80000"/>
+                </a:schemeClr>
+              </a:solidFill>
+            </a:endParaRPr>
           </a:p>
         </p:txBody>
       </p:sp>
@@ -3104,7 +2982,7 @@
           <a:bodyPr wrap="square" lIns="0" tIns="0" rIns="0" bIns="0" rtlCol="0" anchor="ctr"/>
           <a:lstStyle/>
           <a:p>
-            <a:pPr algn="r" indent="0" marL="0">
+            <a:pPr marL="0" indent="0" algn="r">
               <a:buNone/>
             </a:pPr>
             <a:r>
@@ -3118,7 +2996,7 @@
             <a:endParaRPr lang="en-US" sz="1400" dirty="0"/>
           </a:p>
           <a:p>
-            <a:pPr algn="r" indent="0" marL="0">
+            <a:pPr marL="0" indent="0" algn="r">
               <a:buNone/>
             </a:pPr>
             <a:r>
@@ -3153,7 +3031,7 @@
           </a:prstGeom>
           <a:extLst>
             <a:ext uri="{C572A759-6A51-4108-AA02-DFA0A04FC94B}">
-              <ma14:wrappingTextBoxFlag xmlns:ma14="http://schemas.microsoft.com/office/mac/drawingml/2011/main" val="0"/>
+              <ma14:wrappingTextBoxFlag xmlns:ma14="http://schemas.microsoft.com/office/mac/drawingml/2011/main" xmlns="" val="0"/>
             </a:ext>
           </a:extLst>
         </p:spPr>
@@ -3171,7 +3049,7 @@
           <a:p>
             <a:pPr algn="r"/>
             <a:fld id="{F7021451-1387-4CA6-816F-3879F97B5CBC}" type="slidenum">
-              <a:rPr b="0" lang="en-US"/>
+              <a:rPr lang="en-US" b="0"/>
               <a:t>10</a:t>
             </a:fld>
             <a:endParaRPr lang="en-US"/>
@@ -3206,9 +3084,11 @@
       <p:sp>
         <p:nvSpPr>
           <p:cNvPr id="2" name="Text 0"/>
-          <p:cNvSpPr/>
+          <p:cNvSpPr>
+            <a:spLocks noGrp="1"/>
+          </p:cNvSpPr>
           <p:nvPr>
-            <p:ph idx="100" type="title" hasCustomPrompt="1"/>
+            <p:ph type="title" idx="100" hasCustomPrompt="1"/>
           </p:nvPr>
         </p:nvSpPr>
         <p:spPr>
@@ -3226,7 +3106,7 @@
           <a:bodyPr wrap="square" lIns="0" tIns="0" rIns="0" bIns="0" rtlCol="0" anchor="ctr"/>
           <a:lstStyle/>
           <a:p>
-            <a:pPr algn="l" indent="0" marL="0">
+            <a:pPr marL="0" indent="0" algn="l">
               <a:buNone/>
             </a:pPr>
             <a:r>
@@ -3270,6 +3150,13 @@
             <a:prstDash val="solid"/>
           </a:ln>
         </p:spPr>
+        <p:txBody>
+          <a:bodyPr/>
+          <a:lstStyle/>
+          <a:p>
+            <a:endParaRPr lang="pl-PL"/>
+          </a:p>
+        </p:txBody>
       </p:sp>
       <p:sp>
         <p:nvSpPr>
@@ -3292,11 +3179,11 @@
           <a:bodyPr wrap="square" lIns="0" tIns="0" rIns="0" bIns="0" rtlCol="0" anchor="t"/>
           <a:lstStyle/>
           <a:p>
-            <a:pPr indent="0" marL="0">
+            <a:pPr marL="0" indent="0">
               <a:buNone/>
             </a:pPr>
             <a:r>
-              <a:rPr lang="en-US" sz="1200" b="1" spc="100" kern="0" dirty="0">
+              <a:rPr lang="en-US" sz="1200" b="1" kern="0" spc="100" dirty="0">
                 <a:solidFill>
                   <a:schemeClr val="accent6"/>
                 </a:solidFill>
@@ -3328,7 +3215,7 @@
           <a:bodyPr wrap="square" lIns="0" tIns="0" rIns="0" bIns="0" rtlCol="0" anchor="ctr"/>
           <a:lstStyle/>
           <a:p>
-            <a:pPr indent="0" marL="0">
+            <a:pPr marL="0" indent="0">
               <a:buNone/>
             </a:pPr>
             <a:r>
@@ -3367,7 +3254,7 @@
           <a:bodyPr wrap="square" lIns="0" tIns="0" rIns="0" bIns="0" rtlCol="0" anchor="ctr"/>
           <a:lstStyle/>
           <a:p>
-            <a:pPr indent="0" marL="0">
+            <a:pPr marL="0" indent="0">
               <a:buNone/>
             </a:pPr>
             <a:r>
@@ -3408,6 +3295,13 @@
             <a:prstDash val="solid"/>
           </a:ln>
         </p:spPr>
+        <p:txBody>
+          <a:bodyPr/>
+          <a:lstStyle/>
+          <a:p>
+            <a:endParaRPr lang="pl-PL"/>
+          </a:p>
+        </p:txBody>
       </p:sp>
       <p:sp>
         <p:nvSpPr>
@@ -3430,11 +3324,11 @@
           <a:bodyPr wrap="square" lIns="0" tIns="0" rIns="0" bIns="0" rtlCol="0" anchor="t"/>
           <a:lstStyle/>
           <a:p>
-            <a:pPr indent="0" marL="0">
+            <a:pPr marL="0" indent="0">
               <a:buNone/>
             </a:pPr>
             <a:r>
-              <a:rPr lang="en-US" sz="1200" b="1" spc="100" kern="0" dirty="0">
+              <a:rPr lang="en-US" sz="1200" b="1" kern="0" spc="100" dirty="0">
                 <a:solidFill>
                   <a:schemeClr val="accent1"/>
                 </a:solidFill>
@@ -3447,199 +3341,7 @@
       </p:sp>
       <p:pic>
         <p:nvPicPr>
-          <p:cNvPr id="9" name="Status barrier" descr="Status barrier">    </p:cNvPr>
-          <p:cNvPicPr>
-            <a:picLocks noChangeAspect="1"/>
-          </p:cNvPicPr>
-          <p:nvPr/>
-        </p:nvPicPr>
-        <p:blipFill>
-          <a:blip r:embed="rId1"/>
-          <a:stretch>
-            <a:fillRect/>
-          </a:stretch>
-        </p:blipFill>
-        <p:spPr>
-          <a:xfrm>
-            <a:off x="822960" y="3520440"/>
-            <a:ext cx="329184" cy="329184"/>
-          </a:xfrm>
-          <a:prstGeom prst="rect">
-            <a:avLst/>
-          </a:prstGeom>
-        </p:spPr>
-      </p:pic>
-      <p:sp>
-        <p:nvSpPr>
-          <p:cNvPr id="10" name="Text 7"/>
-          <p:cNvSpPr txBox="1"/>
-          <p:nvPr/>
-        </p:nvSpPr>
-        <p:spPr>
-          <a:xfrm>
-            <a:off x="1298448" y="3474720"/>
-            <a:ext cx="4754880" cy="292608"/>
-          </a:xfrm>
-          <a:prstGeom prst="rect">
-            <a:avLst/>
-          </a:prstGeom>
-          <a:noFill/>
-          <a:ln/>
-        </p:spPr>
-        <p:txBody>
-          <a:bodyPr wrap="square" lIns="0" tIns="0" rIns="0" bIns="0" rtlCol="0" anchor="t"/>
-          <a:lstStyle/>
-          <a:p>
-            <a:pPr indent="0" marL="0">
-              <a:buNone/>
-            </a:pPr>
-            <a:r>
-              <a:rPr lang="en-US" sz="1500" b="1" dirty="0">
-                <a:solidFill>
-                  <a:schemeClr val="tx1"/>
-                </a:solidFill>
-              </a:rPr>
-              <a:t>Stopnie przy wejściu głównym: 3</a:t>
-            </a:r>
-            <a:endParaRPr lang="en-US" sz="1500" dirty="0"/>
-          </a:p>
-        </p:txBody>
-      </p:sp>
-      <p:sp>
-        <p:nvSpPr>
-          <p:cNvPr id="11" name="Text 8"/>
-          <p:cNvSpPr txBox="1"/>
-          <p:nvPr/>
-        </p:nvSpPr>
-        <p:spPr>
-          <a:xfrm>
-            <a:off x="1298448" y="3767328"/>
-            <a:ext cx="4754880" cy="256032"/>
-          </a:xfrm>
-          <a:prstGeom prst="rect">
-            <a:avLst/>
-          </a:prstGeom>
-          <a:noFill/>
-          <a:ln/>
-        </p:spPr>
-        <p:txBody>
-          <a:bodyPr wrap="square" lIns="0" tIns="0" rIns="0" bIns="0" rtlCol="0" anchor="t"/>
-          <a:lstStyle/>
-          <a:p>
-            <a:pPr indent="0" marL="0">
-              <a:buNone/>
-            </a:pPr>
-            <a:r>
-              <a:rPr lang="en-US" sz="1200" dirty="0">
-                <a:solidFill>
-                  <a:schemeClr val="accent6"/>
-                </a:solidFill>
-              </a:rPr>
-              <a:t>właściciel obiektu, 13.09.2026</a:t>
-            </a:r>
-            <a:endParaRPr lang="en-US" sz="1200" dirty="0"/>
-          </a:p>
-        </p:txBody>
-      </p:sp>
-      <p:pic>
-        <p:nvPicPr>
-          <p:cNvPr id="12" name="Status match" descr="Status match">    </p:cNvPr>
-          <p:cNvPicPr>
-            <a:picLocks noChangeAspect="1"/>
-          </p:cNvPicPr>
-          <p:nvPr/>
-        </p:nvPicPr>
-        <p:blipFill>
-          <a:blip r:embed="rId2"/>
-          <a:stretch>
-            <a:fillRect/>
-          </a:stretch>
-        </p:blipFill>
-        <p:spPr>
-          <a:xfrm>
-            <a:off x="822960" y="4178808"/>
-            <a:ext cx="329184" cy="329184"/>
-          </a:xfrm>
-          <a:prstGeom prst="rect">
-            <a:avLst/>
-          </a:prstGeom>
-        </p:spPr>
-      </p:pic>
-      <p:sp>
-        <p:nvSpPr>
-          <p:cNvPr id="13" name="Text 9"/>
-          <p:cNvSpPr txBox="1"/>
-          <p:nvPr/>
-        </p:nvSpPr>
-        <p:spPr>
-          <a:xfrm>
-            <a:off x="1298448" y="4133088"/>
-            <a:ext cx="4754880" cy="292608"/>
-          </a:xfrm>
-          <a:prstGeom prst="rect">
-            <a:avLst/>
-          </a:prstGeom>
-          <a:noFill/>
-          <a:ln/>
-        </p:spPr>
-        <p:txBody>
-          <a:bodyPr wrap="square" lIns="0" tIns="0" rIns="0" bIns="0" rtlCol="0" anchor="t"/>
-          <a:lstStyle/>
-          <a:p>
-            <a:pPr indent="0" marL="0">
-              <a:buNone/>
-            </a:pPr>
-            <a:r>
-              <a:rPr lang="en-US" sz="1500" b="1" dirty="0">
-                <a:solidFill>
-                  <a:schemeClr val="tx1"/>
-                </a:solidFill>
-              </a:rPr>
-              <a:t>Wejście boczne bez stopni, z windą</a:t>
-            </a:r>
-            <a:endParaRPr lang="en-US" sz="1500" dirty="0"/>
-          </a:p>
-        </p:txBody>
-      </p:sp>
-      <p:sp>
-        <p:nvSpPr>
-          <p:cNvPr id="14" name="Text 10"/>
-          <p:cNvSpPr txBox="1"/>
-          <p:nvPr/>
-        </p:nvSpPr>
-        <p:spPr>
-          <a:xfrm>
-            <a:off x="1298448" y="4425696"/>
-            <a:ext cx="4754880" cy="256032"/>
-          </a:xfrm>
-          <a:prstGeom prst="rect">
-            <a:avLst/>
-          </a:prstGeom>
-          <a:noFill/>
-          <a:ln/>
-        </p:spPr>
-        <p:txBody>
-          <a:bodyPr wrap="square" lIns="0" tIns="0" rIns="0" bIns="0" rtlCol="0" anchor="t"/>
-          <a:lstStyle/>
-          <a:p>
-            <a:pPr indent="0" marL="0">
-              <a:buNone/>
-            </a:pPr>
-            <a:r>
-              <a:rPr lang="en-US" sz="1200" dirty="0">
-                <a:solidFill>
-                  <a:schemeClr val="accent6"/>
-                </a:solidFill>
-              </a:rPr>
-              <a:t>właściciel obiektu, 13.09.2026</a:t>
-            </a:r>
-            <a:endParaRPr lang="en-US" sz="1200" dirty="0"/>
-          </a:p>
-        </p:txBody>
-      </p:sp>
-      <p:pic>
-        <p:nvPicPr>
-          <p:cNvPr id="15" name="Status match" descr="Status match">    </p:cNvPr>
+          <p:cNvPr id="9" name="Status barrier" descr="Status barrier"/>
           <p:cNvPicPr>
             <a:picLocks noChangeAspect="1"/>
           </p:cNvPicPr>
@@ -3653,7 +3355,7 @@
         </p:blipFill>
         <p:spPr>
           <a:xfrm>
-            <a:off x="822960" y="4837176"/>
+            <a:off x="822960" y="3520440"/>
             <a:ext cx="329184" cy="329184"/>
           </a:xfrm>
           <a:prstGeom prst="rect">
@@ -3663,13 +3365,13 @@
       </p:pic>
       <p:sp>
         <p:nvSpPr>
-          <p:cNvPr id="16" name="Text 11"/>
+          <p:cNvPr id="10" name="Text 7"/>
           <p:cNvSpPr txBox="1"/>
           <p:nvPr/>
         </p:nvSpPr>
         <p:spPr>
           <a:xfrm>
-            <a:off x="1298448" y="4791456"/>
+            <a:off x="1298448" y="3474720"/>
             <a:ext cx="4754880" cy="292608"/>
           </a:xfrm>
           <a:prstGeom prst="rect">
@@ -3682,7 +3384,7 @@
           <a:bodyPr wrap="square" lIns="0" tIns="0" rIns="0" bIns="0" rtlCol="0" anchor="t"/>
           <a:lstStyle/>
           <a:p>
-            <a:pPr indent="0" marL="0">
+            <a:pPr marL="0" indent="0">
               <a:buNone/>
             </a:pPr>
             <a:r>
@@ -3691,7 +3393,7 @@
                   <a:schemeClr val="tx1"/>
                 </a:solidFill>
               </a:rPr>
-              <a:t>Szerokość drzwi: 85 cm (Twoje min. 80 cm)</a:t>
+              <a:t>Stopnie przy wejściu głównym: 3</a:t>
             </a:r>
             <a:endParaRPr lang="en-US" sz="1500" dirty="0"/>
           </a:p>
@@ -3699,13 +3401,13 @@
       </p:sp>
       <p:sp>
         <p:nvSpPr>
-          <p:cNvPr id="17" name="Text 12"/>
+          <p:cNvPr id="11" name="Text 8"/>
           <p:cNvSpPr txBox="1"/>
           <p:nvPr/>
         </p:nvSpPr>
         <p:spPr>
           <a:xfrm>
-            <a:off x="1298448" y="5084064"/>
+            <a:off x="1298448" y="3767328"/>
             <a:ext cx="4754880" cy="256032"/>
           </a:xfrm>
           <a:prstGeom prst="rect">
@@ -3718,7 +3420,7 @@
           <a:bodyPr wrap="square" lIns="0" tIns="0" rIns="0" bIns="0" rtlCol="0" anchor="t"/>
           <a:lstStyle/>
           <a:p>
-            <a:pPr indent="0" marL="0">
+            <a:pPr marL="0" indent="0">
               <a:buNone/>
             </a:pPr>
             <a:r>
@@ -3735,7 +3437,7 @@
       </p:sp>
       <p:pic>
         <p:nvPicPr>
-          <p:cNvPr id="18" name="Status unknown" descr="Status unknown">    </p:cNvPr>
+          <p:cNvPr id="12" name="Status match" descr="Status match"/>
           <p:cNvPicPr>
             <a:picLocks noChangeAspect="1"/>
           </p:cNvPicPr>
@@ -3749,6 +3451,198 @@
         </p:blipFill>
         <p:spPr>
           <a:xfrm>
+            <a:off x="822960" y="4178808"/>
+            <a:ext cx="329184" cy="329184"/>
+          </a:xfrm>
+          <a:prstGeom prst="rect">
+            <a:avLst/>
+          </a:prstGeom>
+        </p:spPr>
+      </p:pic>
+      <p:sp>
+        <p:nvSpPr>
+          <p:cNvPr id="13" name="Text 9"/>
+          <p:cNvSpPr txBox="1"/>
+          <p:nvPr/>
+        </p:nvSpPr>
+        <p:spPr>
+          <a:xfrm>
+            <a:off x="1298448" y="4133088"/>
+            <a:ext cx="4754880" cy="292608"/>
+          </a:xfrm>
+          <a:prstGeom prst="rect">
+            <a:avLst/>
+          </a:prstGeom>
+          <a:noFill/>
+          <a:ln/>
+        </p:spPr>
+        <p:txBody>
+          <a:bodyPr wrap="square" lIns="0" tIns="0" rIns="0" bIns="0" rtlCol="0" anchor="t"/>
+          <a:lstStyle/>
+          <a:p>
+            <a:pPr marL="0" indent="0">
+              <a:buNone/>
+            </a:pPr>
+            <a:r>
+              <a:rPr lang="en-US" sz="1500" b="1" dirty="0">
+                <a:solidFill>
+                  <a:schemeClr val="tx1"/>
+                </a:solidFill>
+              </a:rPr>
+              <a:t>Wejście boczne bez stopni, z windą</a:t>
+            </a:r>
+            <a:endParaRPr lang="en-US" sz="1500" dirty="0"/>
+          </a:p>
+        </p:txBody>
+      </p:sp>
+      <p:sp>
+        <p:nvSpPr>
+          <p:cNvPr id="14" name="Text 10"/>
+          <p:cNvSpPr txBox="1"/>
+          <p:nvPr/>
+        </p:nvSpPr>
+        <p:spPr>
+          <a:xfrm>
+            <a:off x="1298448" y="4425696"/>
+            <a:ext cx="4754880" cy="256032"/>
+          </a:xfrm>
+          <a:prstGeom prst="rect">
+            <a:avLst/>
+          </a:prstGeom>
+          <a:noFill/>
+          <a:ln/>
+        </p:spPr>
+        <p:txBody>
+          <a:bodyPr wrap="square" lIns="0" tIns="0" rIns="0" bIns="0" rtlCol="0" anchor="t"/>
+          <a:lstStyle/>
+          <a:p>
+            <a:pPr marL="0" indent="0">
+              <a:buNone/>
+            </a:pPr>
+            <a:r>
+              <a:rPr lang="en-US" sz="1200" dirty="0">
+                <a:solidFill>
+                  <a:schemeClr val="accent6"/>
+                </a:solidFill>
+              </a:rPr>
+              <a:t>właściciel obiektu, 13.09.2026</a:t>
+            </a:r>
+            <a:endParaRPr lang="en-US" sz="1200" dirty="0"/>
+          </a:p>
+        </p:txBody>
+      </p:sp>
+      <p:pic>
+        <p:nvPicPr>
+          <p:cNvPr id="15" name="Status match" descr="Status match"/>
+          <p:cNvPicPr>
+            <a:picLocks noChangeAspect="1"/>
+          </p:cNvPicPr>
+          <p:nvPr/>
+        </p:nvPicPr>
+        <p:blipFill>
+          <a:blip r:embed="rId4"/>
+          <a:stretch>
+            <a:fillRect/>
+          </a:stretch>
+        </p:blipFill>
+        <p:spPr>
+          <a:xfrm>
+            <a:off x="822960" y="4837176"/>
+            <a:ext cx="329184" cy="329184"/>
+          </a:xfrm>
+          <a:prstGeom prst="rect">
+            <a:avLst/>
+          </a:prstGeom>
+        </p:spPr>
+      </p:pic>
+      <p:sp>
+        <p:nvSpPr>
+          <p:cNvPr id="16" name="Text 11"/>
+          <p:cNvSpPr txBox="1"/>
+          <p:nvPr/>
+        </p:nvSpPr>
+        <p:spPr>
+          <a:xfrm>
+            <a:off x="1298448" y="4791456"/>
+            <a:ext cx="4754880" cy="292608"/>
+          </a:xfrm>
+          <a:prstGeom prst="rect">
+            <a:avLst/>
+          </a:prstGeom>
+          <a:noFill/>
+          <a:ln/>
+        </p:spPr>
+        <p:txBody>
+          <a:bodyPr wrap="square" lIns="0" tIns="0" rIns="0" bIns="0" rtlCol="0" anchor="t"/>
+          <a:lstStyle/>
+          <a:p>
+            <a:pPr marL="0" indent="0">
+              <a:buNone/>
+            </a:pPr>
+            <a:r>
+              <a:rPr lang="en-US" sz="1500" b="1" dirty="0">
+                <a:solidFill>
+                  <a:schemeClr val="tx1"/>
+                </a:solidFill>
+              </a:rPr>
+              <a:t>Szerokość drzwi: 85 cm (Twoje min. 80 cm)</a:t>
+            </a:r>
+            <a:endParaRPr lang="en-US" sz="1500" dirty="0"/>
+          </a:p>
+        </p:txBody>
+      </p:sp>
+      <p:sp>
+        <p:nvSpPr>
+          <p:cNvPr id="17" name="Text 12"/>
+          <p:cNvSpPr txBox="1"/>
+          <p:nvPr/>
+        </p:nvSpPr>
+        <p:spPr>
+          <a:xfrm>
+            <a:off x="1298448" y="5084064"/>
+            <a:ext cx="4754880" cy="256032"/>
+          </a:xfrm>
+          <a:prstGeom prst="rect">
+            <a:avLst/>
+          </a:prstGeom>
+          <a:noFill/>
+          <a:ln/>
+        </p:spPr>
+        <p:txBody>
+          <a:bodyPr wrap="square" lIns="0" tIns="0" rIns="0" bIns="0" rtlCol="0" anchor="t"/>
+          <a:lstStyle/>
+          <a:p>
+            <a:pPr marL="0" indent="0">
+              <a:buNone/>
+            </a:pPr>
+            <a:r>
+              <a:rPr lang="en-US" sz="1200" dirty="0">
+                <a:solidFill>
+                  <a:schemeClr val="accent6"/>
+                </a:solidFill>
+              </a:rPr>
+              <a:t>właściciel obiektu, 13.09.2026</a:t>
+            </a:r>
+            <a:endParaRPr lang="en-US" sz="1200" dirty="0"/>
+          </a:p>
+        </p:txBody>
+      </p:sp>
+      <p:pic>
+        <p:nvPicPr>
+          <p:cNvPr id="18" name="Status unknown" descr="Status unknown"/>
+          <p:cNvPicPr>
+            <a:picLocks noChangeAspect="1"/>
+          </p:cNvPicPr>
+          <p:nvPr/>
+        </p:nvPicPr>
+        <p:blipFill>
+          <a:blip r:embed="rId5"/>
+          <a:stretch>
+            <a:fillRect/>
+          </a:stretch>
+        </p:blipFill>
+        <p:spPr>
+          <a:xfrm>
             <a:off x="822960" y="5495544"/>
             <a:ext cx="329184" cy="329184"/>
           </a:xfrm>
@@ -3778,7 +3672,7 @@
           <a:bodyPr wrap="square" lIns="0" tIns="0" rIns="0" bIns="0" rtlCol="0" anchor="t"/>
           <a:lstStyle/>
           <a:p>
-            <a:pPr indent="0" marL="0">
+            <a:pPr marL="0" indent="0">
               <a:buNone/>
             </a:pPr>
             <a:r>
@@ -3814,7 +3708,7 @@
           <a:bodyPr wrap="square" lIns="0" tIns="0" rIns="0" bIns="0" rtlCol="0" anchor="t"/>
           <a:lstStyle/>
           <a:p>
-            <a:pPr indent="0" marL="0">
+            <a:pPr marL="0" indent="0">
               <a:buNone/>
             </a:pPr>
             <a:r>
@@ -3823,7 +3717,47 @@
                   <a:schemeClr val="accent6"/>
                 </a:solidFill>
               </a:rPr>
-              <a:t>nie zgadujemy — prosimy o uzupełnienie</a:t>
+              <a:t>nie </a:t>
+            </a:r>
+            <a:r>
+              <a:rPr lang="en-US" sz="1200" dirty="0" err="1">
+                <a:solidFill>
+                  <a:schemeClr val="accent6"/>
+                </a:solidFill>
+              </a:rPr>
+              <a:t>zgadujemy</a:t>
+            </a:r>
+            <a:r>
+              <a:rPr lang="en-US" sz="1200" dirty="0">
+                <a:solidFill>
+                  <a:schemeClr val="accent6"/>
+                </a:solidFill>
+              </a:rPr>
+              <a:t> </a:t>
+            </a:r>
+            <a:r>
+              <a:rPr lang="pl-PL" sz="1200" dirty="0">
+                <a:solidFill>
+                  <a:schemeClr val="accent6"/>
+                </a:solidFill>
+              </a:rPr>
+              <a:t>– </a:t>
+            </a:r>
+            <a:r>
+              <a:rPr lang="en-US" sz="1200" dirty="0" err="1">
+                <a:solidFill>
+                  <a:schemeClr val="accent6"/>
+                </a:solidFill>
+              </a:rPr>
+              <a:t>prosimy</a:t>
+            </a:r>
+            <a:r>
+              <a:rPr lang="en-US" sz="1200" dirty="0">
+                <a:solidFill>
+                  <a:schemeClr val="accent6"/>
+                </a:solidFill>
+              </a:rPr>
+              <a:t> o uzupełnienie</a:t>
             </a:r>
             <a:endParaRPr lang="en-US" sz="1200" dirty="0"/>
           </a:p>
@@ -3850,13 +3784,13 @@
           <a:bodyPr wrap="square" lIns="0" tIns="0" rIns="0" bIns="0" rtlCol="0" anchor="ctr"/>
           <a:lstStyle/>
           <a:p>
-            <a:pPr indent="0" marL="0">
+            <a:pPr marL="0" indent="0">
               <a:buNone/>
             </a:pPr>
             <a:r>
               <a:rPr lang="en-US" sz="6400" b="1" dirty="0">
                 <a:solidFill>
-                  <a:schemeClr val="accent4"/>
+                  <a:schemeClr val="tx2"/>
                 </a:solidFill>
                 <a:latin typeface="Arial" pitchFamily="34" charset="0"/>
                 <a:ea typeface="Arial" pitchFamily="34" charset="-122"/>
@@ -3864,7 +3798,11 @@
               </a:rPr>
               <a:t>79%</a:t>
             </a:r>
-            <a:endParaRPr lang="en-US" sz="6400" dirty="0"/>
+            <a:endParaRPr lang="en-US" sz="6400" dirty="0">
+              <a:solidFill>
+                <a:schemeClr val="tx2"/>
+              </a:solidFill>
+            </a:endParaRPr>
           </a:p>
         </p:txBody>
       </p:sp>
@@ -3889,7 +3827,7 @@
           <a:bodyPr wrap="square" lIns="0" tIns="0" rIns="0" bIns="0" rtlCol="0" anchor="t"/>
           <a:lstStyle/>
           <a:p>
-            <a:pPr indent="0" marL="0">
+            <a:pPr marL="0" indent="0">
               <a:buNone/>
             </a:pPr>
             <a:r>
@@ -3925,13 +3863,13 @@
           <a:bodyPr wrap="square" lIns="0" tIns="0" rIns="0" bIns="0" rtlCol="0" anchor="ctr"/>
           <a:lstStyle/>
           <a:p>
-            <a:pPr indent="0" marL="0">
+            <a:pPr marL="0" indent="0">
               <a:buNone/>
             </a:pPr>
             <a:r>
               <a:rPr lang="en-US" sz="6400" b="1" dirty="0">
                 <a:solidFill>
-                  <a:schemeClr val="accent5"/>
+                  <a:schemeClr val="tx2"/>
                 </a:solidFill>
                 <a:latin typeface="Arial" pitchFamily="34" charset="0"/>
                 <a:ea typeface="Arial" pitchFamily="34" charset="-122"/>
@@ -3939,7 +3877,11 @@
               </a:rPr>
               <a:t>26%</a:t>
             </a:r>
-            <a:endParaRPr lang="en-US" sz="6400" dirty="0"/>
+            <a:endParaRPr lang="en-US" sz="6400" dirty="0">
+              <a:solidFill>
+                <a:schemeClr val="tx2"/>
+              </a:solidFill>
+            </a:endParaRPr>
           </a:p>
         </p:txBody>
       </p:sp>
@@ -3964,7 +3906,7 @@
           <a:bodyPr wrap="square" lIns="0" tIns="0" rIns="0" bIns="0" rtlCol="0" anchor="t"/>
           <a:lstStyle/>
           <a:p>
-            <a:pPr indent="0" marL="0">
+            <a:pPr marL="0" indent="0">
               <a:buNone/>
             </a:pPr>
             <a:r>
@@ -4000,7 +3942,7 @@
           <a:bodyPr wrap="square" lIns="0" tIns="0" rIns="0" bIns="0" rtlCol="0" anchor="t"/>
           <a:lstStyle/>
           <a:p>
-            <a:pPr indent="0" marL="0">
+            <a:pPr marL="0" indent="0">
               <a:buNone/>
             </a:pPr>
             <a:r>
@@ -4009,7 +3951,39 @@
                   <a:schemeClr val="tx2"/>
                 </a:solidFill>
               </a:rPr>
-              <a:t>Dlatego pokazujemy fakty z datą i źródłem, a luki nazywamy wprost — zamiast udawać pewność.</a:t>
+              <a:t>Dlatego pokazujemy fakty z datą i źródłem, a luki </a:t>
+            </a:r>
+            <a:r>
+              <a:rPr lang="en-US" sz="1600" b="1" dirty="0" err="1">
+                <a:solidFill>
+                  <a:schemeClr val="tx2"/>
+                </a:solidFill>
+              </a:rPr>
+              <a:t>nazywamy</a:t>
+            </a:r>
+            <a:r>
+              <a:rPr lang="en-US" sz="1600" b="1" dirty="0">
+                <a:solidFill>
+                  <a:schemeClr val="tx2"/>
+                </a:solidFill>
+              </a:rPr>
+              <a:t> </a:t>
+            </a:r>
+            <a:r>
+              <a:rPr lang="en-US" sz="1600" b="1" dirty="0" err="1">
+                <a:solidFill>
+                  <a:schemeClr val="tx2"/>
+                </a:solidFill>
+              </a:rPr>
+              <a:t>wprost</a:t>
+            </a:r>
+            <a:r>
+              <a:rPr lang="pl-PL" sz="1600" b="1" dirty="0">
+                <a:solidFill>
+                  <a:schemeClr val="tx2"/>
+                </a:solidFill>
+              </a:rPr>
+              <a:t>.</a:t>
             </a:r>
             <a:endParaRPr lang="en-US" sz="1600" dirty="0"/>
           </a:p>
@@ -4036,7 +4010,7 @@
           <a:bodyPr wrap="square" lIns="0" tIns="0" rIns="0" bIns="0" rtlCol="0" anchor="t"/>
           <a:lstStyle/>
           <a:p>
-            <a:pPr indent="0" marL="0">
+            <a:pPr marL="0" indent="0">
               <a:buNone/>
             </a:pPr>
             <a:r>
@@ -4053,7 +4027,7 @@
       </p:sp>
       <p:sp>
         <p:nvSpPr>
-          <p:cNvPr id="25" name="Slide Number Placeholder 0"/>
+          <p:cNvPr id="27" name="Slide Number Placeholder 0"/>
           <p:cNvSpPr>
             <a:spLocks noGrp="1"/>
           </p:cNvSpPr>
@@ -4071,7 +4045,7 @@
           </a:prstGeom>
           <a:extLst>
             <a:ext uri="{C572A759-6A51-4108-AA02-DFA0A04FC94B}">
-              <ma14:wrappingTextBoxFlag xmlns:ma14="http://schemas.microsoft.com/office/mac/drawingml/2011/main" val="0"/>
+              <ma14:wrappingTextBoxFlag xmlns:ma14="http://schemas.microsoft.com/office/mac/drawingml/2011/main" xmlns="" val="0"/>
             </a:ext>
           </a:extLst>
         </p:spPr>
@@ -4089,7 +4063,7 @@
           <a:p>
             <a:pPr algn="r"/>
             <a:fld id="{F7021451-1387-4CA6-816F-3879F97B5CBC}" type="slidenum">
-              <a:rPr b="0" lang="en-US"/>
+              <a:rPr lang="en-US" b="0"/>
               <a:t>2</a:t>
             </a:fld>
             <a:endParaRPr lang="en-US"/>
@@ -4124,9 +4098,11 @@
       <p:sp>
         <p:nvSpPr>
           <p:cNvPr id="2" name="Text 0"/>
-          <p:cNvSpPr/>
+          <p:cNvSpPr>
+            <a:spLocks noGrp="1"/>
+          </p:cNvSpPr>
           <p:nvPr>
-            <p:ph idx="100" type="title" hasCustomPrompt="1"/>
+            <p:ph type="title" idx="100" hasCustomPrompt="1"/>
           </p:nvPr>
         </p:nvSpPr>
         <p:spPr>
@@ -4144,7 +4120,7 @@
           <a:bodyPr wrap="square" lIns="0" tIns="0" rIns="0" bIns="0" rtlCol="0" anchor="ctr"/>
           <a:lstStyle/>
           <a:p>
-            <a:pPr algn="l" indent="0" marL="0">
+            <a:pPr marL="0" indent="0" algn="l">
               <a:buNone/>
             </a:pPr>
             <a:r>
@@ -4188,24 +4164,31 @@
             <a:prstDash val="solid"/>
           </a:ln>
           <a:effectLst>
-            <a:outerShdw sx="100000" sy="100000" kx="0" ky="0" algn="bl" rotWithShape="0" blurRad="101600" dist="38100" dir="5400000">
+            <a:outerShdw blurRad="101600" dist="38100" dir="5400000" algn="bl" rotWithShape="0">
               <a:srgbClr val="0E2238">
                 <a:alpha val="25000"/>
               </a:srgbClr>
             </a:outerShdw>
           </a:effectLst>
         </p:spPr>
+        <p:txBody>
+          <a:bodyPr/>
+          <a:lstStyle/>
+          <a:p>
+            <a:endParaRPr lang="pl-PL"/>
+          </a:p>
+        </p:txBody>
       </p:sp>
       <p:pic>
         <p:nvPicPr>
-          <p:cNvPr id="4" name="Ustaw, co jest dla Ciebie barierą" descr="Zrzut ekranu aplikacji BezProgu: Ustaw, co jest dla Ciebie barierą">    </p:cNvPr>
+          <p:cNvPr id="4" name="Ustaw, co jest dla Ciebie barierą" descr="Zrzut ekranu aplikacji BezProgu: Ustaw, co jest dla Ciebie barierą"/>
           <p:cNvPicPr>
             <a:picLocks noChangeAspect="1"/>
           </p:cNvPicPr>
           <p:nvPr/>
         </p:nvPicPr>
         <p:blipFill>
-          <a:blip r:embed="rId1"/>
+          <a:blip r:embed="rId3"/>
           <a:stretch>
             <a:fillRect/>
           </a:stretch>
@@ -4244,6 +4227,13 @@
             <a:prstDash val="solid"/>
           </a:ln>
         </p:spPr>
+        <p:txBody>
+          <a:bodyPr/>
+          <a:lstStyle/>
+          <a:p>
+            <a:endParaRPr lang="pl-PL"/>
+          </a:p>
+        </p:txBody>
       </p:sp>
       <p:sp>
         <p:nvSpPr>
@@ -4266,7 +4256,7 @@
           <a:bodyPr wrap="square" lIns="0" tIns="0" rIns="0" bIns="0" rtlCol="0" anchor="ctr"/>
           <a:lstStyle/>
           <a:p>
-            <a:pPr algn="ctr" indent="0" marL="0">
+            <a:pPr marL="0" indent="0" algn="ctr">
               <a:buNone/>
             </a:pPr>
             <a:r>
@@ -4302,7 +4292,7 @@
           <a:bodyPr wrap="square" lIns="0" tIns="0" rIns="0" bIns="0" rtlCol="0" anchor="ctr"/>
           <a:lstStyle/>
           <a:p>
-            <a:pPr indent="0" marL="0">
+            <a:pPr marL="0" indent="0">
               <a:buNone/>
             </a:pPr>
             <a:r>
@@ -4338,7 +4328,7 @@
           <a:bodyPr wrap="square" lIns="0" tIns="0" rIns="0" bIns="0" rtlCol="0" anchor="t"/>
           <a:lstStyle/>
           <a:p>
-            <a:pPr indent="0" marL="0">
+            <a:pPr marL="0" indent="0">
               <a:buNone/>
             </a:pPr>
             <a:r>
@@ -4379,24 +4369,31 @@
             <a:prstDash val="solid"/>
           </a:ln>
           <a:effectLst>
-            <a:outerShdw sx="100000" sy="100000" kx="0" ky="0" algn="bl" rotWithShape="0" blurRad="101600" dist="38100" dir="5400000">
+            <a:outerShdw blurRad="101600" dist="38100" dir="5400000" algn="bl" rotWithShape="0">
               <a:srgbClr val="0E2238">
                 <a:alpha val="25000"/>
               </a:srgbClr>
             </a:outerShdw>
           </a:effectLst>
         </p:spPr>
+        <p:txBody>
+          <a:bodyPr/>
+          <a:lstStyle/>
+          <a:p>
+            <a:endParaRPr lang="pl-PL"/>
+          </a:p>
+        </p:txBody>
       </p:sp>
       <p:pic>
         <p:nvPicPr>
-          <p:cNvPr id="10" name="Znajdź miejsce lub trasę" descr="Zrzut ekranu aplikacji BezProgu: Znajdź miejsce lub trasę">    </p:cNvPr>
+          <p:cNvPr id="10" name="Znajdź miejsce lub trasę" descr="Zrzut ekranu aplikacji BezProgu: Znajdź miejsce lub trasę"/>
           <p:cNvPicPr>
             <a:picLocks noChangeAspect="1"/>
           </p:cNvPicPr>
           <p:nvPr/>
         </p:nvPicPr>
         <p:blipFill>
-          <a:blip r:embed="rId2"/>
+          <a:blip r:embed="rId4"/>
           <a:stretch>
             <a:fillRect/>
           </a:stretch>
@@ -4435,6 +4432,13 @@
             <a:prstDash val="solid"/>
           </a:ln>
         </p:spPr>
+        <p:txBody>
+          <a:bodyPr/>
+          <a:lstStyle/>
+          <a:p>
+            <a:endParaRPr lang="pl-PL"/>
+          </a:p>
+        </p:txBody>
       </p:sp>
       <p:sp>
         <p:nvSpPr>
@@ -4457,7 +4461,7 @@
           <a:bodyPr wrap="square" lIns="0" tIns="0" rIns="0" bIns="0" rtlCol="0" anchor="ctr"/>
           <a:lstStyle/>
           <a:p>
-            <a:pPr algn="ctr" indent="0" marL="0">
+            <a:pPr marL="0" indent="0" algn="ctr">
               <a:buNone/>
             </a:pPr>
             <a:r>
@@ -4493,7 +4497,7 @@
           <a:bodyPr wrap="square" lIns="0" tIns="0" rIns="0" bIns="0" rtlCol="0" anchor="ctr"/>
           <a:lstStyle/>
           <a:p>
-            <a:pPr indent="0" marL="0">
+            <a:pPr marL="0" indent="0">
               <a:buNone/>
             </a:pPr>
             <a:r>
@@ -4529,7 +4533,7 @@
           <a:bodyPr wrap="square" lIns="0" tIns="0" rIns="0" bIns="0" rtlCol="0" anchor="t"/>
           <a:lstStyle/>
           <a:p>
-            <a:pPr indent="0" marL="0">
+            <a:pPr marL="0" indent="0">
               <a:buNone/>
             </a:pPr>
             <a:r>
@@ -4570,24 +4574,31 @@
             <a:prstDash val="solid"/>
           </a:ln>
           <a:effectLst>
-            <a:outerShdw sx="100000" sy="100000" kx="0" ky="0" algn="bl" rotWithShape="0" blurRad="101600" dist="38100" dir="5400000">
+            <a:outerShdw blurRad="101600" dist="38100" dir="5400000" algn="bl" rotWithShape="0">
               <a:srgbClr val="0E2238">
                 <a:alpha val="25000"/>
               </a:srgbClr>
             </a:outerShdw>
           </a:effectLst>
         </p:spPr>
+        <p:txBody>
+          <a:bodyPr/>
+          <a:lstStyle/>
+          <a:p>
+            <a:endParaRPr lang="pl-PL"/>
+          </a:p>
+        </p:txBody>
       </p:sp>
       <p:pic>
         <p:nvPicPr>
-          <p:cNvPr id="16" name="Oceń sam, bez werdyktu" descr="Zrzut ekranu aplikacji BezProgu: Oceń sam, bez werdyktu">    </p:cNvPr>
+          <p:cNvPr id="16" name="Oceń sam, bez werdyktu" descr="Zrzut ekranu aplikacji BezProgu: Oceń sam, bez werdyktu"/>
           <p:cNvPicPr>
             <a:picLocks noChangeAspect="1"/>
           </p:cNvPicPr>
           <p:nvPr/>
         </p:nvPicPr>
         <p:blipFill>
-          <a:blip r:embed="rId3"/>
+          <a:blip r:embed="rId5"/>
           <a:stretch>
             <a:fillRect/>
           </a:stretch>
@@ -4626,6 +4637,13 @@
             <a:prstDash val="solid"/>
           </a:ln>
         </p:spPr>
+        <p:txBody>
+          <a:bodyPr/>
+          <a:lstStyle/>
+          <a:p>
+            <a:endParaRPr lang="pl-PL"/>
+          </a:p>
+        </p:txBody>
       </p:sp>
       <p:sp>
         <p:nvSpPr>
@@ -4648,7 +4666,7 @@
           <a:bodyPr wrap="square" lIns="0" tIns="0" rIns="0" bIns="0" rtlCol="0" anchor="ctr"/>
           <a:lstStyle/>
           <a:p>
-            <a:pPr algn="ctr" indent="0" marL="0">
+            <a:pPr marL="0" indent="0" algn="ctr">
               <a:buNone/>
             </a:pPr>
             <a:r>
@@ -4684,16 +4702,40 @@
           <a:bodyPr wrap="square" lIns="0" tIns="0" rIns="0" bIns="0" rtlCol="0" anchor="ctr"/>
           <a:lstStyle/>
           <a:p>
-            <a:pPr indent="0" marL="0">
+            <a:pPr marL="0" indent="0">
               <a:buNone/>
             </a:pPr>
             <a:r>
+              <a:rPr lang="en-US" sz="1700" b="1" dirty="0" err="1">
+                <a:solidFill>
+                  <a:schemeClr val="tx2"/>
+                </a:solidFill>
+              </a:rPr>
+              <a:t>Oceń</a:t>
+            </a:r>
+            <a:r>
               <a:rPr lang="en-US" sz="1700" b="1" dirty="0">
                 <a:solidFill>
                   <a:schemeClr val="tx2"/>
                 </a:solidFill>
               </a:rPr>
-              <a:t>Oceń sam, bez werdyktu</a:t>
+              <a:t> </a:t>
+            </a:r>
+            <a:r>
+              <a:rPr lang="en-US" sz="1700" b="1" dirty="0" err="1">
+                <a:solidFill>
+                  <a:schemeClr val="tx2"/>
+                </a:solidFill>
+              </a:rPr>
+              <a:t>sam</a:t>
+            </a:r>
+            <a:r>
+              <a:rPr lang="pl-PL" sz="1700" b="1" dirty="0">
+                <a:solidFill>
+                  <a:schemeClr val="tx2"/>
+                </a:solidFill>
+              </a:rPr>
+              <a:t> – pomóż innym</a:t>
             </a:r>
             <a:endParaRPr lang="en-US" sz="1700" dirty="0"/>
           </a:p>
@@ -4720,7 +4762,7 @@
           <a:bodyPr wrap="square" lIns="0" tIns="0" rIns="0" bIns="0" rtlCol="0" anchor="t"/>
           <a:lstStyle/>
           <a:p>
-            <a:pPr indent="0" marL="0">
+            <a:pPr marL="0" indent="0">
               <a:buNone/>
             </a:pPr>
             <a:r>
@@ -4755,7 +4797,7 @@
           </a:prstGeom>
           <a:extLst>
             <a:ext uri="{C572A759-6A51-4108-AA02-DFA0A04FC94B}">
-              <ma14:wrappingTextBoxFlag xmlns:ma14="http://schemas.microsoft.com/office/mac/drawingml/2011/main" val="0"/>
+              <ma14:wrappingTextBoxFlag xmlns:ma14="http://schemas.microsoft.com/office/mac/drawingml/2011/main" xmlns="" val="0"/>
             </a:ext>
           </a:extLst>
         </p:spPr>
@@ -4773,7 +4815,7 @@
           <a:p>
             <a:pPr algn="r"/>
             <a:fld id="{F7021451-1387-4CA6-816F-3879F97B5CBC}" type="slidenum">
-              <a:rPr b="0" lang="en-US"/>
+              <a:rPr lang="en-US" b="0"/>
               <a:t>3</a:t>
             </a:fld>
             <a:endParaRPr lang="en-US"/>
@@ -4808,9 +4850,11 @@
       <p:sp>
         <p:nvSpPr>
           <p:cNvPr id="2" name="Text 0"/>
-          <p:cNvSpPr/>
+          <p:cNvSpPr>
+            <a:spLocks noGrp="1"/>
+          </p:cNvSpPr>
           <p:nvPr>
-            <p:ph idx="100" type="title" hasCustomPrompt="1"/>
+            <p:ph type="title" idx="100" hasCustomPrompt="1"/>
           </p:nvPr>
         </p:nvSpPr>
         <p:spPr>
@@ -4828,7 +4872,7 @@
           <a:bodyPr wrap="square" lIns="0" tIns="0" rIns="0" bIns="0" rtlCol="0" anchor="ctr"/>
           <a:lstStyle/>
           <a:p>
-            <a:pPr algn="l" indent="0" marL="0">
+            <a:pPr marL="0" indent="0" algn="l">
               <a:buNone/>
             </a:pPr>
             <a:r>
@@ -4872,24 +4916,31 @@
             <a:prstDash val="solid"/>
           </a:ln>
           <a:effectLst>
-            <a:outerShdw sx="100000" sy="100000" kx="0" ky="0" algn="bl" rotWithShape="0" blurRad="101600" dist="38100" dir="5400000">
+            <a:outerShdw blurRad="101600" dist="38100" dir="5400000" algn="bl" rotWithShape="0">
               <a:srgbClr val="0E2238">
                 <a:alpha val="25000"/>
               </a:srgbClr>
             </a:outerShdw>
           </a:effectLst>
         </p:spPr>
+        <p:txBody>
+          <a:bodyPr/>
+          <a:lstStyle/>
+          <a:p>
+            <a:endParaRPr lang="pl-PL"/>
+          </a:p>
+        </p:txBody>
       </p:sp>
       <p:pic>
         <p:nvPicPr>
-          <p:cNvPr id="4" name="Karta miejsca — podsumowanie" descr="Zrzut ekranu aplikacji BezProgu: Karta miejsca — podsumowanie">    </p:cNvPr>
+          <p:cNvPr id="4" name="Karta miejsca — podsumowanie" descr="Zrzut ekranu aplikacji BezProgu: Karta miejsca — podsumowanie"/>
           <p:cNvPicPr>
             <a:picLocks noChangeAspect="1"/>
           </p:cNvPicPr>
           <p:nvPr/>
         </p:nvPicPr>
         <p:blipFill>
-          <a:blip r:embed="rId1"/>
+          <a:blip r:embed="rId3"/>
           <a:stretch>
             <a:fillRect/>
           </a:stretch>
@@ -4930,137 +4981,24 @@
             <a:prstDash val="solid"/>
           </a:ln>
           <a:effectLst>
-            <a:outerShdw sx="100000" sy="100000" kx="0" ky="0" algn="bl" rotWithShape="0" blurRad="101600" dist="38100" dir="5400000">
+            <a:outerShdw blurRad="101600" dist="38100" dir="5400000" algn="bl" rotWithShape="0">
               <a:srgbClr val="0E2238">
                 <a:alpha val="25000"/>
               </a:srgbClr>
             </a:outerShdw>
           </a:effectLst>
         </p:spPr>
+        <p:txBody>
+          <a:bodyPr/>
+          <a:lstStyle/>
+          <a:p>
+            <a:endParaRPr lang="pl-PL"/>
+          </a:p>
+        </p:txBody>
       </p:sp>
       <p:pic>
         <p:nvPicPr>
-          <p:cNvPr id="6" name="Karta miejsca — dane sprzeczne" descr="Zrzut ekranu aplikacji BezProgu: Karta miejsca — dane sprzeczne">    </p:cNvPr>
-          <p:cNvPicPr>
-            <a:picLocks noChangeAspect="1"/>
-          </p:cNvPicPr>
-          <p:nvPr/>
-        </p:nvPicPr>
-        <p:blipFill>
-          <a:blip r:embed="rId2"/>
-          <a:stretch>
-            <a:fillRect/>
-          </a:stretch>
-        </p:blipFill>
-        <p:spPr>
-          <a:xfrm>
-            <a:off x="3063240" y="1325880"/>
-            <a:ext cx="2260540" cy="4892040"/>
-          </a:xfrm>
-          <a:prstGeom prst="rect">
-            <a:avLst/>
-          </a:prstGeom>
-        </p:spPr>
-      </p:pic>
-      <p:pic>
-        <p:nvPicPr>
-          <p:cNvPr id="7" name="Bariera dla Twojego profilu" descr="Bariera dla Twojego profilu">    </p:cNvPr>
-          <p:cNvPicPr>
-            <a:picLocks noChangeAspect="1"/>
-          </p:cNvPicPr>
-          <p:nvPr/>
-        </p:nvPicPr>
-        <p:blipFill>
-          <a:blip r:embed="rId3"/>
-          <a:stretch>
-            <a:fillRect/>
-          </a:stretch>
-        </p:blipFill>
-        <p:spPr>
-          <a:xfrm>
-            <a:off x="5989320" y="1362456"/>
-            <a:ext cx="384048" cy="384048"/>
-          </a:xfrm>
-          <a:prstGeom prst="rect">
-            <a:avLst/>
-          </a:prstGeom>
-        </p:spPr>
-      </p:pic>
-      <p:sp>
-        <p:nvSpPr>
-          <p:cNvPr id="8" name="Text 3"/>
-          <p:cNvSpPr txBox="1"/>
-          <p:nvPr/>
-        </p:nvSpPr>
-        <p:spPr>
-          <a:xfrm>
-            <a:off x="6537960" y="1325880"/>
-            <a:ext cx="5120640" cy="329184"/>
-          </a:xfrm>
-          <a:prstGeom prst="rect">
-            <a:avLst/>
-          </a:prstGeom>
-          <a:noFill/>
-          <a:ln/>
-        </p:spPr>
-        <p:txBody>
-          <a:bodyPr wrap="square" lIns="0" tIns="0" rIns="0" bIns="0" rtlCol="0" anchor="t"/>
-          <a:lstStyle/>
-          <a:p>
-            <a:pPr indent="0" marL="0">
-              <a:buNone/>
-            </a:pPr>
-            <a:r>
-              <a:rPr lang="en-US" sz="1700" b="1" dirty="0">
-                <a:solidFill>
-                  <a:schemeClr val="tx2"/>
-                </a:solidFill>
-              </a:rPr>
-              <a:t>Bariera dla Twojego profilu</a:t>
-            </a:r>
-            <a:endParaRPr lang="en-US" sz="1700" dirty="0"/>
-          </a:p>
-        </p:txBody>
-      </p:sp>
-      <p:sp>
-        <p:nvSpPr>
-          <p:cNvPr id="9" name="Text 4"/>
-          <p:cNvSpPr txBox="1"/>
-          <p:nvPr/>
-        </p:nvSpPr>
-        <p:spPr>
-          <a:xfrm>
-            <a:off x="6537960" y="1673352"/>
-            <a:ext cx="5120640" cy="566928"/>
-          </a:xfrm>
-          <a:prstGeom prst="rect">
-            <a:avLst/>
-          </a:prstGeom>
-          <a:noFill/>
-          <a:ln/>
-        </p:spPr>
-        <p:txBody>
-          <a:bodyPr wrap="square" lIns="0" tIns="0" rIns="0" bIns="0" rtlCol="0" anchor="t"/>
-          <a:lstStyle/>
-          <a:p>
-            <a:pPr indent="0" marL="0">
-              <a:buNone/>
-            </a:pPr>
-            <a:r>
-              <a:rPr lang="en-US" sz="1400" dirty="0">
-                <a:solidFill>
-                  <a:schemeClr val="tx1"/>
-                </a:solidFill>
-              </a:rPr>
-              <a:t>3 stopnie przy wejściu głównym (Twoje maksimum: 0), potwierdzone przez właściciela.</a:t>
-            </a:r>
-            <a:endParaRPr lang="en-US" sz="1400" dirty="0"/>
-          </a:p>
-        </p:txBody>
-      </p:sp>
-      <p:pic>
-        <p:nvPicPr>
-          <p:cNvPr id="10" name="Najważniejsza uwaga na samej górze" descr="Najważniejsza uwaga na samej górze">    </p:cNvPr>
+          <p:cNvPr id="6" name="Karta miejsca — dane sprzeczne" descr="Zrzut ekranu aplikacji BezProgu: Karta miejsca — dane sprzeczne"/>
           <p:cNvPicPr>
             <a:picLocks noChangeAspect="1"/>
           </p:cNvPicPr>
@@ -5074,89 +5012,17 @@
         </p:blipFill>
         <p:spPr>
           <a:xfrm>
-            <a:off x="5989320" y="2340864"/>
-            <a:ext cx="384048" cy="384048"/>
+            <a:off x="3063240" y="1325880"/>
+            <a:ext cx="2260540" cy="4892040"/>
           </a:xfrm>
           <a:prstGeom prst="rect">
             <a:avLst/>
           </a:prstGeom>
         </p:spPr>
       </p:pic>
-      <p:sp>
-        <p:nvSpPr>
-          <p:cNvPr id="11" name="Text 5"/>
-          <p:cNvSpPr txBox="1"/>
-          <p:nvPr/>
-        </p:nvSpPr>
-        <p:spPr>
-          <a:xfrm>
-            <a:off x="6537960" y="2304288"/>
-            <a:ext cx="5120640" cy="329184"/>
-          </a:xfrm>
-          <a:prstGeom prst="rect">
-            <a:avLst/>
-          </a:prstGeom>
-          <a:noFill/>
-          <a:ln/>
-        </p:spPr>
-        <p:txBody>
-          <a:bodyPr wrap="square" lIns="0" tIns="0" rIns="0" bIns="0" rtlCol="0" anchor="t"/>
-          <a:lstStyle/>
-          <a:p>
-            <a:pPr indent="0" marL="0">
-              <a:buNone/>
-            </a:pPr>
-            <a:r>
-              <a:rPr lang="en-US" sz="1700" b="1" dirty="0">
-                <a:solidFill>
-                  <a:schemeClr val="tx2"/>
-                </a:solidFill>
-              </a:rPr>
-              <a:t>Najważniejsza uwaga na samej górze</a:t>
-            </a:r>
-            <a:endParaRPr lang="en-US" sz="1700" dirty="0"/>
-          </a:p>
-        </p:txBody>
-      </p:sp>
-      <p:sp>
-        <p:nvSpPr>
-          <p:cNvPr id="12" name="Text 6"/>
-          <p:cNvSpPr txBox="1"/>
-          <p:nvPr/>
-        </p:nvSpPr>
-        <p:spPr>
-          <a:xfrm>
-            <a:off x="6537960" y="2651760"/>
-            <a:ext cx="5120640" cy="566928"/>
-          </a:xfrm>
-          <a:prstGeom prst="rect">
-            <a:avLst/>
-          </a:prstGeom>
-          <a:noFill/>
-          <a:ln/>
-        </p:spPr>
-        <p:txBody>
-          <a:bodyPr wrap="square" lIns="0" tIns="0" rIns="0" bIns="0" rtlCol="0" anchor="t"/>
-          <a:lstStyle/>
-          <a:p>
-            <a:pPr indent="0" marL="0">
-              <a:buNone/>
-            </a:pPr>
-            <a:r>
-              <a:rPr lang="en-US" sz="1400" dirty="0">
-                <a:solidFill>
-                  <a:schemeClr val="tx1"/>
-                </a:solidFill>
-              </a:rPr>
-              <a:t>Wejście od ul. Szewskiej z windą — informacja, która decyduje o wizycie.</a:t>
-            </a:r>
-            <a:endParaRPr lang="en-US" sz="1400" dirty="0"/>
-          </a:p>
-        </p:txBody>
-      </p:sp>
       <p:pic>
         <p:nvPicPr>
-          <p:cNvPr id="13" name="Dane sprzeczne: pokazujemy obie wersje" descr="Dane sprzeczne: pokazujemy obie wersje">    </p:cNvPr>
+          <p:cNvPr id="7" name="Bariera dla Twojego profilu" descr="Bariera dla Twojego profilu"/>
           <p:cNvPicPr>
             <a:picLocks noChangeAspect="1"/>
           </p:cNvPicPr>
@@ -5170,7 +5036,7 @@
         </p:blipFill>
         <p:spPr>
           <a:xfrm>
-            <a:off x="5989320" y="3319272"/>
+            <a:off x="5989320" y="1362456"/>
             <a:ext cx="384048" cy="384048"/>
           </a:xfrm>
           <a:prstGeom prst="rect">
@@ -5180,13 +5046,13 @@
       </p:pic>
       <p:sp>
         <p:nvSpPr>
-          <p:cNvPr id="14" name="Text 7"/>
+          <p:cNvPr id="8" name="Text 3"/>
           <p:cNvSpPr txBox="1"/>
           <p:nvPr/>
         </p:nvSpPr>
         <p:spPr>
           <a:xfrm>
-            <a:off x="6537960" y="3282696"/>
+            <a:off x="6537960" y="1325880"/>
             <a:ext cx="5120640" cy="329184"/>
           </a:xfrm>
           <a:prstGeom prst="rect">
@@ -5199,7 +5065,7 @@
           <a:bodyPr wrap="square" lIns="0" tIns="0" rIns="0" bIns="0" rtlCol="0" anchor="t"/>
           <a:lstStyle/>
           <a:p>
-            <a:pPr indent="0" marL="0">
+            <a:pPr marL="0" indent="0">
               <a:buNone/>
             </a:pPr>
             <a:r>
@@ -5208,7 +5074,7 @@
                   <a:schemeClr val="tx2"/>
                 </a:solidFill>
               </a:rPr>
-              <a:t>Dane sprzeczne: pokazujemy obie wersje</a:t>
+              <a:t>Bariera dla Twojego profilu</a:t>
             </a:r>
             <a:endParaRPr lang="en-US" sz="1700" dirty="0"/>
           </a:p>
@@ -5216,13 +5082,13 @@
       </p:sp>
       <p:sp>
         <p:nvSpPr>
-          <p:cNvPr id="15" name="Text 8"/>
+          <p:cNvPr id="9" name="Text 4"/>
           <p:cNvSpPr txBox="1"/>
           <p:nvPr/>
         </p:nvSpPr>
         <p:spPr>
           <a:xfrm>
-            <a:off x="6537960" y="3630168"/>
+            <a:off x="6537960" y="1673352"/>
             <a:ext cx="5120640" cy="566928"/>
           </a:xfrm>
           <a:prstGeom prst="rect">
@@ -5235,7 +5101,7 @@
           <a:bodyPr wrap="square" lIns="0" tIns="0" rIns="0" bIns="0" rtlCol="0" anchor="t"/>
           <a:lstStyle/>
           <a:p>
-            <a:pPr indent="0" marL="0">
+            <a:pPr marL="0" indent="0">
               <a:buNone/>
             </a:pPr>
             <a:r>
@@ -5244,7 +5110,7 @@
                   <a:schemeClr val="tx1"/>
                 </a:solidFill>
               </a:rPr>
-              <a:t>OSM: próg 2 cm, zgłoszenie: 5 cm. Do wyjaśnienia liczymy to jako barierę; odwiedzający może potwierdzić wersję.</a:t>
+              <a:t>3 stopnie przy wejściu głównym (Twoje maksimum: 0), potwierdzone przez właściciela.</a:t>
             </a:r>
             <a:endParaRPr lang="en-US" sz="1400" dirty="0"/>
           </a:p>
@@ -5252,7 +5118,7 @@
       </p:sp>
       <p:pic>
         <p:nvPicPr>
-          <p:cNvPr id="16" name="Stare dane są oznaczone" descr="Stare dane są oznaczone">    </p:cNvPr>
+          <p:cNvPr id="10" name="Najważniejsza uwaga na samej górze" descr="Najważniejsza uwaga na samej górze"/>
           <p:cNvPicPr>
             <a:picLocks noChangeAspect="1"/>
           </p:cNvPicPr>
@@ -5266,7 +5132,7 @@
         </p:blipFill>
         <p:spPr>
           <a:xfrm>
-            <a:off x="5989320" y="4297680"/>
+            <a:off x="5989320" y="2340864"/>
             <a:ext cx="384048" cy="384048"/>
           </a:xfrm>
           <a:prstGeom prst="rect">
@@ -5276,13 +5142,13 @@
       </p:pic>
       <p:sp>
         <p:nvSpPr>
-          <p:cNvPr id="17" name="Text 9"/>
+          <p:cNvPr id="11" name="Text 5"/>
           <p:cNvSpPr txBox="1"/>
           <p:nvPr/>
         </p:nvSpPr>
         <p:spPr>
           <a:xfrm>
-            <a:off x="6537960" y="4261104"/>
+            <a:off x="6537960" y="2304288"/>
             <a:ext cx="5120640" cy="329184"/>
           </a:xfrm>
           <a:prstGeom prst="rect">
@@ -5295,7 +5161,7 @@
           <a:bodyPr wrap="square" lIns="0" tIns="0" rIns="0" bIns="0" rtlCol="0" anchor="t"/>
           <a:lstStyle/>
           <a:p>
-            <a:pPr indent="0" marL="0">
+            <a:pPr marL="0" indent="0">
               <a:buNone/>
             </a:pPr>
             <a:r>
@@ -5304,7 +5170,7 @@
                   <a:schemeClr val="tx2"/>
                 </a:solidFill>
               </a:rPr>
-              <a:t>Stare dane są oznaczone</a:t>
+              <a:t>Najważniejsza uwaga na samej górze</a:t>
             </a:r>
             <a:endParaRPr lang="en-US" sz="1700" dirty="0"/>
           </a:p>
@@ -5312,13 +5178,13 @@
       </p:sp>
       <p:sp>
         <p:nvSpPr>
-          <p:cNvPr id="18" name="Text 10"/>
+          <p:cNvPr id="12" name="Text 6"/>
           <p:cNvSpPr txBox="1"/>
           <p:nvPr/>
         </p:nvSpPr>
         <p:spPr>
           <a:xfrm>
-            <a:off x="6537960" y="4608576"/>
+            <a:off x="6537960" y="2651760"/>
             <a:ext cx="5120640" cy="566928"/>
           </a:xfrm>
           <a:prstGeom prst="rect">
@@ -5331,7 +5197,7 @@
           <a:bodyPr wrap="square" lIns="0" tIns="0" rIns="0" bIns="0" rtlCol="0" anchor="t"/>
           <a:lstStyle/>
           <a:p>
-            <a:pPr indent="0" marL="0">
+            <a:pPr marL="0" indent="0">
               <a:buNone/>
             </a:pPr>
             <a:r>
@@ -5340,7 +5206,7 @@
                   <a:schemeClr val="tx1"/>
                 </a:solidFill>
               </a:rPr>
-              <a:t>Potwierdzenie sprzed ponad 2 lat → „Może być nieaktualne” i „Zadzwoń przed wizytą”.</a:t>
+              <a:t>Wejście od ul. Szewskiej z windą — informacja, która decyduje o wizycie.</a:t>
             </a:r>
             <a:endParaRPr lang="en-US" sz="1400" dirty="0"/>
           </a:p>
@@ -5348,7 +5214,7 @@
       </p:sp>
       <p:pic>
         <p:nvPicPr>
-          <p:cNvPr id="19" name="Brak danych to nie „dostępne”" descr="Brak danych to nie „dostępne”">    </p:cNvPr>
+          <p:cNvPr id="13" name="Dane sprzeczne: pokazujemy obie wersje" descr="Dane sprzeczne: pokazujemy obie wersje"/>
           <p:cNvPicPr>
             <a:picLocks noChangeAspect="1"/>
           </p:cNvPicPr>
@@ -5362,6 +5228,222 @@
         </p:blipFill>
         <p:spPr>
           <a:xfrm>
+            <a:off x="5989320" y="3319272"/>
+            <a:ext cx="384048" cy="384048"/>
+          </a:xfrm>
+          <a:prstGeom prst="rect">
+            <a:avLst/>
+          </a:prstGeom>
+        </p:spPr>
+      </p:pic>
+      <p:sp>
+        <p:nvSpPr>
+          <p:cNvPr id="14" name="Text 7"/>
+          <p:cNvSpPr txBox="1"/>
+          <p:nvPr/>
+        </p:nvSpPr>
+        <p:spPr>
+          <a:xfrm>
+            <a:off x="6537960" y="3282696"/>
+            <a:ext cx="5120640" cy="329184"/>
+          </a:xfrm>
+          <a:prstGeom prst="rect">
+            <a:avLst/>
+          </a:prstGeom>
+          <a:noFill/>
+          <a:ln/>
+        </p:spPr>
+        <p:txBody>
+          <a:bodyPr wrap="square" lIns="0" tIns="0" rIns="0" bIns="0" rtlCol="0" anchor="t"/>
+          <a:lstStyle/>
+          <a:p>
+            <a:pPr marL="0" indent="0">
+              <a:buNone/>
+            </a:pPr>
+            <a:r>
+              <a:rPr lang="en-US" sz="1700" b="1" dirty="0">
+                <a:solidFill>
+                  <a:schemeClr val="tx2"/>
+                </a:solidFill>
+              </a:rPr>
+              <a:t>Dane sprzeczne: pokazujemy obie wersje</a:t>
+            </a:r>
+            <a:endParaRPr lang="en-US" sz="1700" dirty="0"/>
+          </a:p>
+        </p:txBody>
+      </p:sp>
+      <p:sp>
+        <p:nvSpPr>
+          <p:cNvPr id="15" name="Text 8"/>
+          <p:cNvSpPr txBox="1"/>
+          <p:nvPr/>
+        </p:nvSpPr>
+        <p:spPr>
+          <a:xfrm>
+            <a:off x="6537960" y="3630168"/>
+            <a:ext cx="5120640" cy="566928"/>
+          </a:xfrm>
+          <a:prstGeom prst="rect">
+            <a:avLst/>
+          </a:prstGeom>
+          <a:noFill/>
+          <a:ln/>
+        </p:spPr>
+        <p:txBody>
+          <a:bodyPr wrap="square" lIns="0" tIns="0" rIns="0" bIns="0" rtlCol="0" anchor="t"/>
+          <a:lstStyle/>
+          <a:p>
+            <a:pPr marL="0" indent="0">
+              <a:buNone/>
+            </a:pPr>
+            <a:r>
+              <a:rPr lang="en-US" sz="1400" dirty="0">
+                <a:solidFill>
+                  <a:schemeClr val="tx1"/>
+                </a:solidFill>
+              </a:rPr>
+              <a:t>OSM: próg 2 cm, zgłoszenie: 5 cm. Do </a:t>
+            </a:r>
+            <a:r>
+              <a:rPr lang="pl-PL" sz="1400" dirty="0">
+                <a:solidFill>
+                  <a:schemeClr val="tx1"/>
+                </a:solidFill>
+              </a:rPr>
+              <a:t>momentu </a:t>
+            </a:r>
+            <a:r>
+              <a:rPr lang="en-US" sz="1400" dirty="0" err="1">
+                <a:solidFill>
+                  <a:schemeClr val="tx1"/>
+                </a:solidFill>
+              </a:rPr>
+              <a:t>wyjaśnienia</a:t>
+            </a:r>
+            <a:r>
+              <a:rPr lang="en-US" sz="1400" dirty="0">
+                <a:solidFill>
+                  <a:schemeClr val="tx1"/>
+                </a:solidFill>
+              </a:rPr>
+              <a:t> liczymy to jako barierę; odwiedzający może potwierdzić wersję.</a:t>
+            </a:r>
+            <a:endParaRPr lang="en-US" sz="1400" dirty="0"/>
+          </a:p>
+        </p:txBody>
+      </p:sp>
+      <p:pic>
+        <p:nvPicPr>
+          <p:cNvPr id="16" name="Stare dane są oznaczone" descr="Stare dane są oznaczone"/>
+          <p:cNvPicPr>
+            <a:picLocks noChangeAspect="1"/>
+          </p:cNvPicPr>
+          <p:nvPr/>
+        </p:nvPicPr>
+        <p:blipFill>
+          <a:blip r:embed="rId8"/>
+          <a:stretch>
+            <a:fillRect/>
+          </a:stretch>
+        </p:blipFill>
+        <p:spPr>
+          <a:xfrm>
+            <a:off x="5989320" y="4297680"/>
+            <a:ext cx="384048" cy="384048"/>
+          </a:xfrm>
+          <a:prstGeom prst="rect">
+            <a:avLst/>
+          </a:prstGeom>
+        </p:spPr>
+      </p:pic>
+      <p:sp>
+        <p:nvSpPr>
+          <p:cNvPr id="17" name="Text 9"/>
+          <p:cNvSpPr txBox="1"/>
+          <p:nvPr/>
+        </p:nvSpPr>
+        <p:spPr>
+          <a:xfrm>
+            <a:off x="6537960" y="4261104"/>
+            <a:ext cx="5120640" cy="329184"/>
+          </a:xfrm>
+          <a:prstGeom prst="rect">
+            <a:avLst/>
+          </a:prstGeom>
+          <a:noFill/>
+          <a:ln/>
+        </p:spPr>
+        <p:txBody>
+          <a:bodyPr wrap="square" lIns="0" tIns="0" rIns="0" bIns="0" rtlCol="0" anchor="t"/>
+          <a:lstStyle/>
+          <a:p>
+            <a:pPr marL="0" indent="0">
+              <a:buNone/>
+            </a:pPr>
+            <a:r>
+              <a:rPr lang="en-US" sz="1700" b="1" dirty="0">
+                <a:solidFill>
+                  <a:schemeClr val="tx2"/>
+                </a:solidFill>
+              </a:rPr>
+              <a:t>Stare dane są oznaczone</a:t>
+            </a:r>
+            <a:endParaRPr lang="en-US" sz="1700" dirty="0"/>
+          </a:p>
+        </p:txBody>
+      </p:sp>
+      <p:sp>
+        <p:nvSpPr>
+          <p:cNvPr id="18" name="Text 10"/>
+          <p:cNvSpPr txBox="1"/>
+          <p:nvPr/>
+        </p:nvSpPr>
+        <p:spPr>
+          <a:xfrm>
+            <a:off x="6537960" y="4608576"/>
+            <a:ext cx="5120640" cy="566928"/>
+          </a:xfrm>
+          <a:prstGeom prst="rect">
+            <a:avLst/>
+          </a:prstGeom>
+          <a:noFill/>
+          <a:ln/>
+        </p:spPr>
+        <p:txBody>
+          <a:bodyPr wrap="square" lIns="0" tIns="0" rIns="0" bIns="0" rtlCol="0" anchor="t"/>
+          <a:lstStyle/>
+          <a:p>
+            <a:pPr marL="0" indent="0">
+              <a:buNone/>
+            </a:pPr>
+            <a:r>
+              <a:rPr lang="en-US" sz="1400" dirty="0">
+                <a:solidFill>
+                  <a:schemeClr val="tx1"/>
+                </a:solidFill>
+              </a:rPr>
+              <a:t>Potwierdzenie sprzed ponad 2 lat → „Może być nieaktualne” i „Zadzwoń przed wizytą”.</a:t>
+            </a:r>
+            <a:endParaRPr lang="en-US" sz="1400" dirty="0"/>
+          </a:p>
+        </p:txBody>
+      </p:sp>
+      <p:pic>
+        <p:nvPicPr>
+          <p:cNvPr id="19" name="Brak danych to nie „dostępne”" descr="Brak danych to nie „dostępne”"/>
+          <p:cNvPicPr>
+            <a:picLocks noChangeAspect="1"/>
+          </p:cNvPicPr>
+          <p:nvPr/>
+        </p:nvPicPr>
+        <p:blipFill>
+          <a:blip r:embed="rId9"/>
+          <a:stretch>
+            <a:fillRect/>
+          </a:stretch>
+        </p:blipFill>
+        <p:spPr>
+          <a:xfrm>
             <a:off x="5989320" y="5276088"/>
             <a:ext cx="384048" cy="384048"/>
           </a:xfrm>
@@ -5391,7 +5473,7 @@
           <a:bodyPr wrap="square" lIns="0" tIns="0" rIns="0" bIns="0" rtlCol="0" anchor="t"/>
           <a:lstStyle/>
           <a:p>
-            <a:pPr indent="0" marL="0">
+            <a:pPr marL="0" indent="0">
               <a:buNone/>
             </a:pPr>
             <a:r>
@@ -5427,7 +5509,7 @@
           <a:bodyPr wrap="square" lIns="0" tIns="0" rIns="0" bIns="0" rtlCol="0" anchor="t"/>
           <a:lstStyle/>
           <a:p>
-            <a:pPr indent="0" marL="0">
+            <a:pPr marL="0" indent="0">
               <a:buNone/>
             </a:pPr>
             <a:r>
@@ -5470,17 +5552,24 @@
             <a:prstDash val="solid"/>
           </a:ln>
         </p:spPr>
+        <p:txBody>
+          <a:bodyPr/>
+          <a:lstStyle/>
+          <a:p>
+            <a:endParaRPr lang="pl-PL"/>
+          </a:p>
+        </p:txBody>
       </p:sp>
       <p:pic>
         <p:nvPicPr>
-          <p:cNvPr id="23" name="Ikona: Dane przykładowe zawsze oznaczone" descr="Ikona: Dane przykładowe zawsze oznaczone">    </p:cNvPr>
+          <p:cNvPr id="23" name="Ikona: Dane przykładowe zawsze oznaczone" descr="Ikona: Dane przykładowe zawsze oznaczone"/>
           <p:cNvPicPr>
             <a:picLocks noChangeAspect="1"/>
           </p:cNvPicPr>
           <p:nvPr/>
         </p:nvPicPr>
         <p:blipFill>
-          <a:blip r:embed="rId8"/>
+          <a:blip r:embed="rId10"/>
           <a:stretch>
             <a:fillRect/>
           </a:stretch>
@@ -5516,7 +5605,7 @@
           <a:bodyPr wrap="square" lIns="0" tIns="0" rIns="0" bIns="0" rtlCol="0" anchor="ctr"/>
           <a:lstStyle/>
           <a:p>
-            <a:pPr indent="0" marL="0">
+            <a:pPr marL="0" indent="0">
               <a:buNone/>
             </a:pPr>
             <a:r>
@@ -5551,7 +5640,7 @@
           </a:prstGeom>
           <a:extLst>
             <a:ext uri="{C572A759-6A51-4108-AA02-DFA0A04FC94B}">
-              <ma14:wrappingTextBoxFlag xmlns:ma14="http://schemas.microsoft.com/office/mac/drawingml/2011/main" val="0"/>
+              <ma14:wrappingTextBoxFlag xmlns:ma14="http://schemas.microsoft.com/office/mac/drawingml/2011/main" xmlns="" val="0"/>
             </a:ext>
           </a:extLst>
         </p:spPr>
@@ -5569,7 +5658,7 @@
           <a:p>
             <a:pPr algn="r"/>
             <a:fld id="{F7021451-1387-4CA6-816F-3879F97B5CBC}" type="slidenum">
-              <a:rPr b="0" lang="en-US"/>
+              <a:rPr lang="en-US" b="0"/>
               <a:t>4</a:t>
             </a:fld>
             <a:endParaRPr lang="en-US"/>
@@ -5604,9 +5693,11 @@
       <p:sp>
         <p:nvSpPr>
           <p:cNvPr id="2" name="Text 0"/>
-          <p:cNvSpPr/>
+          <p:cNvSpPr>
+            <a:spLocks noGrp="1"/>
+          </p:cNvSpPr>
           <p:nvPr>
-            <p:ph idx="100" type="title" hasCustomPrompt="1"/>
+            <p:ph type="title" idx="100" hasCustomPrompt="1"/>
           </p:nvPr>
         </p:nvSpPr>
         <p:spPr>
@@ -5624,7 +5715,7 @@
           <a:bodyPr wrap="square" lIns="0" tIns="0" rIns="0" bIns="0" rtlCol="0" anchor="ctr"/>
           <a:lstStyle/>
           <a:p>
-            <a:pPr algn="l" indent="0" marL="0">
+            <a:pPr marL="0" indent="0" algn="l">
               <a:buNone/>
             </a:pPr>
             <a:r>
@@ -5668,24 +5759,31 @@
             <a:prstDash val="solid"/>
           </a:ln>
           <a:effectLst>
-            <a:outerShdw sx="100000" sy="100000" kx="0" ky="0" algn="bl" rotWithShape="0" blurRad="101600" dist="38100" dir="5400000">
+            <a:outerShdw blurRad="101600" dist="38100" dir="5400000" algn="bl" rotWithShape="0">
               <a:srgbClr val="0E2238">
                 <a:alpha val="25000"/>
               </a:srgbClr>
             </a:outerShdw>
           </a:effectLst>
         </p:spPr>
+        <p:txBody>
+          <a:bodyPr/>
+          <a:lstStyle/>
+          <a:p>
+            <a:endParaRPr lang="pl-PL"/>
+          </a:p>
+        </p:txBody>
       </p:sp>
       <p:pic>
         <p:nvPicPr>
-          <p:cNvPr id="4" name="Trasa — podsumowanie" descr="Zrzut ekranu aplikacji BezProgu: Trasa — podsumowanie">    </p:cNvPr>
+          <p:cNvPr id="4" name="Trasa — podsumowanie" descr="Zrzut ekranu aplikacji BezProgu: Trasa — podsumowanie"/>
           <p:cNvPicPr>
             <a:picLocks noChangeAspect="1"/>
           </p:cNvPicPr>
           <p:nvPr/>
         </p:nvPicPr>
         <p:blipFill>
-          <a:blip r:embed="rId1"/>
+          <a:blip r:embed="rId3"/>
           <a:stretch>
             <a:fillRect/>
           </a:stretch>
@@ -5726,24 +5824,31 @@
             <a:prstDash val="solid"/>
           </a:ln>
           <a:effectLst>
-            <a:outerShdw sx="100000" sy="100000" kx="0" ky="0" algn="bl" rotWithShape="0" blurRad="101600" dist="38100" dir="5400000">
+            <a:outerShdw blurRad="101600" dist="38100" dir="5400000" algn="bl" rotWithShape="0">
               <a:srgbClr val="0E2238">
                 <a:alpha val="25000"/>
               </a:srgbClr>
             </a:outerShdw>
           </a:effectLst>
         </p:spPr>
+        <p:txBody>
+          <a:bodyPr/>
+          <a:lstStyle/>
+          <a:p>
+            <a:endParaRPr lang="pl-PL"/>
+          </a:p>
+        </p:txBody>
       </p:sp>
       <p:pic>
         <p:nvPicPr>
-          <p:cNvPr id="6" name="Trasa — kroki z barierami" descr="Zrzut ekranu aplikacji BezProgu: Trasa — kroki z barierami">    </p:cNvPr>
+          <p:cNvPr id="6" name="Trasa — kroki z barierami" descr="Zrzut ekranu aplikacji BezProgu: Trasa — kroki z barierami"/>
           <p:cNvPicPr>
             <a:picLocks noChangeAspect="1"/>
           </p:cNvPicPr>
           <p:nvPr/>
         </p:nvPicPr>
         <p:blipFill>
-          <a:blip r:embed="rId2"/>
+          <a:blip r:embed="rId4"/>
           <a:stretch>
             <a:fillRect/>
           </a:stretch>
@@ -5782,17 +5887,24 @@
             <a:prstDash val="solid"/>
           </a:ln>
         </p:spPr>
+        <p:txBody>
+          <a:bodyPr/>
+          <a:lstStyle/>
+          <a:p>
+            <a:endParaRPr lang="pl-PL"/>
+          </a:p>
+        </p:txBody>
       </p:sp>
       <p:pic>
         <p:nvPicPr>
-          <p:cNvPr id="8" name="Trasa" descr="Trasa">    </p:cNvPr>
+          <p:cNvPr id="8" name="Trasa" descr="Trasa"/>
           <p:cNvPicPr>
             <a:picLocks noChangeAspect="1"/>
           </p:cNvPicPr>
           <p:nvPr/>
         </p:nvPicPr>
         <p:blipFill>
-          <a:blip r:embed="rId3"/>
+          <a:blip r:embed="rId5"/>
           <a:stretch>
             <a:fillRect/>
           </a:stretch>
@@ -5828,7 +5940,7 @@
           <a:bodyPr wrap="square" lIns="0" tIns="0" rIns="0" bIns="0" rtlCol="0" anchor="ctr"/>
           <a:lstStyle/>
           <a:p>
-            <a:pPr indent="0" marL="0">
+            <a:pPr marL="0" indent="0">
               <a:buNone/>
             </a:pPr>
             <a:r>
@@ -5961,17 +6073,24 @@
             <a:prstDash val="solid"/>
           </a:ln>
         </p:spPr>
+        <p:txBody>
+          <a:bodyPr/>
+          <a:lstStyle/>
+          <a:p>
+            <a:endParaRPr lang="pl-PL"/>
+          </a:p>
+        </p:txBody>
       </p:sp>
       <p:pic>
         <p:nvPicPr>
-          <p:cNvPr id="12" name="Zgłoszenia" descr="Zgłoszenia">    </p:cNvPr>
+          <p:cNvPr id="12" name="Zgłoszenia" descr="Zgłoszenia"/>
           <p:cNvPicPr>
             <a:picLocks noChangeAspect="1"/>
           </p:cNvPicPr>
           <p:nvPr/>
         </p:nvPicPr>
         <p:blipFill>
-          <a:blip r:embed="rId4"/>
+          <a:blip r:embed="rId6"/>
           <a:stretch>
             <a:fillRect/>
           </a:stretch>
@@ -6007,7 +6126,7 @@
           <a:bodyPr wrap="square" lIns="0" tIns="0" rIns="0" bIns="0" rtlCol="0" anchor="ctr"/>
           <a:lstStyle/>
           <a:p>
-            <a:pPr indent="0" marL="0">
+            <a:pPr marL="0" indent="0">
               <a:buNone/>
             </a:pPr>
             <a:r>
@@ -6118,7 +6237,7 @@
           </a:prstGeom>
           <a:extLst>
             <a:ext uri="{C572A759-6A51-4108-AA02-DFA0A04FC94B}">
-              <ma14:wrappingTextBoxFlag xmlns:ma14="http://schemas.microsoft.com/office/mac/drawingml/2011/main" val="0"/>
+              <ma14:wrappingTextBoxFlag xmlns:ma14="http://schemas.microsoft.com/office/mac/drawingml/2011/main" xmlns="" val="0"/>
             </a:ext>
           </a:extLst>
         </p:spPr>
@@ -6136,7 +6255,7 @@
           <a:p>
             <a:pPr algn="r"/>
             <a:fld id="{F7021451-1387-4CA6-816F-3879F97B5CBC}" type="slidenum">
-              <a:rPr b="0" lang="en-US"/>
+              <a:rPr lang="en-US" b="0"/>
               <a:t>5</a:t>
             </a:fld>
             <a:endParaRPr lang="en-US"/>
@@ -6171,9 +6290,11 @@
       <p:sp>
         <p:nvSpPr>
           <p:cNvPr id="2" name="Text 0"/>
-          <p:cNvSpPr/>
+          <p:cNvSpPr>
+            <a:spLocks noGrp="1"/>
+          </p:cNvSpPr>
           <p:nvPr>
-            <p:ph idx="100" type="title" hasCustomPrompt="1"/>
+            <p:ph type="title" idx="100" hasCustomPrompt="1"/>
           </p:nvPr>
         </p:nvSpPr>
         <p:spPr>
@@ -6191,7 +6312,7 @@
           <a:bodyPr wrap="square" lIns="0" tIns="0" rIns="0" bIns="0" rtlCol="0" anchor="ctr"/>
           <a:lstStyle/>
           <a:p>
-            <a:pPr algn="l" indent="0" marL="0">
+            <a:pPr marL="0" indent="0" algn="l">
               <a:buNone/>
             </a:pPr>
             <a:r>
@@ -6235,17 +6356,24 @@
             <a:prstDash val="solid"/>
           </a:ln>
         </p:spPr>
+        <p:txBody>
+          <a:bodyPr/>
+          <a:lstStyle/>
+          <a:p>
+            <a:endParaRPr lang="pl-PL"/>
+          </a:p>
+        </p:txBody>
       </p:sp>
       <p:pic>
         <p:nvPicPr>
-          <p:cNvPr id="4" name="Potwierdzone" descr="Potwierdzone">    </p:cNvPr>
+          <p:cNvPr id="4" name="Potwierdzone" descr="Potwierdzone"/>
           <p:cNvPicPr>
             <a:picLocks noChangeAspect="1"/>
           </p:cNvPicPr>
           <p:nvPr/>
         </p:nvPicPr>
         <p:blipFill>
-          <a:blip r:embed="rId1"/>
+          <a:blip r:embed="rId3"/>
           <a:stretch>
             <a:fillRect/>
           </a:stretch>
@@ -6281,7 +6409,7 @@
           <a:bodyPr wrap="square" lIns="0" tIns="0" rIns="0" bIns="0" rtlCol="0" anchor="ctr"/>
           <a:lstStyle/>
           <a:p>
-            <a:pPr indent="0" marL="0">
+            <a:pPr marL="0" indent="0">
               <a:buNone/>
             </a:pPr>
             <a:r>
@@ -6317,7 +6445,7 @@
           <a:bodyPr wrap="square" lIns="0" tIns="0" rIns="0" bIns="0" rtlCol="0" anchor="t"/>
           <a:lstStyle/>
           <a:p>
-            <a:pPr indent="0" marL="0">
+            <a:pPr marL="0" indent="0">
               <a:buNone/>
             </a:pPr>
             <a:r>
@@ -6358,17 +6486,24 @@
             <a:prstDash val="solid"/>
           </a:ln>
         </p:spPr>
+        <p:txBody>
+          <a:bodyPr/>
+          <a:lstStyle/>
+          <a:p>
+            <a:endParaRPr lang="pl-PL"/>
+          </a:p>
+        </p:txBody>
       </p:sp>
       <p:pic>
         <p:nvPicPr>
-          <p:cNvPr id="8" name="Z otwartych danych" descr="Z otwartych danych">    </p:cNvPr>
+          <p:cNvPr id="8" name="Z otwartych danych" descr="Z otwartych danych"/>
           <p:cNvPicPr>
             <a:picLocks noChangeAspect="1"/>
           </p:cNvPicPr>
           <p:nvPr/>
         </p:nvPicPr>
         <p:blipFill>
-          <a:blip r:embed="rId2"/>
+          <a:blip r:embed="rId4"/>
           <a:stretch>
             <a:fillRect/>
           </a:stretch>
@@ -6404,7 +6539,7 @@
           <a:bodyPr wrap="square" lIns="0" tIns="0" rIns="0" bIns="0" rtlCol="0" anchor="ctr"/>
           <a:lstStyle/>
           <a:p>
-            <a:pPr indent="0" marL="0">
+            <a:pPr marL="0" indent="0">
               <a:buNone/>
             </a:pPr>
             <a:r>
@@ -6440,7 +6575,7 @@
           <a:bodyPr wrap="square" lIns="0" tIns="0" rIns="0" bIns="0" rtlCol="0" anchor="t"/>
           <a:lstStyle/>
           <a:p>
-            <a:pPr indent="0" marL="0">
+            <a:pPr marL="0" indent="0">
               <a:buNone/>
             </a:pPr>
             <a:r>
@@ -6481,17 +6616,24 @@
             <a:prstDash val="solid"/>
           </a:ln>
         </p:spPr>
+        <p:txBody>
+          <a:bodyPr/>
+          <a:lstStyle/>
+          <a:p>
+            <a:endParaRPr lang="pl-PL"/>
+          </a:p>
+        </p:txBody>
       </p:sp>
       <p:pic>
         <p:nvPicPr>
-          <p:cNvPr id="12" name="Zgłoszenie użytkownika" descr="Zgłoszenie użytkownika">    </p:cNvPr>
+          <p:cNvPr id="12" name="Zgłoszenie użytkownika" descr="Zgłoszenie użytkownika"/>
           <p:cNvPicPr>
             <a:picLocks noChangeAspect="1"/>
           </p:cNvPicPr>
           <p:nvPr/>
         </p:nvPicPr>
         <p:blipFill>
-          <a:blip r:embed="rId3"/>
+          <a:blip r:embed="rId5"/>
           <a:stretch>
             <a:fillRect/>
           </a:stretch>
@@ -6527,7 +6669,7 @@
           <a:bodyPr wrap="square" lIns="0" tIns="0" rIns="0" bIns="0" rtlCol="0" anchor="ctr"/>
           <a:lstStyle/>
           <a:p>
-            <a:pPr indent="0" marL="0">
+            <a:pPr marL="0" indent="0">
               <a:buNone/>
             </a:pPr>
             <a:r>
@@ -6563,7 +6705,7 @@
           <a:bodyPr wrap="square" lIns="0" tIns="0" rIns="0" bIns="0" rtlCol="0" anchor="t"/>
           <a:lstStyle/>
           <a:p>
-            <a:pPr indent="0" marL="0">
+            <a:pPr marL="0" indent="0">
               <a:buNone/>
             </a:pPr>
             <a:r>
@@ -6604,17 +6746,24 @@
             <a:prstDash val="solid"/>
           </a:ln>
         </p:spPr>
+        <p:txBody>
+          <a:bodyPr/>
+          <a:lstStyle/>
+          <a:p>
+            <a:endParaRPr lang="pl-PL"/>
+          </a:p>
+        </p:txBody>
       </p:sp>
       <p:pic>
         <p:nvPicPr>
-          <p:cNvPr id="16" name="Sprzeczne" descr="Sprzeczne">    </p:cNvPr>
+          <p:cNvPr id="16" name="Sprzeczne" descr="Sprzeczne"/>
           <p:cNvPicPr>
             <a:picLocks noChangeAspect="1"/>
           </p:cNvPicPr>
           <p:nvPr/>
         </p:nvPicPr>
         <p:blipFill>
-          <a:blip r:embed="rId4"/>
+          <a:blip r:embed="rId6"/>
           <a:stretch>
             <a:fillRect/>
           </a:stretch>
@@ -6650,7 +6799,7 @@
           <a:bodyPr wrap="square" lIns="0" tIns="0" rIns="0" bIns="0" rtlCol="0" anchor="ctr"/>
           <a:lstStyle/>
           <a:p>
-            <a:pPr indent="0" marL="0">
+            <a:pPr marL="0" indent="0">
               <a:buNone/>
             </a:pPr>
             <a:r>
@@ -6686,7 +6835,7 @@
           <a:bodyPr wrap="square" lIns="0" tIns="0" rIns="0" bIns="0" rtlCol="0" anchor="t"/>
           <a:lstStyle/>
           <a:p>
-            <a:pPr indent="0" marL="0">
+            <a:pPr marL="0" indent="0">
               <a:buNone/>
             </a:pPr>
             <a:r>
@@ -6727,17 +6876,24 @@
             <a:prstDash val="solid"/>
           </a:ln>
         </p:spPr>
+        <p:txBody>
+          <a:bodyPr/>
+          <a:lstStyle/>
+          <a:p>
+            <a:endParaRPr lang="pl-PL"/>
+          </a:p>
+        </p:txBody>
       </p:sp>
       <p:pic>
         <p:nvPicPr>
-          <p:cNvPr id="20" name="Może być nieaktualne" descr="Może być nieaktualne">    </p:cNvPr>
+          <p:cNvPr id="20" name="Może być nieaktualne" descr="Może być nieaktualne"/>
           <p:cNvPicPr>
             <a:picLocks noChangeAspect="1"/>
           </p:cNvPicPr>
           <p:nvPr/>
         </p:nvPicPr>
         <p:blipFill>
-          <a:blip r:embed="rId5"/>
+          <a:blip r:embed="rId7"/>
           <a:stretch>
             <a:fillRect/>
           </a:stretch>
@@ -6773,7 +6929,7 @@
           <a:bodyPr wrap="square" lIns="0" tIns="0" rIns="0" bIns="0" rtlCol="0" anchor="ctr"/>
           <a:lstStyle/>
           <a:p>
-            <a:pPr indent="0" marL="0">
+            <a:pPr marL="0" indent="0">
               <a:buNone/>
             </a:pPr>
             <a:r>
@@ -6809,7 +6965,7 @@
           <a:bodyPr wrap="square" lIns="0" tIns="0" rIns="0" bIns="0" rtlCol="0" anchor="t"/>
           <a:lstStyle/>
           <a:p>
-            <a:pPr indent="0" marL="0">
+            <a:pPr marL="0" indent="0">
               <a:buNone/>
             </a:pPr>
             <a:r>
@@ -6850,10 +7006,149 @@
             <a:prstDash val="solid"/>
           </a:ln>
         </p:spPr>
+        <p:txBody>
+          <a:bodyPr/>
+          <a:lstStyle/>
+          <a:p>
+            <a:endParaRPr lang="pl-PL"/>
+          </a:p>
+        </p:txBody>
       </p:sp>
       <p:pic>
         <p:nvPicPr>
-          <p:cNvPr id="24" name="Brak danych" descr="Brak danych">    </p:cNvPr>
+          <p:cNvPr id="24" name="Brak danych" descr="Brak danych"/>
+          <p:cNvPicPr>
+            <a:picLocks noChangeAspect="1"/>
+          </p:cNvPicPr>
+          <p:nvPr/>
+        </p:nvPicPr>
+        <p:blipFill>
+          <a:blip r:embed="rId8"/>
+          <a:stretch>
+            <a:fillRect/>
+          </a:stretch>
+        </p:blipFill>
+        <p:spPr>
+          <a:xfrm>
+            <a:off x="3813048" y="4654296"/>
+            <a:ext cx="347472" cy="347472"/>
+          </a:xfrm>
+          <a:prstGeom prst="rect">
+            <a:avLst/>
+          </a:prstGeom>
+        </p:spPr>
+      </p:pic>
+      <p:sp>
+        <p:nvSpPr>
+          <p:cNvPr id="25" name="Text 17"/>
+          <p:cNvSpPr txBox="1"/>
+          <p:nvPr/>
+        </p:nvSpPr>
+        <p:spPr>
+          <a:xfrm>
+            <a:off x="4270248" y="4617720"/>
+            <a:ext cx="2057400" cy="420624"/>
+          </a:xfrm>
+          <a:prstGeom prst="rect">
+            <a:avLst/>
+          </a:prstGeom>
+          <a:noFill/>
+          <a:ln/>
+        </p:spPr>
+        <p:txBody>
+          <a:bodyPr wrap="square" lIns="0" tIns="0" rIns="0" bIns="0" rtlCol="0" anchor="ctr"/>
+          <a:lstStyle/>
+          <a:p>
+            <a:pPr marL="0" indent="0">
+              <a:buNone/>
+            </a:pPr>
+            <a:r>
+              <a:rPr lang="en-US" sz="1500" b="1" dirty="0">
+                <a:solidFill>
+                  <a:schemeClr val="accent6"/>
+                </a:solidFill>
+              </a:rPr>
+              <a:t>Brak danych</a:t>
+            </a:r>
+            <a:endParaRPr lang="en-US" sz="1500" dirty="0"/>
+          </a:p>
+        </p:txBody>
+      </p:sp>
+      <p:sp>
+        <p:nvSpPr>
+          <p:cNvPr id="26" name="Text 18"/>
+          <p:cNvSpPr txBox="1"/>
+          <p:nvPr/>
+        </p:nvSpPr>
+        <p:spPr>
+          <a:xfrm>
+            <a:off x="3813048" y="5148072"/>
+            <a:ext cx="2432304" cy="566928"/>
+          </a:xfrm>
+          <a:prstGeom prst="rect">
+            <a:avLst/>
+          </a:prstGeom>
+          <a:noFill/>
+          <a:ln/>
+        </p:spPr>
+        <p:txBody>
+          <a:bodyPr wrap="square" lIns="0" tIns="0" rIns="0" bIns="0" rtlCol="0" anchor="t"/>
+          <a:lstStyle/>
+          <a:p>
+            <a:pPr marL="0" indent="0">
+              <a:buNone/>
+            </a:pPr>
+            <a:r>
+              <a:rPr lang="en-US" sz="1300" dirty="0">
+                <a:solidFill>
+                  <a:schemeClr val="tx1"/>
+                </a:solidFill>
+              </a:rPr>
+              <a:t>Nigdy nie traktujemy braku jako „dostępne”</a:t>
+            </a:r>
+            <a:endParaRPr lang="en-US" sz="1300" dirty="0"/>
+          </a:p>
+        </p:txBody>
+      </p:sp>
+      <p:sp>
+        <p:nvSpPr>
+          <p:cNvPr id="27" name="Text 19"/>
+          <p:cNvSpPr txBox="1"/>
+          <p:nvPr/>
+        </p:nvSpPr>
+        <p:spPr>
+          <a:xfrm>
+            <a:off x="6766560" y="1325880"/>
+            <a:ext cx="4876495" cy="411480"/>
+          </a:xfrm>
+          <a:prstGeom prst="rect">
+            <a:avLst/>
+          </a:prstGeom>
+          <a:noFill/>
+          <a:ln/>
+        </p:spPr>
+        <p:txBody>
+          <a:bodyPr wrap="square" lIns="0" tIns="0" rIns="0" bIns="0" rtlCol="0" anchor="t"/>
+          <a:lstStyle/>
+          <a:p>
+            <a:pPr marL="0" indent="0">
+              <a:buNone/>
+            </a:pPr>
+            <a:r>
+              <a:rPr lang="en-US" sz="2000" b="1" dirty="0">
+                <a:solidFill>
+                  <a:schemeClr val="tx2"/>
+                </a:solidFill>
+              </a:rPr>
+              <a:t>Gdy coś zawodzi</a:t>
+            </a:r>
+            <a:endParaRPr lang="en-US" sz="2000" dirty="0"/>
+          </a:p>
+        </p:txBody>
+      </p:sp>
+      <p:pic>
+        <p:nvPicPr>
+          <p:cNvPr id="28" name="Dane sprzeczne" descr="Dane sprzeczne"/>
           <p:cNvPicPr>
             <a:picLocks noChangeAspect="1"/>
           </p:cNvPicPr>
@@ -6867,7 +7162,7 @@
         </p:blipFill>
         <p:spPr>
           <a:xfrm>
-            <a:off x="3813048" y="4654296"/>
+            <a:off x="6766560" y="1901952"/>
             <a:ext cx="347472" cy="347472"/>
           </a:xfrm>
           <a:prstGeom prst="rect">
@@ -6877,14 +7172,14 @@
       </p:pic>
       <p:sp>
         <p:nvSpPr>
-          <p:cNvPr id="25" name="Text 17"/>
+          <p:cNvPr id="29" name="Text 20"/>
           <p:cNvSpPr txBox="1"/>
           <p:nvPr/>
         </p:nvSpPr>
         <p:spPr>
           <a:xfrm>
-            <a:off x="4270248" y="4617720"/>
-            <a:ext cx="2057400" cy="420624"/>
+            <a:off x="7269480" y="1874520"/>
+            <a:ext cx="4373575" cy="329184"/>
           </a:xfrm>
           <a:prstGeom prst="rect">
             <a:avLst/>
@@ -6893,34 +7188,34 @@
           <a:ln/>
         </p:spPr>
         <p:txBody>
-          <a:bodyPr wrap="square" lIns="0" tIns="0" rIns="0" bIns="0" rtlCol="0" anchor="ctr"/>
-          <a:lstStyle/>
-          <a:p>
-            <a:pPr indent="0" marL="0">
+          <a:bodyPr wrap="square" lIns="0" tIns="0" rIns="0" bIns="0" rtlCol="0" anchor="t"/>
+          <a:lstStyle/>
+          <a:p>
+            <a:pPr marL="0" indent="0">
               <a:buNone/>
             </a:pPr>
             <a:r>
-              <a:rPr lang="en-US" sz="1500" b="1" dirty="0">
-                <a:solidFill>
-                  <a:schemeClr val="accent6"/>
-                </a:solidFill>
-              </a:rPr>
-              <a:t>Brak danych</a:t>
-            </a:r>
-            <a:endParaRPr lang="en-US" sz="1500" dirty="0"/>
-          </a:p>
-        </p:txBody>
-      </p:sp>
-      <p:sp>
-        <p:nvSpPr>
-          <p:cNvPr id="26" name="Text 18"/>
+              <a:rPr lang="en-US" sz="1600" b="1" dirty="0">
+                <a:solidFill>
+                  <a:schemeClr val="tx1"/>
+                </a:solidFill>
+              </a:rPr>
+              <a:t>Dane sprzeczne</a:t>
+            </a:r>
+            <a:endParaRPr lang="en-US" sz="1600" dirty="0"/>
+          </a:p>
+        </p:txBody>
+      </p:sp>
+      <p:sp>
+        <p:nvSpPr>
+          <p:cNvPr id="30" name="Text 21"/>
           <p:cNvSpPr txBox="1"/>
           <p:nvPr/>
         </p:nvSpPr>
         <p:spPr>
           <a:xfrm>
-            <a:off x="3813048" y="5148072"/>
-            <a:ext cx="2432304" cy="566928"/>
+            <a:off x="7269480" y="2221992"/>
+            <a:ext cx="4373575" cy="685800"/>
           </a:xfrm>
           <a:prstGeom prst="rect">
             <a:avLst/>
@@ -6932,156 +7227,24 @@
           <a:bodyPr wrap="square" lIns="0" tIns="0" rIns="0" bIns="0" rtlCol="0" anchor="t"/>
           <a:lstStyle/>
           <a:p>
-            <a:pPr indent="0" marL="0">
+            <a:pPr marL="0" indent="0">
               <a:buNone/>
             </a:pPr>
             <a:r>
-              <a:rPr lang="en-US" sz="1300" dirty="0">
+              <a:rPr lang="en-US" sz="1400" dirty="0">
                 <a:solidFill>
                   <a:schemeClr val="tx1"/>
                 </a:solidFill>
               </a:rPr>
-              <a:t>Nigdy nie traktujemy braku jako „dostępne”</a:t>
-            </a:r>
-            <a:endParaRPr lang="en-US" sz="1300" dirty="0"/>
-          </a:p>
-        </p:txBody>
-      </p:sp>
-      <p:sp>
-        <p:nvSpPr>
-          <p:cNvPr id="27" name="Text 19"/>
-          <p:cNvSpPr txBox="1"/>
-          <p:nvPr/>
-        </p:nvSpPr>
-        <p:spPr>
-          <a:xfrm>
-            <a:off x="6766560" y="1325880"/>
-            <a:ext cx="4876495" cy="411480"/>
-          </a:xfrm>
-          <a:prstGeom prst="rect">
-            <a:avLst/>
-          </a:prstGeom>
-          <a:noFill/>
-          <a:ln/>
-        </p:spPr>
-        <p:txBody>
-          <a:bodyPr wrap="square" lIns="0" tIns="0" rIns="0" bIns="0" rtlCol="0" anchor="t"/>
-          <a:lstStyle/>
-          <a:p>
-            <a:pPr indent="0" marL="0">
-              <a:buNone/>
-            </a:pPr>
-            <a:r>
-              <a:rPr lang="en-US" sz="2000" b="1" dirty="0">
-                <a:solidFill>
-                  <a:schemeClr val="tx2"/>
-                </a:solidFill>
-              </a:rPr>
-              <a:t>Gdy coś zawodzi</a:t>
-            </a:r>
-            <a:endParaRPr lang="en-US" sz="2000" dirty="0"/>
+              <a:t>Wszystkie wersje obok siebie z datami. Dopasowanie liczymy ostrożnie: bariera z dowolnego źródła wygrywa.</a:t>
+            </a:r>
+            <a:endParaRPr lang="en-US" sz="1400" dirty="0"/>
           </a:p>
         </p:txBody>
       </p:sp>
       <p:pic>
         <p:nvPicPr>
-          <p:cNvPr id="28" name="Dane sprzeczne" descr="Dane sprzeczne">    </p:cNvPr>
-          <p:cNvPicPr>
-            <a:picLocks noChangeAspect="1"/>
-          </p:cNvPicPr>
-          <p:nvPr/>
-        </p:nvPicPr>
-        <p:blipFill>
-          <a:blip r:embed="rId7"/>
-          <a:stretch>
-            <a:fillRect/>
-          </a:stretch>
-        </p:blipFill>
-        <p:spPr>
-          <a:xfrm>
-            <a:off x="6766560" y="1901952"/>
-            <a:ext cx="347472" cy="347472"/>
-          </a:xfrm>
-          <a:prstGeom prst="rect">
-            <a:avLst/>
-          </a:prstGeom>
-        </p:spPr>
-      </p:pic>
-      <p:sp>
-        <p:nvSpPr>
-          <p:cNvPr id="29" name="Text 20"/>
-          <p:cNvSpPr txBox="1"/>
-          <p:nvPr/>
-        </p:nvSpPr>
-        <p:spPr>
-          <a:xfrm>
-            <a:off x="7269480" y="1874520"/>
-            <a:ext cx="4373575" cy="329184"/>
-          </a:xfrm>
-          <a:prstGeom prst="rect">
-            <a:avLst/>
-          </a:prstGeom>
-          <a:noFill/>
-          <a:ln/>
-        </p:spPr>
-        <p:txBody>
-          <a:bodyPr wrap="square" lIns="0" tIns="0" rIns="0" bIns="0" rtlCol="0" anchor="t"/>
-          <a:lstStyle/>
-          <a:p>
-            <a:pPr indent="0" marL="0">
-              <a:buNone/>
-            </a:pPr>
-            <a:r>
-              <a:rPr lang="en-US" sz="1600" b="1" dirty="0">
-                <a:solidFill>
-                  <a:schemeClr val="tx1"/>
-                </a:solidFill>
-              </a:rPr>
-              <a:t>Dane sprzeczne</a:t>
-            </a:r>
-            <a:endParaRPr lang="en-US" sz="1600" dirty="0"/>
-          </a:p>
-        </p:txBody>
-      </p:sp>
-      <p:sp>
-        <p:nvSpPr>
-          <p:cNvPr id="30" name="Text 21"/>
-          <p:cNvSpPr txBox="1"/>
-          <p:nvPr/>
-        </p:nvSpPr>
-        <p:spPr>
-          <a:xfrm>
-            <a:off x="7269480" y="2221992"/>
-            <a:ext cx="4373575" cy="685800"/>
-          </a:xfrm>
-          <a:prstGeom prst="rect">
-            <a:avLst/>
-          </a:prstGeom>
-          <a:noFill/>
-          <a:ln/>
-        </p:spPr>
-        <p:txBody>
-          <a:bodyPr wrap="square" lIns="0" tIns="0" rIns="0" bIns="0" rtlCol="0" anchor="t"/>
-          <a:lstStyle/>
-          <a:p>
-            <a:pPr indent="0" marL="0">
-              <a:buNone/>
-            </a:pPr>
-            <a:r>
-              <a:rPr lang="en-US" sz="1400" dirty="0">
-                <a:solidFill>
-                  <a:schemeClr val="tx1"/>
-                </a:solidFill>
-              </a:rPr>
-              <a:t>Wszystkie wersje obok siebie z datami. Dopasowanie liczymy ostrożnie: bariera z dowolnego źródła wygrywa.</a:t>
-            </a:r>
-            <a:endParaRPr lang="en-US" sz="1400" dirty="0"/>
-          </a:p>
-        </p:txBody>
-      </p:sp>
-      <p:pic>
-        <p:nvPicPr>
-          <p:cNvPr id="31" name="Dane niepełne" descr="Dane niepełne">    </p:cNvPr>
+          <p:cNvPr id="31" name="Dane niepełne" descr="Dane niepełne"/>
           <p:cNvPicPr>
             <a:picLocks noChangeAspect="1"/>
           </p:cNvPicPr>
@@ -7124,7 +7287,7 @@
           <a:bodyPr wrap="square" lIns="0" tIns="0" rIns="0" bIns="0" rtlCol="0" anchor="t"/>
           <a:lstStyle/>
           <a:p>
-            <a:pPr indent="0" marL="0">
+            <a:pPr marL="0" indent="0">
               <a:buNone/>
             </a:pPr>
             <a:r>
@@ -7160,7 +7323,7 @@
           <a:bodyPr wrap="square" lIns="0" tIns="0" rIns="0" bIns="0" rtlCol="0" anchor="t"/>
           <a:lstStyle/>
           <a:p>
-            <a:pPr indent="0" marL="0">
+            <a:pPr marL="0" indent="0">
               <a:buNone/>
             </a:pPr>
             <a:r>
@@ -7177,7 +7340,7 @@
       </p:sp>
       <p:pic>
         <p:nvPicPr>
-          <p:cNvPr id="34" name="Źródło niedostępne" descr="Źródło niedostępne">    </p:cNvPr>
+          <p:cNvPr id="34" name="Źródło niedostępne" descr="Źródło niedostępne"/>
           <p:cNvPicPr>
             <a:picLocks noChangeAspect="1"/>
           </p:cNvPicPr>
@@ -7220,7 +7383,7 @@
           <a:bodyPr wrap="square" lIns="0" tIns="0" rIns="0" bIns="0" rtlCol="0" anchor="t"/>
           <a:lstStyle/>
           <a:p>
-            <a:pPr indent="0" marL="0">
+            <a:pPr marL="0" indent="0">
               <a:buNone/>
             </a:pPr>
             <a:r>
@@ -7256,7 +7419,7 @@
           <a:bodyPr wrap="square" lIns="0" tIns="0" rIns="0" bIns="0" rtlCol="0" anchor="t"/>
           <a:lstStyle/>
           <a:p>
-            <a:pPr indent="0" marL="0">
+            <a:pPr marL="0" indent="0">
               <a:buNone/>
             </a:pPr>
             <a:r>
@@ -7297,6 +7460,13 @@
             <a:prstDash val="solid"/>
           </a:ln>
         </p:spPr>
+        <p:txBody>
+          <a:bodyPr/>
+          <a:lstStyle/>
+          <a:p>
+            <a:endParaRPr lang="pl-PL"/>
+          </a:p>
+        </p:txBody>
       </p:sp>
       <p:sp>
         <p:nvSpPr>
@@ -7319,7 +7489,7 @@
           <a:bodyPr wrap="square" lIns="0" tIns="0" rIns="0" bIns="0" rtlCol="0" anchor="ctr"/>
           <a:lstStyle/>
           <a:p>
-            <a:pPr indent="0" marL="0">
+            <a:pPr marL="0" indent="0">
               <a:buNone/>
             </a:pPr>
             <a:r>
@@ -7336,7 +7506,7 @@
       </p:sp>
       <p:sp>
         <p:nvSpPr>
-          <p:cNvPr id="25" name="Slide Number Placeholder 0"/>
+          <p:cNvPr id="39" name="Slide Number Placeholder 0"/>
           <p:cNvSpPr>
             <a:spLocks noGrp="1"/>
           </p:cNvSpPr>
@@ -7354,7 +7524,7 @@
           </a:prstGeom>
           <a:extLst>
             <a:ext uri="{C572A759-6A51-4108-AA02-DFA0A04FC94B}">
-              <ma14:wrappingTextBoxFlag xmlns:ma14="http://schemas.microsoft.com/office/mac/drawingml/2011/main" val="0"/>
+              <ma14:wrappingTextBoxFlag xmlns:ma14="http://schemas.microsoft.com/office/mac/drawingml/2011/main" xmlns="" val="0"/>
             </a:ext>
           </a:extLst>
         </p:spPr>
@@ -7372,7 +7542,7 @@
           <a:p>
             <a:pPr algn="r"/>
             <a:fld id="{F7021451-1387-4CA6-816F-3879F97B5CBC}" type="slidenum">
-              <a:rPr b="0" lang="en-US"/>
+              <a:rPr lang="en-US" b="0"/>
               <a:t>6</a:t>
             </a:fld>
             <a:endParaRPr lang="en-US"/>
@@ -7407,9 +7577,11 @@
       <p:sp>
         <p:nvSpPr>
           <p:cNvPr id="2" name="Text 0"/>
-          <p:cNvSpPr/>
+          <p:cNvSpPr>
+            <a:spLocks noGrp="1"/>
+          </p:cNvSpPr>
           <p:nvPr>
-            <p:ph idx="100" type="title" hasCustomPrompt="1"/>
+            <p:ph type="title" idx="100" hasCustomPrompt="1"/>
           </p:nvPr>
         </p:nvSpPr>
         <p:spPr>
@@ -7427,7 +7599,7 @@
           <a:bodyPr wrap="square" lIns="0" tIns="0" rIns="0" bIns="0" rtlCol="0" anchor="ctr"/>
           <a:lstStyle/>
           <a:p>
-            <a:pPr algn="l" indent="0" marL="0">
+            <a:pPr marL="0" indent="0" algn="l">
               <a:buNone/>
             </a:pPr>
             <a:r>
@@ -7471,6 +7643,13 @@
             <a:prstDash val="solid"/>
           </a:ln>
         </p:spPr>
+        <p:txBody>
+          <a:bodyPr/>
+          <a:lstStyle/>
+          <a:p>
+            <a:endParaRPr lang="pl-PL"/>
+          </a:p>
+        </p:txBody>
       </p:sp>
       <p:sp>
         <p:nvSpPr>
@@ -7493,7 +7672,7 @@
           <a:bodyPr wrap="square" lIns="0" tIns="0" rIns="0" bIns="0" rtlCol="0" anchor="t"/>
           <a:lstStyle/>
           <a:p>
-            <a:pPr algn="ctr" indent="0" marL="0">
+            <a:pPr marL="0" indent="0" algn="ctr">
               <a:buNone/>
             </a:pPr>
             <a:r>
@@ -7529,7 +7708,7 @@
           <a:bodyPr wrap="square" lIns="0" tIns="0" rIns="0" bIns="0" rtlCol="0" anchor="t"/>
           <a:lstStyle/>
           <a:p>
-            <a:pPr algn="ctr" indent="0" marL="0">
+            <a:pPr marL="0" indent="0" algn="ctr">
               <a:buNone/>
             </a:pPr>
             <a:r>
@@ -7568,6 +7747,13 @@
             <a:prstDash val="solid"/>
           </a:ln>
         </p:spPr>
+        <p:txBody>
+          <a:bodyPr/>
+          <a:lstStyle/>
+          <a:p>
+            <a:endParaRPr lang="pl-PL"/>
+          </a:p>
+        </p:txBody>
       </p:sp>
       <p:sp>
         <p:nvSpPr>
@@ -7595,6 +7781,13 @@
             <a:prstDash val="solid"/>
           </a:ln>
         </p:spPr>
+        <p:txBody>
+          <a:bodyPr/>
+          <a:lstStyle/>
+          <a:p>
+            <a:endParaRPr lang="pl-PL"/>
+          </a:p>
+        </p:txBody>
       </p:sp>
       <p:sp>
         <p:nvSpPr>
@@ -7617,7 +7810,7 @@
           <a:bodyPr wrap="square" lIns="0" tIns="0" rIns="0" bIns="0" rtlCol="0" anchor="t"/>
           <a:lstStyle/>
           <a:p>
-            <a:pPr algn="ctr" indent="0" marL="0">
+            <a:pPr marL="0" indent="0" algn="ctr">
               <a:buNone/>
             </a:pPr>
             <a:r>
@@ -7653,7 +7846,7 @@
           <a:bodyPr wrap="square" lIns="0" tIns="0" rIns="0" bIns="0" rtlCol="0" anchor="t"/>
           <a:lstStyle/>
           <a:p>
-            <a:pPr algn="ctr" indent="0" marL="0">
+            <a:pPr marL="0" indent="0" algn="ctr">
               <a:buNone/>
             </a:pPr>
             <a:r>
@@ -7692,6 +7885,13 @@
             <a:prstDash val="solid"/>
           </a:ln>
         </p:spPr>
+        <p:txBody>
+          <a:bodyPr/>
+          <a:lstStyle/>
+          <a:p>
+            <a:endParaRPr lang="pl-PL"/>
+          </a:p>
+        </p:txBody>
       </p:sp>
       <p:sp>
         <p:nvSpPr>
@@ -7719,6 +7919,13 @@
             <a:prstDash val="solid"/>
           </a:ln>
         </p:spPr>
+        <p:txBody>
+          <a:bodyPr/>
+          <a:lstStyle/>
+          <a:p>
+            <a:endParaRPr lang="pl-PL"/>
+          </a:p>
+        </p:txBody>
       </p:sp>
       <p:sp>
         <p:nvSpPr>
@@ -7741,7 +7948,7 @@
           <a:bodyPr wrap="square" lIns="0" tIns="0" rIns="0" bIns="0" rtlCol="0" anchor="t"/>
           <a:lstStyle/>
           <a:p>
-            <a:pPr algn="ctr" indent="0" marL="0">
+            <a:pPr marL="0" indent="0" algn="ctr">
               <a:buNone/>
             </a:pPr>
             <a:r>
@@ -7777,7 +7984,7 @@
           <a:bodyPr wrap="square" lIns="0" tIns="0" rIns="0" bIns="0" rtlCol="0" anchor="t"/>
           <a:lstStyle/>
           <a:p>
-            <a:pPr algn="ctr" indent="0" marL="0">
+            <a:pPr marL="0" indent="0" algn="ctr">
               <a:buNone/>
             </a:pPr>
             <a:r>
@@ -7816,6 +8023,13 @@
             <a:prstDash val="solid"/>
           </a:ln>
         </p:spPr>
+        <p:txBody>
+          <a:bodyPr/>
+          <a:lstStyle/>
+          <a:p>
+            <a:endParaRPr lang="pl-PL"/>
+          </a:p>
+        </p:txBody>
       </p:sp>
       <p:sp>
         <p:nvSpPr>
@@ -7843,6 +8057,13 @@
             <a:prstDash val="solid"/>
           </a:ln>
         </p:spPr>
+        <p:txBody>
+          <a:bodyPr/>
+          <a:lstStyle/>
+          <a:p>
+            <a:endParaRPr lang="pl-PL"/>
+          </a:p>
+        </p:txBody>
       </p:sp>
       <p:sp>
         <p:nvSpPr>
@@ -7865,7 +8086,7 @@
           <a:bodyPr wrap="square" lIns="0" tIns="0" rIns="0" bIns="0" rtlCol="0" anchor="t"/>
           <a:lstStyle/>
           <a:p>
-            <a:pPr algn="ctr" indent="0" marL="0">
+            <a:pPr marL="0" indent="0" algn="ctr">
               <a:buNone/>
             </a:pPr>
             <a:r>
@@ -7901,7 +8122,7 @@
           <a:bodyPr wrap="square" lIns="0" tIns="0" rIns="0" bIns="0" rtlCol="0" anchor="t"/>
           <a:lstStyle/>
           <a:p>
-            <a:pPr algn="ctr" indent="0" marL="0">
+            <a:pPr marL="0" indent="0" algn="ctr">
               <a:buNone/>
             </a:pPr>
             <a:r>
@@ -7940,6 +8161,13 @@
             <a:prstDash val="solid"/>
           </a:ln>
         </p:spPr>
+        <p:txBody>
+          <a:bodyPr/>
+          <a:lstStyle/>
+          <a:p>
+            <a:endParaRPr lang="pl-PL"/>
+          </a:p>
+        </p:txBody>
       </p:sp>
       <p:sp>
         <p:nvSpPr>
@@ -7967,6 +8195,13 @@
             <a:prstDash val="solid"/>
           </a:ln>
         </p:spPr>
+        <p:txBody>
+          <a:bodyPr/>
+          <a:lstStyle/>
+          <a:p>
+            <a:endParaRPr lang="pl-PL"/>
+          </a:p>
+        </p:txBody>
       </p:sp>
       <p:sp>
         <p:nvSpPr>
@@ -7989,7 +8224,7 @@
           <a:bodyPr wrap="square" lIns="0" tIns="0" rIns="0" bIns="0" rtlCol="0" anchor="t"/>
           <a:lstStyle/>
           <a:p>
-            <a:pPr algn="ctr" indent="0" marL="0">
+            <a:pPr marL="0" indent="0" algn="ctr">
               <a:buNone/>
             </a:pPr>
             <a:r>
@@ -8025,7 +8260,7 @@
           <a:bodyPr wrap="square" lIns="0" tIns="0" rIns="0" bIns="0" rtlCol="0" anchor="t"/>
           <a:lstStyle/>
           <a:p>
-            <a:pPr algn="ctr" indent="0" marL="0">
+            <a:pPr marL="0" indent="0" algn="ctr">
               <a:buNone/>
             </a:pPr>
             <a:r>
@@ -8064,6 +8299,13 @@
             <a:prstDash val="solid"/>
           </a:ln>
         </p:spPr>
+        <p:txBody>
+          <a:bodyPr/>
+          <a:lstStyle/>
+          <a:p>
+            <a:endParaRPr lang="pl-PL"/>
+          </a:p>
+        </p:txBody>
       </p:sp>
       <p:sp>
         <p:nvSpPr>
@@ -8091,6 +8333,13 @@
             <a:prstDash val="solid"/>
           </a:ln>
         </p:spPr>
+        <p:txBody>
+          <a:bodyPr/>
+          <a:lstStyle/>
+          <a:p>
+            <a:endParaRPr lang="pl-PL"/>
+          </a:p>
+        </p:txBody>
       </p:sp>
       <p:sp>
         <p:nvSpPr>
@@ -8113,7 +8362,7 @@
           <a:bodyPr wrap="square" lIns="0" tIns="0" rIns="0" bIns="0" rtlCol="0" anchor="t"/>
           <a:lstStyle/>
           <a:p>
-            <a:pPr algn="ctr" indent="0" marL="0">
+            <a:pPr marL="0" indent="0" algn="ctr">
               <a:buNone/>
             </a:pPr>
             <a:r>
@@ -8149,7 +8398,7 @@
           <a:bodyPr wrap="square" lIns="0" tIns="0" rIns="0" bIns="0" rtlCol="0" anchor="t"/>
           <a:lstStyle/>
           <a:p>
-            <a:pPr algn="ctr" indent="0" marL="0">
+            <a:pPr marL="0" indent="0" algn="ctr">
               <a:buNone/>
             </a:pPr>
             <a:r>
@@ -8166,7 +8415,7 @@
       </p:sp>
       <p:graphicFrame>
         <p:nvGraphicFramePr>
-          <p:cNvPr id="8" name="Tabela źródeł danych"/>
+          <p:cNvPr id="26" name="Tabela źródeł danych"/>
           <p:cNvGraphicFramePr>
             <a:graphicFrameLocks noGrp="1"/>
           </p:cNvGraphicFramePr>
@@ -8180,18 +8429,48 @@
         </p:nvGraphicFramePr>
         <p:xfrm>
           <a:off x="548640" y="2971800"/>
-          <a:ext cx="7498080" cy="914400"/>
+          <a:ext cx="7498080" cy="2633472"/>
         </p:xfrm>
         <a:graphic>
           <a:graphicData uri="http://schemas.openxmlformats.org/drawingml/2006/table">
             <a:tbl>
               <a:tblPr/>
               <a:tblGrid>
-                <a:gridCol w="1554480"/>
-                <a:gridCol w="2514600"/>
-                <a:gridCol w="1188720"/>
-                <a:gridCol w="1005840"/>
-                <a:gridCol w="1234440"/>
+                <a:gridCol w="1554480">
+                  <a:extLst>
+                    <a:ext uri="{9D8B030D-6E8A-4147-A177-3AD203B41FA5}">
+                      <a16:colId xmlns:a16="http://schemas.microsoft.com/office/drawing/2014/main" val="20000"/>
+                    </a:ext>
+                  </a:extLst>
+                </a:gridCol>
+                <a:gridCol w="2514600">
+                  <a:extLst>
+                    <a:ext uri="{9D8B030D-6E8A-4147-A177-3AD203B41FA5}">
+                      <a16:colId xmlns:a16="http://schemas.microsoft.com/office/drawing/2014/main" val="20001"/>
+                    </a:ext>
+                  </a:extLst>
+                </a:gridCol>
+                <a:gridCol w="1188720">
+                  <a:extLst>
+                    <a:ext uri="{9D8B030D-6E8A-4147-A177-3AD203B41FA5}">
+                      <a16:colId xmlns:a16="http://schemas.microsoft.com/office/drawing/2014/main" val="20002"/>
+                    </a:ext>
+                  </a:extLst>
+                </a:gridCol>
+                <a:gridCol w="1005840">
+                  <a:extLst>
+                    <a:ext uri="{9D8B030D-6E8A-4147-A177-3AD203B41FA5}">
+                      <a16:colId xmlns:a16="http://schemas.microsoft.com/office/drawing/2014/main" val="20003"/>
+                    </a:ext>
+                  </a:extLst>
+                </a:gridCol>
+                <a:gridCol w="1234440">
+                  <a:extLst>
+                    <a:ext uri="{9D8B030D-6E8A-4147-A177-3AD203B41FA5}">
+                      <a16:colId xmlns:a16="http://schemas.microsoft.com/office/drawing/2014/main" val="20004"/>
+                    </a:ext>
+                  </a:extLst>
+                </a:gridCol>
               </a:tblGrid>
               <a:tr h="347472">
                 <a:tc>
@@ -8199,7 +8478,7 @@
                     <a:bodyPr/>
                     <a:lstStyle/>
                     <a:p>
-                      <a:pPr indent="0" marL="0">
+                      <a:pPr marL="0" indent="0">
                         <a:buNone/>
                       </a:pPr>
                       <a:r>
@@ -8220,7 +8499,7 @@
                       </a:endParaRPr>
                     </a:p>
                   </a:txBody>
-                  <a:tcPr marL="73152" marR="73152" marT="45720" marB="45720" anchor="ctr">
+                  <a:tcPr marL="73152" marR="73152" anchor="ctr">
                     <a:lnL w="6350" cap="flat" cmpd="sng" algn="ctr">
                       <a:solidFill>
                         <a:srgbClr val="C9D3DF"/>
@@ -8267,7 +8546,7 @@
                     <a:bodyPr/>
                     <a:lstStyle/>
                     <a:p>
-                      <a:pPr indent="0" marL="0">
+                      <a:pPr marL="0" indent="0">
                         <a:buNone/>
                       </a:pPr>
                       <a:r>
@@ -8288,7 +8567,7 @@
                       </a:endParaRPr>
                     </a:p>
                   </a:txBody>
-                  <a:tcPr marL="73152" marR="73152" marT="45720" marB="45720" anchor="ctr">
+                  <a:tcPr marL="73152" marR="73152" anchor="ctr">
                     <a:lnL w="6350" cap="flat" cmpd="sng" algn="ctr">
                       <a:solidFill>
                         <a:srgbClr val="C9D3DF"/>
@@ -8335,7 +8614,7 @@
                     <a:bodyPr/>
                     <a:lstStyle/>
                     <a:p>
-                      <a:pPr indent="0" marL="0">
+                      <a:pPr marL="0" indent="0">
                         <a:buNone/>
                       </a:pPr>
                       <a:r>
@@ -8356,7 +8635,7 @@
                       </a:endParaRPr>
                     </a:p>
                   </a:txBody>
-                  <a:tcPr marL="73152" marR="73152" marT="45720" marB="45720" anchor="ctr">
+                  <a:tcPr marL="73152" marR="73152" anchor="ctr">
                     <a:lnL w="6350" cap="flat" cmpd="sng" algn="ctr">
                       <a:solidFill>
                         <a:srgbClr val="C9D3DF"/>
@@ -8403,7 +8682,7 @@
                     <a:bodyPr/>
                     <a:lstStyle/>
                     <a:p>
-                      <a:pPr indent="0" marL="0">
+                      <a:pPr marL="0" indent="0">
                         <a:buNone/>
                       </a:pPr>
                       <a:r>
@@ -8424,7 +8703,7 @@
                       </a:endParaRPr>
                     </a:p>
                   </a:txBody>
-                  <a:tcPr marL="73152" marR="73152" marT="45720" marB="45720" anchor="ctr">
+                  <a:tcPr marL="73152" marR="73152" anchor="ctr">
                     <a:lnL w="6350" cap="flat" cmpd="sng" algn="ctr">
                       <a:solidFill>
                         <a:srgbClr val="C9D3DF"/>
@@ -8471,7 +8750,7 @@
                     <a:bodyPr/>
                     <a:lstStyle/>
                     <a:p>
-                      <a:pPr indent="0" marL="0">
+                      <a:pPr marL="0" indent="0">
                         <a:buNone/>
                       </a:pPr>
                       <a:r>
@@ -8492,7 +8771,7 @@
                       </a:endParaRPr>
                     </a:p>
                   </a:txBody>
-                  <a:tcPr marL="73152" marR="73152" marT="45720" marB="45720" anchor="ctr">
+                  <a:tcPr marL="73152" marR="73152" anchor="ctr">
                     <a:lnL w="6350" cap="flat" cmpd="sng" algn="ctr">
                       <a:solidFill>
                         <a:srgbClr val="C9D3DF"/>
@@ -8534,6 +8813,11 @@
                     </a:solidFill>
                   </a:tcPr>
                 </a:tc>
+                <a:extLst>
+                  <a:ext uri="{0D108BD9-81ED-4DB2-BD59-A6C34878D82A}">
+                    <a16:rowId xmlns:a16="http://schemas.microsoft.com/office/drawing/2014/main" val="10000"/>
+                  </a:ext>
+                </a:extLst>
               </a:tr>
               <a:tr h="566928">
                 <a:tc>
@@ -8541,7 +8825,7 @@
                     <a:bodyPr/>
                     <a:lstStyle/>
                     <a:p>
-                      <a:pPr indent="0" marL="0">
+                      <a:pPr marL="0" indent="0">
                         <a:buNone/>
                       </a:pPr>
                       <a:r>
@@ -8562,7 +8846,7 @@
                       </a:endParaRPr>
                     </a:p>
                   </a:txBody>
-                  <a:tcPr marL="73152" marR="73152" marT="45720" marB="45720" anchor="ctr">
+                  <a:tcPr marL="73152" marR="73152" anchor="ctr">
                     <a:lnL w="6350" cap="flat" cmpd="sng" algn="ctr">
                       <a:solidFill>
                         <a:srgbClr val="C9D3DF"/>
@@ -8606,7 +8890,7 @@
                     <a:bodyPr/>
                     <a:lstStyle/>
                     <a:p>
-                      <a:pPr indent="0" marL="0">
+                      <a:pPr marL="0" indent="0">
                         <a:buNone/>
                       </a:pPr>
                       <a:r>
@@ -8627,7 +8911,7 @@
                       </a:endParaRPr>
                     </a:p>
                   </a:txBody>
-                  <a:tcPr marL="73152" marR="73152" marT="45720" marB="45720" anchor="ctr">
+                  <a:tcPr marL="73152" marR="73152" anchor="ctr">
                     <a:lnL w="6350" cap="flat" cmpd="sng" algn="ctr">
                       <a:solidFill>
                         <a:srgbClr val="C9D3DF"/>
@@ -8671,7 +8955,7 @@
                     <a:bodyPr/>
                     <a:lstStyle/>
                     <a:p>
-                      <a:pPr indent="0" marL="0">
+                      <a:pPr marL="0" indent="0">
                         <a:buNone/>
                       </a:pPr>
                       <a:r>
@@ -8692,7 +8976,7 @@
                       </a:endParaRPr>
                     </a:p>
                   </a:txBody>
-                  <a:tcPr marL="73152" marR="73152" marT="45720" marB="45720" anchor="ctr">
+                  <a:tcPr marL="73152" marR="73152" anchor="ctr">
                     <a:lnL w="6350" cap="flat" cmpd="sng" algn="ctr">
                       <a:solidFill>
                         <a:srgbClr val="C9D3DF"/>
@@ -8736,7 +9020,7 @@
                     <a:bodyPr/>
                     <a:lstStyle/>
                     <a:p>
-                      <a:pPr indent="0" marL="0">
+                      <a:pPr marL="0" indent="0">
                         <a:buNone/>
                       </a:pPr>
                       <a:r>
@@ -8757,7 +9041,7 @@
                       </a:endParaRPr>
                     </a:p>
                   </a:txBody>
-                  <a:tcPr marL="73152" marR="73152" marT="45720" marB="45720" anchor="ctr">
+                  <a:tcPr marL="73152" marR="73152" anchor="ctr">
                     <a:lnL w="6350" cap="flat" cmpd="sng" algn="ctr">
                       <a:solidFill>
                         <a:srgbClr val="C9D3DF"/>
@@ -8801,7 +9085,7 @@
                     <a:bodyPr/>
                     <a:lstStyle/>
                     <a:p>
-                      <a:pPr indent="0" marL="0">
+                      <a:pPr marL="0" indent="0">
                         <a:buNone/>
                       </a:pPr>
                       <a:r>
@@ -8822,7 +9106,7 @@
                       </a:endParaRPr>
                     </a:p>
                   </a:txBody>
-                  <a:tcPr marL="73152" marR="73152" marT="45720" marB="45720" anchor="ctr">
+                  <a:tcPr marL="73152" marR="73152" anchor="ctr">
                     <a:lnL w="6350" cap="flat" cmpd="sng" algn="ctr">
                       <a:solidFill>
                         <a:srgbClr val="C9D3DF"/>
@@ -8861,6 +9145,11 @@
                     </a:lnB>
                   </a:tcPr>
                 </a:tc>
+                <a:extLst>
+                  <a:ext uri="{0D108BD9-81ED-4DB2-BD59-A6C34878D82A}">
+                    <a16:rowId xmlns:a16="http://schemas.microsoft.com/office/drawing/2014/main" val="10001"/>
+                  </a:ext>
+                </a:extLst>
               </a:tr>
               <a:tr h="566928">
                 <a:tc>
@@ -8868,7 +9157,7 @@
                     <a:bodyPr/>
                     <a:lstStyle/>
                     <a:p>
-                      <a:pPr indent="0" marL="0">
+                      <a:pPr marL="0" indent="0">
                         <a:buNone/>
                       </a:pPr>
                       <a:r>
@@ -8889,7 +9178,7 @@
                       </a:endParaRPr>
                     </a:p>
                   </a:txBody>
-                  <a:tcPr marL="73152" marR="73152" marT="45720" marB="45720" anchor="ctr">
+                  <a:tcPr marL="73152" marR="73152" anchor="ctr">
                     <a:lnL w="6350" cap="flat" cmpd="sng" algn="ctr">
                       <a:solidFill>
                         <a:srgbClr val="C9D3DF"/>
@@ -8933,7 +9222,7 @@
                     <a:bodyPr/>
                     <a:lstStyle/>
                     <a:p>
-                      <a:pPr indent="0" marL="0">
+                      <a:pPr marL="0" indent="0">
                         <a:buNone/>
                       </a:pPr>
                       <a:r>
@@ -8954,7 +9243,7 @@
                       </a:endParaRPr>
                     </a:p>
                   </a:txBody>
-                  <a:tcPr marL="73152" marR="73152" marT="45720" marB="45720" anchor="ctr">
+                  <a:tcPr marL="73152" marR="73152" anchor="ctr">
                     <a:lnL w="6350" cap="flat" cmpd="sng" algn="ctr">
                       <a:solidFill>
                         <a:srgbClr val="C9D3DF"/>
@@ -8998,7 +9287,7 @@
                     <a:bodyPr/>
                     <a:lstStyle/>
                     <a:p>
-                      <a:pPr indent="0" marL="0">
+                      <a:pPr marL="0" indent="0">
                         <a:buNone/>
                       </a:pPr>
                       <a:r>
@@ -9019,7 +9308,7 @@
                       </a:endParaRPr>
                     </a:p>
                   </a:txBody>
-                  <a:tcPr marL="73152" marR="73152" marT="45720" marB="45720" anchor="ctr">
+                  <a:tcPr marL="73152" marR="73152" anchor="ctr">
                     <a:lnL w="6350" cap="flat" cmpd="sng" algn="ctr">
                       <a:solidFill>
                         <a:srgbClr val="C9D3DF"/>
@@ -9063,7 +9352,7 @@
                     <a:bodyPr/>
                     <a:lstStyle/>
                     <a:p>
-                      <a:pPr indent="0" marL="0">
+                      <a:pPr marL="0" indent="0">
                         <a:buNone/>
                       </a:pPr>
                       <a:r>
@@ -9084,7 +9373,7 @@
                       </a:endParaRPr>
                     </a:p>
                   </a:txBody>
-                  <a:tcPr marL="73152" marR="73152" marT="45720" marB="45720" anchor="ctr">
+                  <a:tcPr marL="73152" marR="73152" anchor="ctr">
                     <a:lnL w="6350" cap="flat" cmpd="sng" algn="ctr">
                       <a:solidFill>
                         <a:srgbClr val="C9D3DF"/>
@@ -9128,7 +9417,7 @@
                     <a:bodyPr/>
                     <a:lstStyle/>
                     <a:p>
-                      <a:pPr indent="0" marL="0">
+                      <a:pPr marL="0" indent="0">
                         <a:buNone/>
                       </a:pPr>
                       <a:r>
@@ -9149,7 +9438,7 @@
                       </a:endParaRPr>
                     </a:p>
                   </a:txBody>
-                  <a:tcPr marL="73152" marR="73152" marT="45720" marB="45720" anchor="ctr">
+                  <a:tcPr marL="73152" marR="73152" anchor="ctr">
                     <a:lnL w="6350" cap="flat" cmpd="sng" algn="ctr">
                       <a:solidFill>
                         <a:srgbClr val="C9D3DF"/>
@@ -9188,6 +9477,11 @@
                     </a:lnB>
                   </a:tcPr>
                 </a:tc>
+                <a:extLst>
+                  <a:ext uri="{0D108BD9-81ED-4DB2-BD59-A6C34878D82A}">
+                    <a16:rowId xmlns:a16="http://schemas.microsoft.com/office/drawing/2014/main" val="10002"/>
+                  </a:ext>
+                </a:extLst>
               </a:tr>
               <a:tr h="566928">
                 <a:tc>
@@ -9195,7 +9489,7 @@
                     <a:bodyPr/>
                     <a:lstStyle/>
                     <a:p>
-                      <a:pPr indent="0" marL="0">
+                      <a:pPr marL="0" indent="0">
                         <a:buNone/>
                       </a:pPr>
                       <a:r>
@@ -9216,7 +9510,7 @@
                       </a:endParaRPr>
                     </a:p>
                   </a:txBody>
-                  <a:tcPr marL="73152" marR="73152" marT="45720" marB="45720" anchor="ctr">
+                  <a:tcPr marL="73152" marR="73152" anchor="ctr">
                     <a:lnL w="6350" cap="flat" cmpd="sng" algn="ctr">
                       <a:solidFill>
                         <a:srgbClr val="C9D3DF"/>
@@ -9260,7 +9554,7 @@
                     <a:bodyPr/>
                     <a:lstStyle/>
                     <a:p>
-                      <a:pPr indent="0" marL="0">
+                      <a:pPr marL="0" indent="0">
                         <a:buNone/>
                       </a:pPr>
                       <a:r>
@@ -9281,7 +9575,7 @@
                       </a:endParaRPr>
                     </a:p>
                   </a:txBody>
-                  <a:tcPr marL="73152" marR="73152" marT="45720" marB="45720" anchor="ctr">
+                  <a:tcPr marL="73152" marR="73152" anchor="ctr">
                     <a:lnL w="6350" cap="flat" cmpd="sng" algn="ctr">
                       <a:solidFill>
                         <a:srgbClr val="C9D3DF"/>
@@ -9325,7 +9619,7 @@
                     <a:bodyPr/>
                     <a:lstStyle/>
                     <a:p>
-                      <a:pPr indent="0" marL="0">
+                      <a:pPr marL="0" indent="0">
                         <a:buNone/>
                       </a:pPr>
                       <a:r>
@@ -9346,7 +9640,7 @@
                       </a:endParaRPr>
                     </a:p>
                   </a:txBody>
-                  <a:tcPr marL="73152" marR="73152" marT="45720" marB="45720" anchor="ctr">
+                  <a:tcPr marL="73152" marR="73152" anchor="ctr">
                     <a:lnL w="6350" cap="flat" cmpd="sng" algn="ctr">
                       <a:solidFill>
                         <a:srgbClr val="C9D3DF"/>
@@ -9390,7 +9684,7 @@
                     <a:bodyPr/>
                     <a:lstStyle/>
                     <a:p>
-                      <a:pPr indent="0" marL="0">
+                      <a:pPr marL="0" indent="0">
                         <a:buNone/>
                       </a:pPr>
                       <a:r>
@@ -9411,7 +9705,7 @@
                       </a:endParaRPr>
                     </a:p>
                   </a:txBody>
-                  <a:tcPr marL="73152" marR="73152" marT="45720" marB="45720" anchor="ctr">
+                  <a:tcPr marL="73152" marR="73152" anchor="ctr">
                     <a:lnL w="6350" cap="flat" cmpd="sng" algn="ctr">
                       <a:solidFill>
                         <a:srgbClr val="C9D3DF"/>
@@ -9455,7 +9749,7 @@
                     <a:bodyPr/>
                     <a:lstStyle/>
                     <a:p>
-                      <a:pPr indent="0" marL="0">
+                      <a:pPr marL="0" indent="0">
                         <a:buNone/>
                       </a:pPr>
                       <a:r>
@@ -9476,7 +9770,7 @@
                       </a:endParaRPr>
                     </a:p>
                   </a:txBody>
-                  <a:tcPr marL="73152" marR="73152" marT="45720" marB="45720" anchor="ctr">
+                  <a:tcPr marL="73152" marR="73152" anchor="ctr">
                     <a:lnL w="6350" cap="flat" cmpd="sng" algn="ctr">
                       <a:solidFill>
                         <a:srgbClr val="C9D3DF"/>
@@ -9515,6 +9809,11 @@
                     </a:lnB>
                   </a:tcPr>
                 </a:tc>
+                <a:extLst>
+                  <a:ext uri="{0D108BD9-81ED-4DB2-BD59-A6C34878D82A}">
+                    <a16:rowId xmlns:a16="http://schemas.microsoft.com/office/drawing/2014/main" val="10003"/>
+                  </a:ext>
+                </a:extLst>
               </a:tr>
               <a:tr h="475488">
                 <a:tc>
@@ -9522,7 +9821,7 @@
                     <a:bodyPr/>
                     <a:lstStyle/>
                     <a:p>
-                      <a:pPr indent="0" marL="0">
+                      <a:pPr marL="0" indent="0">
                         <a:buNone/>
                       </a:pPr>
                       <a:r>
@@ -9543,7 +9842,7 @@
                       </a:endParaRPr>
                     </a:p>
                   </a:txBody>
-                  <a:tcPr marL="73152" marR="73152" marT="45720" marB="45720" anchor="ctr">
+                  <a:tcPr marL="73152" marR="73152" anchor="ctr">
                     <a:lnL w="6350" cap="flat" cmpd="sng" algn="ctr">
                       <a:solidFill>
                         <a:srgbClr val="C9D3DF"/>
@@ -9587,7 +9886,7 @@
                     <a:bodyPr/>
                     <a:lstStyle/>
                     <a:p>
-                      <a:pPr indent="0" marL="0">
+                      <a:pPr marL="0" indent="0">
                         <a:buNone/>
                       </a:pPr>
                       <a:r>
@@ -9608,7 +9907,7 @@
                       </a:endParaRPr>
                     </a:p>
                   </a:txBody>
-                  <a:tcPr marL="73152" marR="73152" marT="45720" marB="45720" anchor="ctr">
+                  <a:tcPr marL="73152" marR="73152" anchor="ctr">
                     <a:lnL w="6350" cap="flat" cmpd="sng" algn="ctr">
                       <a:solidFill>
                         <a:srgbClr val="C9D3DF"/>
@@ -9652,7 +9951,7 @@
                     <a:bodyPr/>
                     <a:lstStyle/>
                     <a:p>
-                      <a:pPr indent="0" marL="0">
+                      <a:pPr marL="0" indent="0">
                         <a:buNone/>
                       </a:pPr>
                       <a:r>
@@ -9673,7 +9972,7 @@
                       </a:endParaRPr>
                     </a:p>
                   </a:txBody>
-                  <a:tcPr marL="73152" marR="73152" marT="45720" marB="45720" anchor="ctr">
+                  <a:tcPr marL="73152" marR="73152" anchor="ctr">
                     <a:lnL w="6350" cap="flat" cmpd="sng" algn="ctr">
                       <a:solidFill>
                         <a:srgbClr val="C9D3DF"/>
@@ -9717,7 +10016,7 @@
                     <a:bodyPr/>
                     <a:lstStyle/>
                     <a:p>
-                      <a:pPr indent="0" marL="0">
+                      <a:pPr marL="0" indent="0">
                         <a:buNone/>
                       </a:pPr>
                       <a:r>
@@ -9738,7 +10037,7 @@
                       </a:endParaRPr>
                     </a:p>
                   </a:txBody>
-                  <a:tcPr marL="73152" marR="73152" marT="45720" marB="45720" anchor="ctr">
+                  <a:tcPr marL="73152" marR="73152" anchor="ctr">
                     <a:lnL w="6350" cap="flat" cmpd="sng" algn="ctr">
                       <a:solidFill>
                         <a:srgbClr val="C9D3DF"/>
@@ -9782,7 +10081,7 @@
                     <a:bodyPr/>
                     <a:lstStyle/>
                     <a:p>
-                      <a:pPr indent="0" marL="0">
+                      <a:pPr marL="0" indent="0">
                         <a:buNone/>
                       </a:pPr>
                       <a:r>
@@ -9803,7 +10102,7 @@
                       </a:endParaRPr>
                     </a:p>
                   </a:txBody>
-                  <a:tcPr marL="73152" marR="73152" marT="45720" marB="45720" anchor="ctr">
+                  <a:tcPr marL="73152" marR="73152" anchor="ctr">
                     <a:lnL w="6350" cap="flat" cmpd="sng" algn="ctr">
                       <a:solidFill>
                         <a:srgbClr val="C9D3DF"/>
@@ -9842,6 +10141,11 @@
                     </a:lnB>
                   </a:tcPr>
                 </a:tc>
+                <a:extLst>
+                  <a:ext uri="{0D108BD9-81ED-4DB2-BD59-A6C34878D82A}">
+                    <a16:rowId xmlns:a16="http://schemas.microsoft.com/office/drawing/2014/main" val="10004"/>
+                  </a:ext>
+                </a:extLst>
               </a:tr>
             </a:tbl>
           </a:graphicData>
@@ -9873,6 +10177,13 @@
             <a:prstDash val="solid"/>
           </a:ln>
         </p:spPr>
+        <p:txBody>
+          <a:bodyPr/>
+          <a:lstStyle/>
+          <a:p>
+            <a:endParaRPr lang="pl-PL"/>
+          </a:p>
+        </p:txBody>
       </p:sp>
       <p:sp>
         <p:nvSpPr>
@@ -9898,17 +10209,24 @@
             <a:prstDash val="solid"/>
           </a:ln>
         </p:spPr>
+        <p:txBody>
+          <a:bodyPr/>
+          <a:lstStyle/>
+          <a:p>
+            <a:endParaRPr lang="pl-PL"/>
+          </a:p>
+        </p:txBody>
       </p:sp>
       <p:pic>
         <p:nvPicPr>
-          <p:cNvPr id="29" name="Kolejne miasto" descr="Kolejne miasto">    </p:cNvPr>
+          <p:cNvPr id="29" name="Kolejne miasto" descr="Kolejne miasto"/>
           <p:cNvPicPr>
             <a:picLocks noChangeAspect="1"/>
           </p:cNvPicPr>
           <p:nvPr/>
         </p:nvPicPr>
         <p:blipFill>
-          <a:blip r:embed="rId1"/>
+          <a:blip r:embed="rId3"/>
           <a:stretch>
             <a:fillRect/>
           </a:stretch>
@@ -9944,7 +10262,7 @@
           <a:bodyPr wrap="square" lIns="0" tIns="0" rIns="0" bIns="0" rtlCol="0" anchor="ctr"/>
           <a:lstStyle/>
           <a:p>
-            <a:pPr indent="0" marL="0">
+            <a:pPr marL="0" indent="0">
               <a:buNone/>
             </a:pPr>
             <a:r>
@@ -9980,7 +10298,7 @@
           <a:bodyPr wrap="square" lIns="0" tIns="0" rIns="0" bIns="0" rtlCol="0" anchor="t"/>
           <a:lstStyle/>
           <a:p>
-            <a:pPr indent="0" marL="0">
+            <a:pPr marL="0" indent="0">
               <a:buNone/>
             </a:pPr>
             <a:r>
@@ -10016,7 +10334,7 @@
           <a:bodyPr wrap="square" lIns="0" tIns="0" rIns="0" bIns="0" rtlCol="0" anchor="t"/>
           <a:lstStyle/>
           <a:p>
-            <a:pPr indent="0" marL="0">
+            <a:pPr marL="0" indent="0">
               <a:buNone/>
             </a:pPr>
             <a:r>
@@ -10033,7 +10351,7 @@
       </p:sp>
       <p:sp>
         <p:nvSpPr>
-          <p:cNvPr id="25" name="Slide Number Placeholder 0"/>
+          <p:cNvPr id="33" name="Slide Number Placeholder 0"/>
           <p:cNvSpPr>
             <a:spLocks noGrp="1"/>
           </p:cNvSpPr>
@@ -10051,7 +10369,7 @@
           </a:prstGeom>
           <a:extLst>
             <a:ext uri="{C572A759-6A51-4108-AA02-DFA0A04FC94B}">
-              <ma14:wrappingTextBoxFlag xmlns:ma14="http://schemas.microsoft.com/office/mac/drawingml/2011/main" val="0"/>
+              <ma14:wrappingTextBoxFlag xmlns:ma14="http://schemas.microsoft.com/office/mac/drawingml/2011/main" xmlns="" val="0"/>
             </a:ext>
           </a:extLst>
         </p:spPr>
@@ -10069,7 +10387,7 @@
           <a:p>
             <a:pPr algn="r"/>
             <a:fld id="{F7021451-1387-4CA6-816F-3879F97B5CBC}" type="slidenum">
-              <a:rPr b="0" lang="en-US"/>
+              <a:rPr lang="en-US" b="0"/>
               <a:t>7</a:t>
             </a:fld>
             <a:endParaRPr lang="en-US"/>
@@ -10104,9 +10422,11 @@
       <p:sp>
         <p:nvSpPr>
           <p:cNvPr id="2" name="Text 0"/>
-          <p:cNvSpPr/>
+          <p:cNvSpPr>
+            <a:spLocks noGrp="1"/>
+          </p:cNvSpPr>
           <p:nvPr>
-            <p:ph idx="100" type="title" hasCustomPrompt="1"/>
+            <p:ph type="title" idx="100" hasCustomPrompt="1"/>
           </p:nvPr>
         </p:nvSpPr>
         <p:spPr>
@@ -10124,7 +10444,7 @@
           <a:bodyPr wrap="square" lIns="0" tIns="0" rIns="0" bIns="0" rtlCol="0" anchor="ctr"/>
           <a:lstStyle/>
           <a:p>
-            <a:pPr algn="l" indent="0" marL="0">
+            <a:pPr marL="0" indent="0" algn="l">
               <a:buNone/>
             </a:pPr>
             <a:r>
@@ -10168,17 +10488,24 @@
             <a:prstDash val="solid"/>
           </a:ln>
         </p:spPr>
+        <p:txBody>
+          <a:bodyPr/>
+          <a:lstStyle/>
+          <a:p>
+            <a:endParaRPr lang="pl-PL"/>
+          </a:p>
+        </p:txBody>
       </p:sp>
       <p:pic>
         <p:nvPicPr>
-          <p:cNvPr id="4" name="Widget na stronie hotelu" descr="Widget BezProgu osadzony na przykładowej stronie hotelu: podsumowanie dopasowania i najważniejsze parametry Sukiennic">    </p:cNvPr>
+          <p:cNvPr id="4" name="Widget na stronie hotelu" descr="Widget BezProgu osadzony na przykładowej stronie hotelu: podsumowanie dopasowania i najważniejsze parametry Sukiennic"/>
           <p:cNvPicPr>
             <a:picLocks noChangeAspect="1"/>
           </p:cNvPicPr>
           <p:nvPr/>
         </p:nvPicPr>
         <p:blipFill>
-          <a:blip r:embed="rId1"/>
+          <a:blip r:embed="rId3"/>
           <a:stretch>
             <a:fillRect/>
           </a:stretch>
@@ -10214,7 +10541,7 @@
           <a:bodyPr wrap="square" lIns="0" tIns="0" rIns="0" bIns="0" rtlCol="0" anchor="t"/>
           <a:lstStyle/>
           <a:p>
-            <a:pPr indent="0" marL="0">
+            <a:pPr marL="0" indent="0">
               <a:buNone/>
             </a:pPr>
             <a:r>
@@ -10255,6 +10582,13 @@
             <a:prstDash val="solid"/>
           </a:ln>
         </p:spPr>
+        <p:txBody>
+          <a:bodyPr/>
+          <a:lstStyle/>
+          <a:p>
+            <a:endParaRPr lang="pl-PL"/>
+          </a:p>
+        </p:txBody>
       </p:sp>
       <p:sp>
         <p:nvSpPr>
@@ -10277,7 +10611,7 @@
           <a:bodyPr wrap="square" lIns="0" tIns="0" rIns="0" bIns="0" rtlCol="0" anchor="t"/>
           <a:lstStyle/>
           <a:p>
-            <a:pPr indent="0" marL="0">
+            <a:pPr marL="0" indent="0">
               <a:buNone/>
             </a:pPr>
             <a:r>
@@ -10313,7 +10647,7 @@
           <a:bodyPr wrap="square" lIns="0" tIns="0" rIns="0" bIns="0" rtlCol="0" anchor="t"/>
           <a:lstStyle/>
           <a:p>
-            <a:pPr indent="0" marL="0">
+            <a:pPr marL="0" indent="0">
               <a:buNone/>
             </a:pPr>
             <a:r>
@@ -10349,7 +10683,7 @@
           <a:bodyPr wrap="square" lIns="0" tIns="0" rIns="0" bIns="0" rtlCol="0" anchor="ctr"/>
           <a:lstStyle/>
           <a:p>
-            <a:pPr algn="r" indent="0" marL="0">
+            <a:pPr marL="0" indent="0" algn="r">
               <a:buNone/>
             </a:pPr>
             <a:r>
@@ -10390,6 +10724,13 @@
             <a:prstDash val="solid"/>
           </a:ln>
         </p:spPr>
+        <p:txBody>
+          <a:bodyPr/>
+          <a:lstStyle/>
+          <a:p>
+            <a:endParaRPr lang="pl-PL"/>
+          </a:p>
+        </p:txBody>
       </p:sp>
       <p:sp>
         <p:nvSpPr>
@@ -10412,7 +10753,7 @@
           <a:bodyPr wrap="square" lIns="0" tIns="0" rIns="0" bIns="0" rtlCol="0" anchor="t"/>
           <a:lstStyle/>
           <a:p>
-            <a:pPr indent="0" marL="0">
+            <a:pPr marL="0" indent="0">
               <a:buNone/>
             </a:pPr>
             <a:r>
@@ -10448,7 +10789,7 @@
           <a:bodyPr wrap="square" lIns="0" tIns="0" rIns="0" bIns="0" rtlCol="0" anchor="t"/>
           <a:lstStyle/>
           <a:p>
-            <a:pPr indent="0" marL="0">
+            <a:pPr marL="0" indent="0">
               <a:buNone/>
             </a:pPr>
             <a:r>
@@ -10484,7 +10825,7 @@
           <a:bodyPr wrap="square" lIns="0" tIns="0" rIns="0" bIns="0" rtlCol="0" anchor="ctr"/>
           <a:lstStyle/>
           <a:p>
-            <a:pPr algn="r" indent="0" marL="0">
+            <a:pPr marL="0" indent="0" algn="r">
               <a:buNone/>
             </a:pPr>
             <a:r>
@@ -10525,6 +10866,13 @@
             <a:prstDash val="solid"/>
           </a:ln>
         </p:spPr>
+        <p:txBody>
+          <a:bodyPr/>
+          <a:lstStyle/>
+          <a:p>
+            <a:endParaRPr lang="pl-PL"/>
+          </a:p>
+        </p:txBody>
       </p:sp>
       <p:sp>
         <p:nvSpPr>
@@ -10547,7 +10895,7 @@
           <a:bodyPr wrap="square" lIns="0" tIns="0" rIns="0" bIns="0" rtlCol="0" anchor="t"/>
           <a:lstStyle/>
           <a:p>
-            <a:pPr indent="0" marL="0">
+            <a:pPr marL="0" indent="0">
               <a:buNone/>
             </a:pPr>
             <a:r>
@@ -10583,7 +10931,7 @@
           <a:bodyPr wrap="square" lIns="0" tIns="0" rIns="0" bIns="0" rtlCol="0" anchor="t"/>
           <a:lstStyle/>
           <a:p>
-            <a:pPr indent="0" marL="0">
+            <a:pPr marL="0" indent="0">
               <a:buNone/>
             </a:pPr>
             <a:r>
@@ -10619,7 +10967,7 @@
           <a:bodyPr wrap="square" lIns="0" tIns="0" rIns="0" bIns="0" rtlCol="0" anchor="ctr"/>
           <a:lstStyle/>
           <a:p>
-            <a:pPr algn="r" indent="0" marL="0">
+            <a:pPr marL="0" indent="0" algn="r">
               <a:buNone/>
             </a:pPr>
             <a:r>
@@ -10660,6 +11008,13 @@
             <a:prstDash val="solid"/>
           </a:ln>
         </p:spPr>
+        <p:txBody>
+          <a:bodyPr/>
+          <a:lstStyle/>
+          <a:p>
+            <a:endParaRPr lang="pl-PL"/>
+          </a:p>
+        </p:txBody>
       </p:sp>
       <p:sp>
         <p:nvSpPr>
@@ -10682,7 +11037,7 @@
           <a:bodyPr wrap="square" lIns="0" tIns="0" rIns="0" bIns="0" rtlCol="0" anchor="t"/>
           <a:lstStyle/>
           <a:p>
-            <a:pPr indent="0" marL="0">
+            <a:pPr marL="0" indent="0">
               <a:buNone/>
             </a:pPr>
             <a:r>
@@ -10718,7 +11073,7 @@
           <a:bodyPr wrap="square" lIns="0" tIns="0" rIns="0" bIns="0" rtlCol="0" anchor="t"/>
           <a:lstStyle/>
           <a:p>
-            <a:pPr indent="0" marL="0">
+            <a:pPr marL="0" indent="0">
               <a:buNone/>
             </a:pPr>
             <a:r>
@@ -10754,7 +11109,7 @@
           <a:bodyPr wrap="square" lIns="0" tIns="0" rIns="0" bIns="0" rtlCol="0" anchor="ctr"/>
           <a:lstStyle/>
           <a:p>
-            <a:pPr algn="r" indent="0" marL="0">
+            <a:pPr marL="0" indent="0" algn="r">
               <a:buNone/>
             </a:pPr>
             <a:r>
@@ -10790,7 +11145,7 @@
           <a:bodyPr wrap="square" lIns="0" tIns="0" rIns="0" bIns="0" rtlCol="0" anchor="t"/>
           <a:lstStyle/>
           <a:p>
-            <a:pPr indent="0" marL="0">
+            <a:pPr marL="0" indent="0">
               <a:buNone/>
             </a:pPr>
             <a:r>
@@ -10807,14 +11162,14 @@
       </p:sp>
       <p:pic>
         <p:nvPicPr>
-          <p:cNvPr id="23" name="Gwarancja" descr="Gwarancja">    </p:cNvPr>
+          <p:cNvPr id="23" name="Gwarancja" descr="Gwarancja"/>
           <p:cNvPicPr>
             <a:picLocks noChangeAspect="1"/>
           </p:cNvPicPr>
           <p:nvPr/>
         </p:nvPicPr>
         <p:blipFill>
-          <a:blip r:embed="rId2"/>
+          <a:blip r:embed="rId4"/>
           <a:stretch>
             <a:fillRect/>
           </a:stretch>
@@ -10850,7 +11205,7 @@
           <a:bodyPr wrap="square" lIns="0" tIns="0" rIns="0" bIns="0" rtlCol="0" anchor="ctr"/>
           <a:lstStyle/>
           <a:p>
-            <a:pPr indent="0" marL="0">
+            <a:pPr marL="0" indent="0">
               <a:buNone/>
             </a:pPr>
             <a:r>
@@ -10886,7 +11241,7 @@
           <a:bodyPr wrap="square" lIns="0" tIns="0" rIns="0" bIns="0" rtlCol="0" anchor="t"/>
           <a:lstStyle/>
           <a:p>
-            <a:pPr indent="0" marL="0">
+            <a:pPr marL="0" indent="0">
               <a:buNone/>
             </a:pPr>
             <a:r>
@@ -10903,7 +11258,7 @@
       </p:sp>
       <p:sp>
         <p:nvSpPr>
-          <p:cNvPr id="25" name="Slide Number Placeholder 0"/>
+          <p:cNvPr id="26" name="Slide Number Placeholder 0"/>
           <p:cNvSpPr>
             <a:spLocks noGrp="1"/>
           </p:cNvSpPr>
@@ -10921,7 +11276,7 @@
           </a:prstGeom>
           <a:extLst>
             <a:ext uri="{C572A759-6A51-4108-AA02-DFA0A04FC94B}">
-              <ma14:wrappingTextBoxFlag xmlns:ma14="http://schemas.microsoft.com/office/mac/drawingml/2011/main" val="0"/>
+              <ma14:wrappingTextBoxFlag xmlns:ma14="http://schemas.microsoft.com/office/mac/drawingml/2011/main" xmlns="" val="0"/>
             </a:ext>
           </a:extLst>
         </p:spPr>
@@ -10939,7 +11294,7 @@
           <a:p>
             <a:pPr algn="r"/>
             <a:fld id="{F7021451-1387-4CA6-816F-3879F97B5CBC}" type="slidenum">
-              <a:rPr b="0" lang="en-US"/>
+              <a:rPr lang="en-US" b="0"/>
               <a:t>8</a:t>
             </a:fld>
             <a:endParaRPr lang="en-US"/>
@@ -10974,9 +11329,11 @@
       <p:sp>
         <p:nvSpPr>
           <p:cNvPr id="2" name="Text 0"/>
-          <p:cNvSpPr/>
+          <p:cNvSpPr>
+            <a:spLocks noGrp="1"/>
+          </p:cNvSpPr>
           <p:nvPr>
-            <p:ph idx="100" type="title" hasCustomPrompt="1"/>
+            <p:ph type="title" idx="100" hasCustomPrompt="1"/>
           </p:nvPr>
         </p:nvSpPr>
         <p:spPr>
@@ -10994,7 +11351,7 @@
           <a:bodyPr wrap="square" lIns="0" tIns="0" rIns="0" bIns="0" rtlCol="0" anchor="ctr"/>
           <a:lstStyle/>
           <a:p>
-            <a:pPr algn="l" indent="0" marL="0">
+            <a:pPr marL="0" indent="0" algn="l">
               <a:buNone/>
             </a:pPr>
             <a:r>
@@ -11034,6 +11391,13 @@
             <a:prstDash val="solid"/>
           </a:ln>
         </p:spPr>
+        <p:txBody>
+          <a:bodyPr/>
+          <a:lstStyle/>
+          <a:p>
+            <a:endParaRPr lang="pl-PL"/>
+          </a:p>
+        </p:txBody>
       </p:sp>
       <p:sp>
         <p:nvSpPr>
@@ -11059,6 +11423,13 @@
             <a:prstDash val="solid"/>
           </a:ln>
         </p:spPr>
+        <p:txBody>
+          <a:bodyPr/>
+          <a:lstStyle/>
+          <a:p>
+            <a:endParaRPr lang="pl-PL"/>
+          </a:p>
+        </p:txBody>
       </p:sp>
       <p:sp>
         <p:nvSpPr>
@@ -11071,6 +11442,51 @@
             <a:off x="548640" y="1399032"/>
             <a:ext cx="457200" cy="457200"/>
           </a:xfrm>
+          <a:prstGeom prst="ellipse">
+            <a:avLst/>
+          </a:prstGeom>
+          <a:solidFill>
+            <a:schemeClr val="accent1">
+              <a:lumMod val="20000"/>
+              <a:lumOff val="80000"/>
+            </a:schemeClr>
+          </a:solidFill>
+          <a:ln>
+            <a:solidFill>
+              <a:schemeClr val="tx2"/>
+            </a:solidFill>
+          </a:ln>
+        </p:spPr>
+        <p:txBody>
+          <a:bodyPr wrap="square" lIns="0" tIns="0" rIns="0" bIns="0" rtlCol="0" anchor="ctr"/>
+          <a:lstStyle/>
+          <a:p>
+            <a:pPr marL="0" indent="0" algn="ctr">
+              <a:buNone/>
+            </a:pPr>
+            <a:r>
+              <a:rPr lang="en-US" sz="1600" b="1" dirty="0">
+                <a:solidFill>
+                  <a:schemeClr val="tx2"/>
+                </a:solidFill>
+              </a:rPr>
+              <a:t>1</a:t>
+            </a:r>
+            <a:endParaRPr lang="en-US" sz="1600" dirty="0"/>
+          </a:p>
+        </p:txBody>
+      </p:sp>
+      <p:sp>
+        <p:nvSpPr>
+          <p:cNvPr id="6" name="Text 4"/>
+          <p:cNvSpPr txBox="1"/>
+          <p:nvPr/>
+        </p:nvSpPr>
+        <p:spPr>
+          <a:xfrm>
+            <a:off x="548640" y="1965960"/>
+            <a:ext cx="2499284" cy="365760"/>
+          </a:xfrm>
           <a:prstGeom prst="rect">
             <a:avLst/>
           </a:prstGeom>
@@ -11078,34 +11494,34 @@
           <a:ln/>
         </p:spPr>
         <p:txBody>
-          <a:bodyPr wrap="square" lIns="0" tIns="0" rIns="0" bIns="0" rtlCol="0" anchor="ctr"/>
-          <a:lstStyle/>
-          <a:p>
-            <a:pPr algn="ctr" indent="0" marL="0">
+          <a:bodyPr wrap="square" lIns="0" tIns="0" rIns="0" bIns="0" rtlCol="0" anchor="t"/>
+          <a:lstStyle/>
+          <a:p>
+            <a:pPr marL="0" indent="0">
               <a:buNone/>
             </a:pPr>
             <a:r>
-              <a:rPr lang="en-US" sz="1600" b="1" dirty="0">
+              <a:rPr lang="en-US" sz="1700" b="1" dirty="0">
                 <a:solidFill>
                   <a:schemeClr val="tx2"/>
                 </a:solidFill>
               </a:rPr>
-              <a:t>1</a:t>
-            </a:r>
-            <a:endParaRPr lang="en-US" sz="1600" dirty="0"/>
-          </a:p>
-        </p:txBody>
-      </p:sp>
-      <p:sp>
-        <p:nvSpPr>
-          <p:cNvPr id="6" name="Text 4"/>
+              <a:t>Hackathon</a:t>
+            </a:r>
+            <a:endParaRPr lang="en-US" sz="1700" dirty="0"/>
+          </a:p>
+        </p:txBody>
+      </p:sp>
+      <p:sp>
+        <p:nvSpPr>
+          <p:cNvPr id="7" name="Text 5"/>
           <p:cNvSpPr txBox="1"/>
           <p:nvPr/>
         </p:nvSpPr>
         <p:spPr>
           <a:xfrm>
-            <a:off x="548640" y="1965960"/>
-            <a:ext cx="2499284" cy="365760"/>
+            <a:off x="548640" y="2331720"/>
+            <a:ext cx="2453564" cy="685800"/>
           </a:xfrm>
           <a:prstGeom prst="rect">
             <a:avLst/>
@@ -11117,43 +11533,7 @@
           <a:bodyPr wrap="square" lIns="0" tIns="0" rIns="0" bIns="0" rtlCol="0" anchor="t"/>
           <a:lstStyle/>
           <a:p>
-            <a:pPr indent="0" marL="0">
-              <a:buNone/>
-            </a:pPr>
-            <a:r>
-              <a:rPr lang="en-US" sz="1700" b="1" dirty="0">
-                <a:solidFill>
-                  <a:schemeClr val="tx2"/>
-                </a:solidFill>
-              </a:rPr>
-              <a:t>Hackathon</a:t>
-            </a:r>
-            <a:endParaRPr lang="en-US" sz="1700" dirty="0"/>
-          </a:p>
-        </p:txBody>
-      </p:sp>
-      <p:sp>
-        <p:nvSpPr>
-          <p:cNvPr id="7" name="Text 5"/>
-          <p:cNvSpPr txBox="1"/>
-          <p:nvPr/>
-        </p:nvSpPr>
-        <p:spPr>
-          <a:xfrm>
-            <a:off x="548640" y="2331720"/>
-            <a:ext cx="2453564" cy="685800"/>
-          </a:xfrm>
-          <a:prstGeom prst="rect">
-            <a:avLst/>
-          </a:prstGeom>
-          <a:noFill/>
-          <a:ln/>
-        </p:spPr>
-        <p:txBody>
-          <a:bodyPr wrap="square" lIns="0" tIns="0" rIns="0" bIns="0" rtlCol="0" anchor="t"/>
-          <a:lstStyle/>
-          <a:p>
-            <a:pPr indent="0" marL="0">
+            <a:pPr marL="0" indent="0">
               <a:buNone/>
             </a:pPr>
             <a:r>
@@ -11192,6 +11572,13 @@
             <a:prstDash val="solid"/>
           </a:ln>
         </p:spPr>
+        <p:txBody>
+          <a:bodyPr/>
+          <a:lstStyle/>
+          <a:p>
+            <a:endParaRPr lang="pl-PL"/>
+          </a:p>
+        </p:txBody>
       </p:sp>
       <p:sp>
         <p:nvSpPr>
@@ -11214,7 +11601,7 @@
           <a:bodyPr wrap="square" lIns="0" tIns="0" rIns="0" bIns="0" rtlCol="0" anchor="ctr"/>
           <a:lstStyle/>
           <a:p>
-            <a:pPr algn="ctr" indent="0" marL="0">
+            <a:pPr marL="0" indent="0" algn="ctr">
               <a:buNone/>
             </a:pPr>
             <a:r>
@@ -11250,7 +11637,7 @@
           <a:bodyPr wrap="square" lIns="0" tIns="0" rIns="0" bIns="0" rtlCol="0" anchor="t"/>
           <a:lstStyle/>
           <a:p>
-            <a:pPr indent="0" marL="0">
+            <a:pPr marL="0" indent="0">
               <a:buNone/>
             </a:pPr>
             <a:r>
@@ -11286,7 +11673,7 @@
           <a:bodyPr wrap="square" lIns="0" tIns="0" rIns="0" bIns="0" rtlCol="0" anchor="t"/>
           <a:lstStyle/>
           <a:p>
-            <a:pPr indent="0" marL="0">
+            <a:pPr marL="0" indent="0">
               <a:buNone/>
             </a:pPr>
             <a:r>
@@ -11325,6 +11712,13 @@
             <a:prstDash val="solid"/>
           </a:ln>
         </p:spPr>
+        <p:txBody>
+          <a:bodyPr/>
+          <a:lstStyle/>
+          <a:p>
+            <a:endParaRPr lang="pl-PL"/>
+          </a:p>
+        </p:txBody>
       </p:sp>
       <p:sp>
         <p:nvSpPr>
@@ -11347,7 +11741,7 @@
           <a:bodyPr wrap="square" lIns="0" tIns="0" rIns="0" bIns="0" rtlCol="0" anchor="ctr"/>
           <a:lstStyle/>
           <a:p>
-            <a:pPr algn="ctr" indent="0" marL="0">
+            <a:pPr marL="0" indent="0" algn="ctr">
               <a:buNone/>
             </a:pPr>
             <a:r>
@@ -11383,7 +11777,7 @@
           <a:bodyPr wrap="square" lIns="0" tIns="0" rIns="0" bIns="0" rtlCol="0" anchor="t"/>
           <a:lstStyle/>
           <a:p>
-            <a:pPr indent="0" marL="0">
+            <a:pPr marL="0" indent="0">
               <a:buNone/>
             </a:pPr>
             <a:r>
@@ -11419,7 +11813,7 @@
           <a:bodyPr wrap="square" lIns="0" tIns="0" rIns="0" bIns="0" rtlCol="0" anchor="t"/>
           <a:lstStyle/>
           <a:p>
-            <a:pPr indent="0" marL="0">
+            <a:pPr marL="0" indent="0">
               <a:buNone/>
             </a:pPr>
             <a:r>
@@ -11458,6 +11852,13 @@
             <a:prstDash val="solid"/>
           </a:ln>
         </p:spPr>
+        <p:txBody>
+          <a:bodyPr/>
+          <a:lstStyle/>
+          <a:p>
+            <a:endParaRPr lang="pl-PL"/>
+          </a:p>
+        </p:txBody>
       </p:sp>
       <p:sp>
         <p:nvSpPr>
@@ -11480,7 +11881,7 @@
           <a:bodyPr wrap="square" lIns="0" tIns="0" rIns="0" bIns="0" rtlCol="0" anchor="ctr"/>
           <a:lstStyle/>
           <a:p>
-            <a:pPr algn="ctr" indent="0" marL="0">
+            <a:pPr marL="0" indent="0" algn="ctr">
               <a:buNone/>
             </a:pPr>
             <a:r>
@@ -11516,7 +11917,7 @@
           <a:bodyPr wrap="square" lIns="0" tIns="0" rIns="0" bIns="0" rtlCol="0" anchor="t"/>
           <a:lstStyle/>
           <a:p>
-            <a:pPr indent="0" marL="0">
+            <a:pPr marL="0" indent="0">
               <a:buNone/>
             </a:pPr>
             <a:r>
@@ -11552,7 +11953,7 @@
           <a:bodyPr wrap="square" lIns="0" tIns="0" rIns="0" bIns="0" rtlCol="0" anchor="t"/>
           <a:lstStyle/>
           <a:p>
-            <a:pPr indent="0" marL="0">
+            <a:pPr marL="0" indent="0">
               <a:buNone/>
             </a:pPr>
             <a:r>
@@ -11593,6 +11994,13 @@
             <a:prstDash val="solid"/>
           </a:ln>
         </p:spPr>
+        <p:txBody>
+          <a:bodyPr/>
+          <a:lstStyle/>
+          <a:p>
+            <a:endParaRPr lang="pl-PL"/>
+          </a:p>
+        </p:txBody>
       </p:sp>
       <p:sp>
         <p:nvSpPr>
@@ -11618,17 +12026,24 @@
             <a:prstDash val="solid"/>
           </a:ln>
         </p:spPr>
+        <p:txBody>
+          <a:bodyPr/>
+          <a:lstStyle/>
+          <a:p>
+            <a:endParaRPr lang="pl-PL"/>
+          </a:p>
+        </p:txBody>
       </p:sp>
       <p:pic>
         <p:nvPicPr>
-          <p:cNvPr id="22" name="Kto i za ile" descr="Kto i za ile">    </p:cNvPr>
+          <p:cNvPr id="22" name="Kto i za ile" descr="Kto i za ile"/>
           <p:cNvPicPr>
             <a:picLocks noChangeAspect="1"/>
           </p:cNvPicPr>
           <p:nvPr/>
         </p:nvPicPr>
         <p:blipFill>
-          <a:blip r:embed="rId1"/>
+          <a:blip r:embed="rId3"/>
           <a:stretch>
             <a:fillRect/>
           </a:stretch>
@@ -11664,7 +12079,7 @@
           <a:bodyPr wrap="square" lIns="0" tIns="0" rIns="0" bIns="0" rtlCol="0" anchor="ctr"/>
           <a:lstStyle/>
           <a:p>
-            <a:pPr indent="0" marL="0">
+            <a:pPr marL="0" indent="0">
               <a:buNone/>
             </a:pPr>
             <a:r>
@@ -11781,6 +12196,13 @@
             <a:prstDash val="solid"/>
           </a:ln>
         </p:spPr>
+        <p:txBody>
+          <a:bodyPr/>
+          <a:lstStyle/>
+          <a:p>
+            <a:endParaRPr lang="pl-PL"/>
+          </a:p>
+        </p:txBody>
       </p:sp>
       <p:sp>
         <p:nvSpPr>
@@ -11806,17 +12228,24 @@
             <a:prstDash val="solid"/>
           </a:ln>
         </p:spPr>
+        <p:txBody>
+          <a:bodyPr/>
+          <a:lstStyle/>
+          <a:p>
+            <a:endParaRPr lang="pl-PL"/>
+          </a:p>
+        </p:txBody>
       </p:sp>
       <p:pic>
         <p:nvPicPr>
-          <p:cNvPr id="27" name="Bezpieczeństwo i prywatność" descr="Bezpieczeństwo i prywatność">    </p:cNvPr>
+          <p:cNvPr id="27" name="Bezpieczeństwo i prywatność" descr="Bezpieczeństwo i prywatność"/>
           <p:cNvPicPr>
             <a:picLocks noChangeAspect="1"/>
           </p:cNvPicPr>
           <p:nvPr/>
         </p:nvPicPr>
         <p:blipFill>
-          <a:blip r:embed="rId2"/>
+          <a:blip r:embed="rId4"/>
           <a:stretch>
             <a:fillRect/>
           </a:stretch>
@@ -11852,7 +12281,7 @@
           <a:bodyPr wrap="square" lIns="0" tIns="0" rIns="0" bIns="0" rtlCol="0" anchor="ctr"/>
           <a:lstStyle/>
           <a:p>
-            <a:pPr indent="0" marL="0">
+            <a:pPr marL="0" indent="0">
               <a:buNone/>
             </a:pPr>
             <a:r>
@@ -11969,6 +12398,13 @@
             <a:prstDash val="solid"/>
           </a:ln>
         </p:spPr>
+        <p:txBody>
+          <a:bodyPr/>
+          <a:lstStyle/>
+          <a:p>
+            <a:endParaRPr lang="pl-PL"/>
+          </a:p>
+        </p:txBody>
       </p:sp>
       <p:sp>
         <p:nvSpPr>
@@ -11994,17 +12430,24 @@
             <a:prstDash val="solid"/>
           </a:ln>
         </p:spPr>
+        <p:txBody>
+          <a:bodyPr/>
+          <a:lstStyle/>
+          <a:p>
+            <a:endParaRPr lang="pl-PL"/>
+          </a:p>
+        </p:txBody>
       </p:sp>
       <p:pic>
         <p:nvPicPr>
-          <p:cNvPr id="32" name="Przenaszalność" descr="Przenaszalność">    </p:cNvPr>
+          <p:cNvPr id="32" name="Przenaszalność" descr="Przenaszalność"/>
           <p:cNvPicPr>
             <a:picLocks noChangeAspect="1"/>
           </p:cNvPicPr>
           <p:nvPr/>
         </p:nvPicPr>
         <p:blipFill>
-          <a:blip r:embed="rId3"/>
+          <a:blip r:embed="rId5"/>
           <a:stretch>
             <a:fillRect/>
           </a:stretch>
@@ -12040,7 +12483,7 @@
           <a:bodyPr wrap="square" lIns="0" tIns="0" rIns="0" bIns="0" rtlCol="0" anchor="ctr"/>
           <a:lstStyle/>
           <a:p>
-            <a:pPr indent="0" marL="0">
+            <a:pPr marL="0" indent="0">
               <a:buNone/>
             </a:pPr>
             <a:r>
@@ -12133,7 +12576,7 @@
       </p:sp>
       <p:sp>
         <p:nvSpPr>
-          <p:cNvPr id="25" name="Slide Number Placeholder 0"/>
+          <p:cNvPr id="35" name="Slide Number Placeholder 0"/>
           <p:cNvSpPr>
             <a:spLocks noGrp="1"/>
           </p:cNvSpPr>
@@ -12151,7 +12594,7 @@
           </a:prstGeom>
           <a:extLst>
             <a:ext uri="{C572A759-6A51-4108-AA02-DFA0A04FC94B}">
-              <ma14:wrappingTextBoxFlag xmlns:ma14="http://schemas.microsoft.com/office/mac/drawingml/2011/main" val="0"/>
+              <ma14:wrappingTextBoxFlag xmlns:ma14="http://schemas.microsoft.com/office/mac/drawingml/2011/main" xmlns="" val="0"/>
             </a:ext>
           </a:extLst>
         </p:spPr>
@@ -12169,7 +12612,7 @@
           <a:p>
             <a:pPr algn="r"/>
             <a:fld id="{F7021451-1387-4CA6-816F-3879F97B5CBC}" type="slidenum">
-              <a:rPr b="0" lang="en-US"/>
+              <a:rPr lang="en-US" b="0"/>
               <a:t>9</a:t>
             </a:fld>
             <a:endParaRPr lang="en-US"/>
@@ -12477,4 +12920,319 @@
     </a:ext>
   </a:extLst>
 </a:theme>
+</file>
+
+<file path=ppt/theme/theme2.xml><?xml version="1.0" encoding="utf-8"?>
+<a:theme xmlns:a="http://schemas.openxmlformats.org/drawingml/2006/main" name="Office Theme">
+  <a:themeElements>
+    <a:clrScheme name="Office">
+      <a:dk1>
+        <a:sysClr val="windowText" lastClr="000000"/>
+      </a:dk1>
+      <a:lt1>
+        <a:sysClr val="window" lastClr="FFFFFF"/>
+      </a:lt1>
+      <a:dk2>
+        <a:srgbClr val="0E2841"/>
+      </a:dk2>
+      <a:lt2>
+        <a:srgbClr val="E8E8E8"/>
+      </a:lt2>
+      <a:accent1>
+        <a:srgbClr val="156082"/>
+      </a:accent1>
+      <a:accent2>
+        <a:srgbClr val="E97132"/>
+      </a:accent2>
+      <a:accent3>
+        <a:srgbClr val="196B24"/>
+      </a:accent3>
+      <a:accent4>
+        <a:srgbClr val="0F9ED5"/>
+      </a:accent4>
+      <a:accent5>
+        <a:srgbClr val="A02B93"/>
+      </a:accent5>
+      <a:accent6>
+        <a:srgbClr val="4EA72E"/>
+      </a:accent6>
+      <a:hlink>
+        <a:srgbClr val="467886"/>
+      </a:hlink>
+      <a:folHlink>
+        <a:srgbClr val="96607D"/>
+      </a:folHlink>
+    </a:clrScheme>
+    <a:fontScheme name="Office">
+      <a:majorFont>
+        <a:latin typeface="Aptos Display" panose="02110004020202020204"/>
+        <a:ea typeface=""/>
+        <a:cs typeface=""/>
+        <a:font script="Jpan" typeface="游ゴシック Light"/>
+        <a:font script="Hang" typeface="맑은 고딕"/>
+        <a:font script="Hans" typeface="等线 Light"/>
+        <a:font script="Hant" typeface="新細明體"/>
+        <a:font script="Arab" typeface="Times New Roman"/>
+        <a:font script="Hebr" typeface="Times New Roman"/>
+        <a:font script="Thai" typeface="Angsana New"/>
+        <a:font script="Ethi" typeface="Nyala"/>
+        <a:font script="Beng" typeface="Vrinda"/>
+        <a:font script="Gujr" typeface="Shruti"/>
+        <a:font script="Khmr" typeface="MoolBoran"/>
+        <a:font script="Knda" typeface="Tunga"/>
+        <a:font script="Guru" typeface="Raavi"/>
+        <a:font script="Cans" typeface="Euphemia"/>
+        <a:font script="Cher" typeface="Plantagenet Cherokee"/>
+        <a:font script="Yiii" typeface="Microsoft Yi Baiti"/>
+        <a:font script="Tibt" typeface="Microsoft Himalaya"/>
+        <a:font script="Thaa" typeface="MV Boli"/>
+        <a:font script="Deva" typeface="Mangal"/>
+        <a:font script="Telu" typeface="Gautami"/>
+        <a:font script="Taml" typeface="Latha"/>
+        <a:font script="Syrc" typeface="Estrangelo Edessa"/>
+        <a:font script="Orya" typeface="Kalinga"/>
+        <a:font script="Mlym" typeface="Kartika"/>
+        <a:font script="Laoo" typeface="DokChampa"/>
+        <a:font script="Sinh" typeface="Iskoola Pota"/>
+        <a:font script="Mong" typeface="Mongolian Baiti"/>
+        <a:font script="Viet" typeface="Times New Roman"/>
+        <a:font script="Uigh" typeface="Microsoft Uighur"/>
+        <a:font script="Geor" typeface="Sylfaen"/>
+        <a:font script="Armn" typeface="Arial"/>
+        <a:font script="Bugi" typeface="Leelawadee UI"/>
+        <a:font script="Bopo" typeface="Microsoft JhengHei"/>
+        <a:font script="Java" typeface="Javanese Text"/>
+        <a:font script="Lisu" typeface="Segoe UI"/>
+        <a:font script="Mymr" typeface="Myanmar Text"/>
+        <a:font script="Nkoo" typeface="Ebrima"/>
+        <a:font script="Olck" typeface="Nirmala UI"/>
+        <a:font script="Osma" typeface="Ebrima"/>
+        <a:font script="Phag" typeface="Phagspa"/>
+        <a:font script="Syrn" typeface="Estrangelo Edessa"/>
+        <a:font script="Syrj" typeface="Estrangelo Edessa"/>
+        <a:font script="Syre" typeface="Estrangelo Edessa"/>
+        <a:font script="Sora" typeface="Nirmala UI"/>
+        <a:font script="Tale" typeface="Microsoft Tai Le"/>
+        <a:font script="Talu" typeface="Microsoft New Tai Lue"/>
+        <a:font script="Tfng" typeface="Ebrima"/>
+      </a:majorFont>
+      <a:minorFont>
+        <a:latin typeface="Aptos" panose="02110004020202020204"/>
+        <a:ea typeface=""/>
+        <a:cs typeface=""/>
+        <a:font script="Jpan" typeface="游ゴシック"/>
+        <a:font script="Hang" typeface="맑은 고딕"/>
+        <a:font script="Hans" typeface="等线"/>
+        <a:font script="Hant" typeface="新細明體"/>
+        <a:font script="Arab" typeface="Arial"/>
+        <a:font script="Hebr" typeface="Arial"/>
+        <a:font script="Thai" typeface="Cordia New"/>
+        <a:font script="Ethi" typeface="Nyala"/>
+        <a:font script="Beng" typeface="Vrinda"/>
+        <a:font script="Gujr" typeface="Shruti"/>
+        <a:font script="Khmr" typeface="DaunPenh"/>
+        <a:font script="Knda" typeface="Tunga"/>
+        <a:font script="Guru" typeface="Raavi"/>
+        <a:font script="Cans" typeface="Euphemia"/>
+        <a:font script="Cher" typeface="Plantagenet Cherokee"/>
+        <a:font script="Yiii" typeface="Microsoft Yi Baiti"/>
+        <a:font script="Tibt" typeface="Microsoft Himalaya"/>
+        <a:font script="Thaa" typeface="MV Boli"/>
+        <a:font script="Deva" typeface="Mangal"/>
+        <a:font script="Telu" typeface="Gautami"/>
+        <a:font script="Taml" typeface="Latha"/>
+        <a:font script="Syrc" typeface="Estrangelo Edessa"/>
+        <a:font script="Orya" typeface="Kalinga"/>
+        <a:font script="Mlym" typeface="Kartika"/>
+        <a:font script="Laoo" typeface="DokChampa"/>
+        <a:font script="Sinh" typeface="Iskoola Pota"/>
+        <a:font script="Mong" typeface="Mongolian Baiti"/>
+        <a:font script="Viet" typeface="Arial"/>
+        <a:font script="Uigh" typeface="Microsoft Uighur"/>
+        <a:font script="Geor" typeface="Sylfaen"/>
+        <a:font script="Armn" typeface="Arial"/>
+        <a:font script="Bugi" typeface="Leelawadee UI"/>
+        <a:font script="Bopo" typeface="Microsoft JhengHei"/>
+        <a:font script="Java" typeface="Javanese Text"/>
+        <a:font script="Lisu" typeface="Segoe UI"/>
+        <a:font script="Mymr" typeface="Myanmar Text"/>
+        <a:font script="Nkoo" typeface="Ebrima"/>
+        <a:font script="Olck" typeface="Nirmala UI"/>
+        <a:font script="Osma" typeface="Ebrima"/>
+        <a:font script="Phag" typeface="Phagspa"/>
+        <a:font script="Syrn" typeface="Estrangelo Edessa"/>
+        <a:font script="Syrj" typeface="Estrangelo Edessa"/>
+        <a:font script="Syre" typeface="Estrangelo Edessa"/>
+        <a:font script="Sora" typeface="Nirmala UI"/>
+        <a:font script="Tale" typeface="Microsoft Tai Le"/>
+        <a:font script="Talu" typeface="Microsoft New Tai Lue"/>
+        <a:font script="Tfng" typeface="Ebrima"/>
+      </a:minorFont>
+    </a:fontScheme>
+    <a:fmtScheme name="Office">
+      <a:fillStyleLst>
+        <a:solidFill>
+          <a:schemeClr val="phClr"/>
+        </a:solidFill>
+        <a:gradFill rotWithShape="1">
+          <a:gsLst>
+            <a:gs pos="0">
+              <a:schemeClr val="phClr">
+                <a:lumMod val="110000"/>
+                <a:satMod val="105000"/>
+                <a:tint val="67000"/>
+              </a:schemeClr>
+            </a:gs>
+            <a:gs pos="50000">
+              <a:schemeClr val="phClr">
+                <a:lumMod val="105000"/>
+                <a:satMod val="103000"/>
+                <a:tint val="73000"/>
+              </a:schemeClr>
+            </a:gs>
+            <a:gs pos="100000">
+              <a:schemeClr val="phClr">
+                <a:lumMod val="105000"/>
+                <a:satMod val="109000"/>
+                <a:tint val="81000"/>
+              </a:schemeClr>
+            </a:gs>
+          </a:gsLst>
+          <a:lin ang="5400000" scaled="0"/>
+        </a:gradFill>
+        <a:gradFill rotWithShape="1">
+          <a:gsLst>
+            <a:gs pos="0">
+              <a:schemeClr val="phClr">
+                <a:satMod val="103000"/>
+                <a:lumMod val="102000"/>
+                <a:tint val="94000"/>
+              </a:schemeClr>
+            </a:gs>
+            <a:gs pos="50000">
+              <a:schemeClr val="phClr">
+                <a:satMod val="110000"/>
+                <a:lumMod val="100000"/>
+                <a:shade val="100000"/>
+              </a:schemeClr>
+            </a:gs>
+            <a:gs pos="100000">
+              <a:schemeClr val="phClr">
+                <a:lumMod val="99000"/>
+                <a:satMod val="120000"/>
+                <a:shade val="78000"/>
+              </a:schemeClr>
+            </a:gs>
+          </a:gsLst>
+          <a:lin ang="5400000" scaled="0"/>
+        </a:gradFill>
+      </a:fillStyleLst>
+      <a:lnStyleLst>
+        <a:ln w="12700" cap="flat" cmpd="sng" algn="ctr">
+          <a:solidFill>
+            <a:schemeClr val="phClr"/>
+          </a:solidFill>
+          <a:prstDash val="solid"/>
+          <a:miter lim="800000"/>
+        </a:ln>
+        <a:ln w="19050" cap="flat" cmpd="sng" algn="ctr">
+          <a:solidFill>
+            <a:schemeClr val="phClr"/>
+          </a:solidFill>
+          <a:prstDash val="solid"/>
+          <a:miter lim="800000"/>
+        </a:ln>
+        <a:ln w="25400" cap="flat" cmpd="sng" algn="ctr">
+          <a:solidFill>
+            <a:schemeClr val="phClr"/>
+          </a:solidFill>
+          <a:prstDash val="solid"/>
+          <a:miter lim="800000"/>
+        </a:ln>
+      </a:lnStyleLst>
+      <a:effectStyleLst>
+        <a:effectStyle>
+          <a:effectLst/>
+        </a:effectStyle>
+        <a:effectStyle>
+          <a:effectLst/>
+        </a:effectStyle>
+        <a:effectStyle>
+          <a:effectLst>
+            <a:outerShdw blurRad="57150" dist="19050" dir="5400000" algn="ctr" rotWithShape="0">
+              <a:srgbClr val="000000">
+                <a:alpha val="63000"/>
+              </a:srgbClr>
+            </a:outerShdw>
+          </a:effectLst>
+        </a:effectStyle>
+      </a:effectStyleLst>
+      <a:bgFillStyleLst>
+        <a:solidFill>
+          <a:schemeClr val="phClr"/>
+        </a:solidFill>
+        <a:solidFill>
+          <a:schemeClr val="phClr">
+            <a:tint val="95000"/>
+            <a:satMod val="170000"/>
+          </a:schemeClr>
+        </a:solidFill>
+        <a:gradFill rotWithShape="1">
+          <a:gsLst>
+            <a:gs pos="0">
+              <a:schemeClr val="phClr">
+                <a:tint val="93000"/>
+                <a:satMod val="150000"/>
+                <a:shade val="98000"/>
+                <a:lumMod val="102000"/>
+              </a:schemeClr>
+            </a:gs>
+            <a:gs pos="50000">
+              <a:schemeClr val="phClr">
+                <a:tint val="98000"/>
+                <a:satMod val="130000"/>
+                <a:shade val="90000"/>
+                <a:lumMod val="103000"/>
+              </a:schemeClr>
+            </a:gs>
+            <a:gs pos="100000">
+              <a:schemeClr val="phClr">
+                <a:shade val="63000"/>
+                <a:satMod val="120000"/>
+              </a:schemeClr>
+            </a:gs>
+          </a:gsLst>
+          <a:lin ang="5400000" scaled="0"/>
+        </a:gradFill>
+      </a:bgFillStyleLst>
+    </a:fmtScheme>
+  </a:themeElements>
+  <a:objectDefaults>
+    <a:lnDef>
+      <a:spPr/>
+      <a:bodyPr/>
+      <a:lstStyle/>
+      <a:style>
+        <a:lnRef idx="2">
+          <a:schemeClr val="accent1"/>
+        </a:lnRef>
+        <a:fillRef idx="0">
+          <a:schemeClr val="accent1"/>
+        </a:fillRef>
+        <a:effectRef idx="1">
+          <a:schemeClr val="accent1"/>
+        </a:effectRef>
+        <a:fontRef idx="minor">
+          <a:schemeClr val="tx1"/>
+        </a:fontRef>
+      </a:style>
+    </a:lnDef>
+  </a:objectDefaults>
+  <a:extraClrSchemeLst/>
+  <a:extLst>
+    <a:ext uri="{05A4C25C-085E-4340-85A3-A5531E510DB2}">
+      <thm15:themeFamily xmlns:thm15="http://schemas.microsoft.com/office/thememl/2012/main" name="Office Theme" id="{2E142A2C-CD16-42D6-873A-C26D2A0506FA}" vid="{1BDDFF52-6CD6-40A5-AB3C-68EB2F1E4D0A}"/>
+    </a:ext>
+  </a:extLst>
+</a:theme>
 </file>